--- a/resources/Chapter_2_Cybersecurity_Teaching.pptx
+++ b/resources/Chapter_2_Cybersecurity_Teaching.pptx
@@ -5,52 +5,52 @@
     <p:sldMasterId id="2147483648" r:id="rId1"/>
   </p:sldMasterIdLst>
   <p:sldIdLst>
-    <p:sldId id="256" r:id="rId7"/>
-    <p:sldId id="257" r:id="rId8"/>
-    <p:sldId id="258" r:id="rId9"/>
-    <p:sldId id="259" r:id="rId10"/>
-    <p:sldId id="260" r:id="rId11"/>
-    <p:sldId id="261" r:id="rId12"/>
-    <p:sldId id="262" r:id="rId13"/>
-    <p:sldId id="263" r:id="rId14"/>
-    <p:sldId id="264" r:id="rId15"/>
-    <p:sldId id="265" r:id="rId16"/>
-    <p:sldId id="266" r:id="rId17"/>
-    <p:sldId id="267" r:id="rId18"/>
-    <p:sldId id="268" r:id="rId19"/>
-    <p:sldId id="269" r:id="rId20"/>
-    <p:sldId id="270" r:id="rId21"/>
-    <p:sldId id="271" r:id="rId22"/>
-    <p:sldId id="272" r:id="rId23"/>
-    <p:sldId id="273" r:id="rId24"/>
-    <p:sldId id="274" r:id="rId25"/>
-    <p:sldId id="275" r:id="rId26"/>
-    <p:sldId id="276" r:id="rId27"/>
-    <p:sldId id="277" r:id="rId28"/>
-    <p:sldId id="278" r:id="rId29"/>
-    <p:sldId id="279" r:id="rId30"/>
-    <p:sldId id="280" r:id="rId31"/>
-    <p:sldId id="281" r:id="rId32"/>
-    <p:sldId id="282" r:id="rId33"/>
-    <p:sldId id="283" r:id="rId34"/>
-    <p:sldId id="284" r:id="rId35"/>
-    <p:sldId id="285" r:id="rId36"/>
-    <p:sldId id="286" r:id="rId37"/>
-    <p:sldId id="287" r:id="rId38"/>
-    <p:sldId id="288" r:id="rId39"/>
-    <p:sldId id="289" r:id="rId40"/>
-    <p:sldId id="290" r:id="rId41"/>
-    <p:sldId id="291" r:id="rId42"/>
-    <p:sldId id="292" r:id="rId43"/>
-    <p:sldId id="293" r:id="rId44"/>
-    <p:sldId id="294" r:id="rId45"/>
-    <p:sldId id="295" r:id="rId46"/>
-    <p:sldId id="296" r:id="rId47"/>
-    <p:sldId id="297" r:id="rId48"/>
-    <p:sldId id="298" r:id="rId49"/>
-    <p:sldId id="299" r:id="rId50"/>
+    <p:sldId id="256" r:id="rId2"/>
+    <p:sldId id="257" r:id="rId3"/>
+    <p:sldId id="258" r:id="rId4"/>
+    <p:sldId id="259" r:id="rId5"/>
+    <p:sldId id="260" r:id="rId6"/>
+    <p:sldId id="261" r:id="rId7"/>
+    <p:sldId id="262" r:id="rId8"/>
+    <p:sldId id="263" r:id="rId9"/>
+    <p:sldId id="264" r:id="rId10"/>
+    <p:sldId id="265" r:id="rId11"/>
+    <p:sldId id="266" r:id="rId12"/>
+    <p:sldId id="267" r:id="rId13"/>
+    <p:sldId id="268" r:id="rId14"/>
+    <p:sldId id="269" r:id="rId15"/>
+    <p:sldId id="270" r:id="rId16"/>
+    <p:sldId id="271" r:id="rId17"/>
+    <p:sldId id="272" r:id="rId18"/>
+    <p:sldId id="273" r:id="rId19"/>
+    <p:sldId id="274" r:id="rId20"/>
+    <p:sldId id="275" r:id="rId21"/>
+    <p:sldId id="276" r:id="rId22"/>
+    <p:sldId id="277" r:id="rId23"/>
+    <p:sldId id="278" r:id="rId24"/>
+    <p:sldId id="279" r:id="rId25"/>
+    <p:sldId id="280" r:id="rId26"/>
+    <p:sldId id="281" r:id="rId27"/>
+    <p:sldId id="282" r:id="rId28"/>
+    <p:sldId id="283" r:id="rId29"/>
+    <p:sldId id="284" r:id="rId30"/>
+    <p:sldId id="285" r:id="rId31"/>
+    <p:sldId id="286" r:id="rId32"/>
+    <p:sldId id="287" r:id="rId33"/>
+    <p:sldId id="288" r:id="rId34"/>
+    <p:sldId id="289" r:id="rId35"/>
+    <p:sldId id="290" r:id="rId36"/>
+    <p:sldId id="291" r:id="rId37"/>
+    <p:sldId id="292" r:id="rId38"/>
+    <p:sldId id="293" r:id="rId39"/>
+    <p:sldId id="294" r:id="rId40"/>
+    <p:sldId id="295" r:id="rId41"/>
+    <p:sldId id="296" r:id="rId42"/>
+    <p:sldId id="297" r:id="rId43"/>
+    <p:sldId id="298" r:id="rId44"/>
+    <p:sldId id="299" r:id="rId45"/>
   </p:sldIdLst>
-  <p:sldSz cx="12191695" cy="6858000" type="screen4x3"/>
+  <p:sldSz cx="12192000" cy="6858000"/>
   <p:notesSz cx="6858000" cy="9144000"/>
   <p:defaultTextStyle>
     <a:defPPr>
@@ -147,6 +147,22 @@
       </a:defRPr>
     </a:lvl9pPr>
   </p:defaultTextStyle>
+  <p:extLst>
+    <p:ext uri="{EFAFB233-063F-42B5-8137-9DF3F51BA10A}">
+      <p15:sldGuideLst xmlns:p15="http://schemas.microsoft.com/office/powerpoint/2012/main">
+        <p15:guide id="1" orient="horz" pos="2160">
+          <p15:clr>
+            <a:srgbClr val="A4A3A4"/>
+          </p15:clr>
+        </p15:guide>
+        <p15:guide id="2" pos="2880">
+          <p15:clr>
+            <a:srgbClr val="A4A3A4"/>
+          </p15:clr>
+        </p15:guide>
+      </p15:sldGuideLst>
+    </p:ext>
+  </p:extLst>
 </p:presentation>
 </file>
 
@@ -188,10 +204,9 @@
           <a:lstStyle/>
           <a:p>
             <a:r>
-              <a:rPr lang="en-US" smtClean="0"/>
+              <a:rPr lang="en-US"/>
               <a:t>Click to edit Master title style</a:t>
             </a:r>
-            <a:endParaRPr lang="en-US"/>
           </a:p>
         </p:txBody>
       </p:sp>
@@ -307,10 +322,9 @@
           </a:lstStyle>
           <a:p>
             <a:r>
-              <a:rPr lang="en-US" smtClean="0"/>
+              <a:rPr lang="en-US"/>
               <a:t>Click to edit Master subtitle style</a:t>
             </a:r>
-            <a:endParaRPr lang="en-US"/>
           </a:p>
         </p:txBody>
       </p:sp>
@@ -331,7 +345,7 @@
           <a:p>
             <a:fld id="{5BCAD085-E8A6-8845-BD4E-CB4CCA059FC4}" type="datetimeFigureOut">
               <a:rPr lang="en-US" smtClean="0"/>
-              <a:t>1/27/13</a:t>
+              <a:t>10/23/2026</a:t>
             </a:fld>
             <a:endParaRPr lang="en-US"/>
           </a:p>
@@ -425,10 +439,9 @@
           <a:lstStyle/>
           <a:p>
             <a:r>
-              <a:rPr lang="en-US" smtClean="0"/>
+              <a:rPr lang="en-US"/>
               <a:t>Click to edit Master title style</a:t>
             </a:r>
-            <a:endParaRPr lang="en-US"/>
           </a:p>
         </p:txBody>
       </p:sp>
@@ -449,38 +462,37 @@
           <a:p>
             <a:pPr lvl="0"/>
             <a:r>
-              <a:rPr lang="en-US" smtClean="0"/>
+              <a:rPr lang="en-US"/>
               <a:t>Click to edit Master text styles</a:t>
             </a:r>
           </a:p>
           <a:p>
             <a:pPr lvl="1"/>
             <a:r>
-              <a:rPr lang="en-US" smtClean="0"/>
+              <a:rPr lang="en-US"/>
               <a:t>Second level</a:t>
             </a:r>
           </a:p>
           <a:p>
             <a:pPr lvl="2"/>
             <a:r>
-              <a:rPr lang="en-US" smtClean="0"/>
+              <a:rPr lang="en-US"/>
               <a:t>Third level</a:t>
             </a:r>
           </a:p>
           <a:p>
             <a:pPr lvl="3"/>
             <a:r>
-              <a:rPr lang="en-US" smtClean="0"/>
+              <a:rPr lang="en-US"/>
               <a:t>Fourth level</a:t>
             </a:r>
           </a:p>
           <a:p>
             <a:pPr lvl="4"/>
             <a:r>
-              <a:rPr lang="en-US" smtClean="0"/>
+              <a:rPr lang="en-US"/>
               <a:t>Fifth level</a:t>
             </a:r>
-            <a:endParaRPr lang="en-US"/>
           </a:p>
         </p:txBody>
       </p:sp>
@@ -501,7 +513,7 @@
           <a:p>
             <a:fld id="{5BCAD085-E8A6-8845-BD4E-CB4CCA059FC4}" type="datetimeFigureOut">
               <a:rPr lang="en-US" smtClean="0"/>
-              <a:t>1/27/13</a:t>
+              <a:t>10/23/2026</a:t>
             </a:fld>
             <a:endParaRPr lang="en-US"/>
           </a:p>
@@ -600,10 +612,9 @@
           <a:lstStyle/>
           <a:p>
             <a:r>
-              <a:rPr lang="en-US" smtClean="0"/>
+              <a:rPr lang="en-US"/>
               <a:t>Click to edit Master title style</a:t>
             </a:r>
-            <a:endParaRPr lang="en-US"/>
           </a:p>
         </p:txBody>
       </p:sp>
@@ -629,38 +640,37 @@
           <a:p>
             <a:pPr lvl="0"/>
             <a:r>
-              <a:rPr lang="en-US" smtClean="0"/>
+              <a:rPr lang="en-US"/>
               <a:t>Click to edit Master text styles</a:t>
             </a:r>
           </a:p>
           <a:p>
             <a:pPr lvl="1"/>
             <a:r>
-              <a:rPr lang="en-US" smtClean="0"/>
+              <a:rPr lang="en-US"/>
               <a:t>Second level</a:t>
             </a:r>
           </a:p>
           <a:p>
             <a:pPr lvl="2"/>
             <a:r>
-              <a:rPr lang="en-US" smtClean="0"/>
+              <a:rPr lang="en-US"/>
               <a:t>Third level</a:t>
             </a:r>
           </a:p>
           <a:p>
             <a:pPr lvl="3"/>
             <a:r>
-              <a:rPr lang="en-US" smtClean="0"/>
+              <a:rPr lang="en-US"/>
               <a:t>Fourth level</a:t>
             </a:r>
           </a:p>
           <a:p>
             <a:pPr lvl="4"/>
             <a:r>
-              <a:rPr lang="en-US" smtClean="0"/>
+              <a:rPr lang="en-US"/>
               <a:t>Fifth level</a:t>
             </a:r>
-            <a:endParaRPr lang="en-US"/>
           </a:p>
         </p:txBody>
       </p:sp>
@@ -681,7 +691,7 @@
           <a:p>
             <a:fld id="{5BCAD085-E8A6-8845-BD4E-CB4CCA059FC4}" type="datetimeFigureOut">
               <a:rPr lang="en-US" smtClean="0"/>
-              <a:t>1/27/13</a:t>
+              <a:t>10/23/2026</a:t>
             </a:fld>
             <a:endParaRPr lang="en-US"/>
           </a:p>
@@ -775,10 +785,9 @@
           <a:lstStyle/>
           <a:p>
             <a:r>
-              <a:rPr lang="en-US" smtClean="0"/>
+              <a:rPr lang="en-US"/>
               <a:t>Click to edit Master title style</a:t>
             </a:r>
-            <a:endParaRPr lang="en-US"/>
           </a:p>
         </p:txBody>
       </p:sp>
@@ -799,38 +808,37 @@
           <a:p>
             <a:pPr lvl="0"/>
             <a:r>
-              <a:rPr lang="en-US" smtClean="0"/>
+              <a:rPr lang="en-US"/>
               <a:t>Click to edit Master text styles</a:t>
             </a:r>
           </a:p>
           <a:p>
             <a:pPr lvl="1"/>
             <a:r>
-              <a:rPr lang="en-US" smtClean="0"/>
+              <a:rPr lang="en-US"/>
               <a:t>Second level</a:t>
             </a:r>
           </a:p>
           <a:p>
             <a:pPr lvl="2"/>
             <a:r>
-              <a:rPr lang="en-US" smtClean="0"/>
+              <a:rPr lang="en-US"/>
               <a:t>Third level</a:t>
             </a:r>
           </a:p>
           <a:p>
             <a:pPr lvl="3"/>
             <a:r>
-              <a:rPr lang="en-US" smtClean="0"/>
+              <a:rPr lang="en-US"/>
               <a:t>Fourth level</a:t>
             </a:r>
           </a:p>
           <a:p>
             <a:pPr lvl="4"/>
             <a:r>
-              <a:rPr lang="en-US" smtClean="0"/>
+              <a:rPr lang="en-US"/>
               <a:t>Fifth level</a:t>
             </a:r>
-            <a:endParaRPr lang="en-US"/>
           </a:p>
         </p:txBody>
       </p:sp>
@@ -851,7 +859,7 @@
           <a:p>
             <a:fld id="{5BCAD085-E8A6-8845-BD4E-CB4CCA059FC4}" type="datetimeFigureOut">
               <a:rPr lang="en-US" smtClean="0"/>
-              <a:t>1/27/13</a:t>
+              <a:t>10/23/2026</a:t>
             </a:fld>
             <a:endParaRPr lang="en-US"/>
           </a:p>
@@ -954,10 +962,9 @@
           </a:lstStyle>
           <a:p>
             <a:r>
-              <a:rPr lang="en-US" smtClean="0"/>
+              <a:rPr lang="en-US"/>
               <a:t>Click to edit Master title style</a:t>
             </a:r>
-            <a:endParaRPr lang="en-US"/>
           </a:p>
         </p:txBody>
       </p:sp>
@@ -1074,7 +1081,7 @@
           <a:p>
             <a:pPr lvl="0"/>
             <a:r>
-              <a:rPr lang="en-US" smtClean="0"/>
+              <a:rPr lang="en-US"/>
               <a:t>Click to edit Master text styles</a:t>
             </a:r>
           </a:p>
@@ -1097,7 +1104,7 @@
           <a:p>
             <a:fld id="{5BCAD085-E8A6-8845-BD4E-CB4CCA059FC4}" type="datetimeFigureOut">
               <a:rPr lang="en-US" smtClean="0"/>
-              <a:t>1/27/13</a:t>
+              <a:t>10/23/2026</a:t>
             </a:fld>
             <a:endParaRPr lang="en-US"/>
           </a:p>
@@ -1191,10 +1198,9 @@
           <a:lstStyle/>
           <a:p>
             <a:r>
-              <a:rPr lang="en-US" smtClean="0"/>
+              <a:rPr lang="en-US"/>
               <a:t>Click to edit Master title style</a:t>
             </a:r>
-            <a:endParaRPr lang="en-US"/>
           </a:p>
         </p:txBody>
       </p:sp>
@@ -1248,38 +1254,37 @@
           <a:p>
             <a:pPr lvl="0"/>
             <a:r>
-              <a:rPr lang="en-US" smtClean="0"/>
+              <a:rPr lang="en-US"/>
               <a:t>Click to edit Master text styles</a:t>
             </a:r>
           </a:p>
           <a:p>
             <a:pPr lvl="1"/>
             <a:r>
-              <a:rPr lang="en-US" smtClean="0"/>
+              <a:rPr lang="en-US"/>
               <a:t>Second level</a:t>
             </a:r>
           </a:p>
           <a:p>
             <a:pPr lvl="2"/>
             <a:r>
-              <a:rPr lang="en-US" smtClean="0"/>
+              <a:rPr lang="en-US"/>
               <a:t>Third level</a:t>
             </a:r>
           </a:p>
           <a:p>
             <a:pPr lvl="3"/>
             <a:r>
-              <a:rPr lang="en-US" smtClean="0"/>
+              <a:rPr lang="en-US"/>
               <a:t>Fourth level</a:t>
             </a:r>
           </a:p>
           <a:p>
             <a:pPr lvl="4"/>
             <a:r>
-              <a:rPr lang="en-US" smtClean="0"/>
+              <a:rPr lang="en-US"/>
               <a:t>Fifth level</a:t>
             </a:r>
-            <a:endParaRPr lang="en-US"/>
           </a:p>
         </p:txBody>
       </p:sp>
@@ -1333,38 +1338,37 @@
           <a:p>
             <a:pPr lvl="0"/>
             <a:r>
-              <a:rPr lang="en-US" smtClean="0"/>
+              <a:rPr lang="en-US"/>
               <a:t>Click to edit Master text styles</a:t>
             </a:r>
           </a:p>
           <a:p>
             <a:pPr lvl="1"/>
             <a:r>
-              <a:rPr lang="en-US" smtClean="0"/>
+              <a:rPr lang="en-US"/>
               <a:t>Second level</a:t>
             </a:r>
           </a:p>
           <a:p>
             <a:pPr lvl="2"/>
             <a:r>
-              <a:rPr lang="en-US" smtClean="0"/>
+              <a:rPr lang="en-US"/>
               <a:t>Third level</a:t>
             </a:r>
           </a:p>
           <a:p>
             <a:pPr lvl="3"/>
             <a:r>
-              <a:rPr lang="en-US" smtClean="0"/>
+              <a:rPr lang="en-US"/>
               <a:t>Fourth level</a:t>
             </a:r>
           </a:p>
           <a:p>
             <a:pPr lvl="4"/>
             <a:r>
-              <a:rPr lang="en-US" smtClean="0"/>
+              <a:rPr lang="en-US"/>
               <a:t>Fifth level</a:t>
             </a:r>
-            <a:endParaRPr lang="en-US"/>
           </a:p>
         </p:txBody>
       </p:sp>
@@ -1385,7 +1389,7 @@
           <a:p>
             <a:fld id="{5BCAD085-E8A6-8845-BD4E-CB4CCA059FC4}" type="datetimeFigureOut">
               <a:rPr lang="en-US" smtClean="0"/>
-              <a:t>1/27/13</a:t>
+              <a:t>10/23/2026</a:t>
             </a:fld>
             <a:endParaRPr lang="en-US"/>
           </a:p>
@@ -1483,10 +1487,9 @@
           </a:lstStyle>
           <a:p>
             <a:r>
-              <a:rPr lang="en-US" smtClean="0"/>
+              <a:rPr lang="en-US"/>
               <a:t>Click to edit Master title style</a:t>
             </a:r>
-            <a:endParaRPr lang="en-US"/>
           </a:p>
         </p:txBody>
       </p:sp>
@@ -1549,7 +1552,7 @@
           <a:p>
             <a:pPr lvl="0"/>
             <a:r>
-              <a:rPr lang="en-US" smtClean="0"/>
+              <a:rPr lang="en-US"/>
               <a:t>Click to edit Master text styles</a:t>
             </a:r>
           </a:p>
@@ -1605,38 +1608,37 @@
           <a:p>
             <a:pPr lvl="0"/>
             <a:r>
-              <a:rPr lang="en-US" smtClean="0"/>
+              <a:rPr lang="en-US"/>
               <a:t>Click to edit Master text styles</a:t>
             </a:r>
           </a:p>
           <a:p>
             <a:pPr lvl="1"/>
             <a:r>
-              <a:rPr lang="en-US" smtClean="0"/>
+              <a:rPr lang="en-US"/>
               <a:t>Second level</a:t>
             </a:r>
           </a:p>
           <a:p>
             <a:pPr lvl="2"/>
             <a:r>
-              <a:rPr lang="en-US" smtClean="0"/>
+              <a:rPr lang="en-US"/>
               <a:t>Third level</a:t>
             </a:r>
           </a:p>
           <a:p>
             <a:pPr lvl="3"/>
             <a:r>
-              <a:rPr lang="en-US" smtClean="0"/>
+              <a:rPr lang="en-US"/>
               <a:t>Fourth level</a:t>
             </a:r>
           </a:p>
           <a:p>
             <a:pPr lvl="4"/>
             <a:r>
-              <a:rPr lang="en-US" smtClean="0"/>
+              <a:rPr lang="en-US"/>
               <a:t>Fifth level</a:t>
             </a:r>
-            <a:endParaRPr lang="en-US"/>
           </a:p>
         </p:txBody>
       </p:sp>
@@ -1699,7 +1701,7 @@
           <a:p>
             <a:pPr lvl="0"/>
             <a:r>
-              <a:rPr lang="en-US" smtClean="0"/>
+              <a:rPr lang="en-US"/>
               <a:t>Click to edit Master text styles</a:t>
             </a:r>
           </a:p>
@@ -1755,38 +1757,37 @@
           <a:p>
             <a:pPr lvl="0"/>
             <a:r>
-              <a:rPr lang="en-US" smtClean="0"/>
+              <a:rPr lang="en-US"/>
               <a:t>Click to edit Master text styles</a:t>
             </a:r>
           </a:p>
           <a:p>
             <a:pPr lvl="1"/>
             <a:r>
-              <a:rPr lang="en-US" smtClean="0"/>
+              <a:rPr lang="en-US"/>
               <a:t>Second level</a:t>
             </a:r>
           </a:p>
           <a:p>
             <a:pPr lvl="2"/>
             <a:r>
-              <a:rPr lang="en-US" smtClean="0"/>
+              <a:rPr lang="en-US"/>
               <a:t>Third level</a:t>
             </a:r>
           </a:p>
           <a:p>
             <a:pPr lvl="3"/>
             <a:r>
-              <a:rPr lang="en-US" smtClean="0"/>
+              <a:rPr lang="en-US"/>
               <a:t>Fourth level</a:t>
             </a:r>
           </a:p>
           <a:p>
             <a:pPr lvl="4"/>
             <a:r>
-              <a:rPr lang="en-US" smtClean="0"/>
+              <a:rPr lang="en-US"/>
               <a:t>Fifth level</a:t>
             </a:r>
-            <a:endParaRPr lang="en-US"/>
           </a:p>
         </p:txBody>
       </p:sp>
@@ -1807,7 +1808,7 @@
           <a:p>
             <a:fld id="{5BCAD085-E8A6-8845-BD4E-CB4CCA059FC4}" type="datetimeFigureOut">
               <a:rPr lang="en-US" smtClean="0"/>
-              <a:t>1/27/13</a:t>
+              <a:t>10/23/2026</a:t>
             </a:fld>
             <a:endParaRPr lang="en-US"/>
           </a:p>
@@ -1901,10 +1902,9 @@
           <a:lstStyle/>
           <a:p>
             <a:r>
-              <a:rPr lang="en-US" smtClean="0"/>
+              <a:rPr lang="en-US"/>
               <a:t>Click to edit Master title style</a:t>
             </a:r>
-            <a:endParaRPr lang="en-US"/>
           </a:p>
         </p:txBody>
       </p:sp>
@@ -1925,7 +1925,7 @@
           <a:p>
             <a:fld id="{5BCAD085-E8A6-8845-BD4E-CB4CCA059FC4}" type="datetimeFigureOut">
               <a:rPr lang="en-US" smtClean="0"/>
-              <a:t>1/27/13</a:t>
+              <a:t>10/23/2026</a:t>
             </a:fld>
             <a:endParaRPr lang="en-US"/>
           </a:p>
@@ -2020,7 +2020,7 @@
           <a:p>
             <a:fld id="{5BCAD085-E8A6-8845-BD4E-CB4CCA059FC4}" type="datetimeFigureOut">
               <a:rPr lang="en-US" smtClean="0"/>
-              <a:t>1/27/13</a:t>
+              <a:t>10/23/2026</a:t>
             </a:fld>
             <a:endParaRPr lang="en-US"/>
           </a:p>
@@ -2123,10 +2123,9 @@
           </a:lstStyle>
           <a:p>
             <a:r>
-              <a:rPr lang="en-US" smtClean="0"/>
+              <a:rPr lang="en-US"/>
               <a:t>Click to edit Master title style</a:t>
             </a:r>
-            <a:endParaRPr lang="en-US"/>
           </a:p>
         </p:txBody>
       </p:sp>
@@ -2180,38 +2179,37 @@
           <a:p>
             <a:pPr lvl="0"/>
             <a:r>
-              <a:rPr lang="en-US" smtClean="0"/>
+              <a:rPr lang="en-US"/>
               <a:t>Click to edit Master text styles</a:t>
             </a:r>
           </a:p>
           <a:p>
             <a:pPr lvl="1"/>
             <a:r>
-              <a:rPr lang="en-US" smtClean="0"/>
+              <a:rPr lang="en-US"/>
               <a:t>Second level</a:t>
             </a:r>
           </a:p>
           <a:p>
             <a:pPr lvl="2"/>
             <a:r>
-              <a:rPr lang="en-US" smtClean="0"/>
+              <a:rPr lang="en-US"/>
               <a:t>Third level</a:t>
             </a:r>
           </a:p>
           <a:p>
             <a:pPr lvl="3"/>
             <a:r>
-              <a:rPr lang="en-US" smtClean="0"/>
+              <a:rPr lang="en-US"/>
               <a:t>Fourth level</a:t>
             </a:r>
           </a:p>
           <a:p>
             <a:pPr lvl="4"/>
             <a:r>
-              <a:rPr lang="en-US" smtClean="0"/>
+              <a:rPr lang="en-US"/>
               <a:t>Fifth level</a:t>
             </a:r>
-            <a:endParaRPr lang="en-US"/>
           </a:p>
         </p:txBody>
       </p:sp>
@@ -2274,7 +2272,7 @@
           <a:p>
             <a:pPr lvl="0"/>
             <a:r>
-              <a:rPr lang="en-US" smtClean="0"/>
+              <a:rPr lang="en-US"/>
               <a:t>Click to edit Master text styles</a:t>
             </a:r>
           </a:p>
@@ -2297,7 +2295,7 @@
           <a:p>
             <a:fld id="{5BCAD085-E8A6-8845-BD4E-CB4CCA059FC4}" type="datetimeFigureOut">
               <a:rPr lang="en-US" smtClean="0"/>
-              <a:t>1/27/13</a:t>
+              <a:t>10/23/2026</a:t>
             </a:fld>
             <a:endParaRPr lang="en-US"/>
           </a:p>
@@ -2400,10 +2398,9 @@
           </a:lstStyle>
           <a:p>
             <a:r>
-              <a:rPr lang="en-US" smtClean="0"/>
+              <a:rPr lang="en-US"/>
               <a:t>Click to edit Master title style</a:t>
             </a:r>
-            <a:endParaRPr lang="en-US"/>
           </a:p>
         </p:txBody>
       </p:sp>
@@ -2527,7 +2524,7 @@
           <a:p>
             <a:pPr lvl="0"/>
             <a:r>
-              <a:rPr lang="en-US" smtClean="0"/>
+              <a:rPr lang="en-US"/>
               <a:t>Click to edit Master text styles</a:t>
             </a:r>
           </a:p>
@@ -2550,7 +2547,7 @@
           <a:p>
             <a:fld id="{5BCAD085-E8A6-8845-BD4E-CB4CCA059FC4}" type="datetimeFigureOut">
               <a:rPr lang="en-US" smtClean="0"/>
-              <a:t>1/27/13</a:t>
+              <a:t>10/23/2026</a:t>
             </a:fld>
             <a:endParaRPr lang="en-US"/>
           </a:p>
@@ -2659,10 +2656,9 @@
           <a:lstStyle/>
           <a:p>
             <a:r>
-              <a:rPr lang="en-US" smtClean="0"/>
+              <a:rPr lang="en-US"/>
               <a:t>Click to edit Master title style</a:t>
             </a:r>
-            <a:endParaRPr lang="en-US"/>
           </a:p>
         </p:txBody>
       </p:sp>
@@ -2693,38 +2689,37 @@
           <a:p>
             <a:pPr lvl="0"/>
             <a:r>
-              <a:rPr lang="en-US" smtClean="0"/>
+              <a:rPr lang="en-US"/>
               <a:t>Click to edit Master text styles</a:t>
             </a:r>
           </a:p>
           <a:p>
             <a:pPr lvl="1"/>
             <a:r>
-              <a:rPr lang="en-US" smtClean="0"/>
+              <a:rPr lang="en-US"/>
               <a:t>Second level</a:t>
             </a:r>
           </a:p>
           <a:p>
             <a:pPr lvl="2"/>
             <a:r>
-              <a:rPr lang="en-US" smtClean="0"/>
+              <a:rPr lang="en-US"/>
               <a:t>Third level</a:t>
             </a:r>
           </a:p>
           <a:p>
             <a:pPr lvl="3"/>
             <a:r>
-              <a:rPr lang="en-US" smtClean="0"/>
+              <a:rPr lang="en-US"/>
               <a:t>Fourth level</a:t>
             </a:r>
           </a:p>
           <a:p>
             <a:pPr lvl="4"/>
             <a:r>
-              <a:rPr lang="en-US" smtClean="0"/>
+              <a:rPr lang="en-US"/>
               <a:t>Fifth level</a:t>
             </a:r>
-            <a:endParaRPr lang="en-US"/>
           </a:p>
         </p:txBody>
       </p:sp>
@@ -2763,7 +2758,7 @@
           <a:p>
             <a:fld id="{5BCAD085-E8A6-8845-BD4E-CB4CCA059FC4}" type="datetimeFigureOut">
               <a:rPr lang="en-US" smtClean="0"/>
-              <a:t>1/27/13</a:t>
+              <a:t>10/23/2026</a:t>
             </a:fld>
             <a:endParaRPr lang="en-US"/>
           </a:p>
@@ -3122,7 +3117,7 @@
 </file>
 
 <file path=ppt/slides/slide1.xml><?xml version="1.0" encoding="utf-8"?>
-<p:sld xmlns:a="http://schemas.openxmlformats.org/drawingml/2006/main" xmlns:p="http://schemas.openxmlformats.org/presentationml/2006/main" xmlns:r="http://schemas.openxmlformats.org/officeDocument/2006/relationships">
+<p:sld xmlns:a="http://schemas.openxmlformats.org/drawingml/2006/main" xmlns:r="http://schemas.openxmlformats.org/officeDocument/2006/relationships" xmlns:p="http://schemas.openxmlformats.org/presentationml/2006/main">
   <p:cSld>
     <p:spTree>
       <p:nvGrpSpPr>
@@ -3130,7 +3125,14 @@
         <p:cNvGrpSpPr/>
         <p:nvPr/>
       </p:nvGrpSpPr>
-      <p:grpSpPr/>
+      <p:grpSpPr>
+        <a:xfrm>
+          <a:off x="0" y="0"/>
+          <a:ext cx="0" cy="0"/>
+          <a:chOff x="0" y="0"/>
+          <a:chExt cx="0" cy="0"/>
+        </a:xfrm>
+      </p:grpSpPr>
       <p:sp>
         <p:nvSpPr>
           <p:cNvPr id="2" name="Rectangle 1"/>
@@ -3171,6 +3173,7 @@
           <a:lstStyle/>
           <a:p>
             <a:pPr algn="ctr"/>
+            <a:endParaRPr/>
           </a:p>
         </p:txBody>
       </p:sp>
@@ -3214,6 +3217,7 @@
           <a:lstStyle/>
           <a:p>
             <a:pPr algn="ctr"/>
+            <a:endParaRPr/>
           </a:p>
         </p:txBody>
       </p:sp>
@@ -3403,7 +3407,7 @@
 </file>
 
 <file path=ppt/slides/slide10.xml><?xml version="1.0" encoding="utf-8"?>
-<p:sld xmlns:a="http://schemas.openxmlformats.org/drawingml/2006/main" xmlns:p="http://schemas.openxmlformats.org/presentationml/2006/main" xmlns:r="http://schemas.openxmlformats.org/officeDocument/2006/relationships">
+<p:sld xmlns:a="http://schemas.openxmlformats.org/drawingml/2006/main" xmlns:r="http://schemas.openxmlformats.org/officeDocument/2006/relationships" xmlns:p="http://schemas.openxmlformats.org/presentationml/2006/main">
   <p:cSld>
     <p:spTree>
       <p:nvGrpSpPr>
@@ -3411,7 +3415,14 @@
         <p:cNvGrpSpPr/>
         <p:nvPr/>
       </p:nvGrpSpPr>
-      <p:grpSpPr/>
+      <p:grpSpPr>
+        <a:xfrm>
+          <a:off x="0" y="0"/>
+          <a:ext cx="0" cy="0"/>
+          <a:chOff x="0" y="0"/>
+          <a:chExt cx="0" cy="0"/>
+        </a:xfrm>
+      </p:grpSpPr>
       <p:sp>
         <p:nvSpPr>
           <p:cNvPr id="2" name="Rectangle 1"/>
@@ -3452,6 +3463,7 @@
           <a:lstStyle/>
           <a:p>
             <a:pPr algn="ctr"/>
+            <a:endParaRPr/>
           </a:p>
         </p:txBody>
       </p:sp>
@@ -3495,6 +3507,7 @@
           <a:lstStyle/>
           <a:p>
             <a:pPr algn="ctr"/>
+            <a:endParaRPr/>
           </a:p>
         </p:txBody>
       </p:sp>
@@ -3684,6 +3697,7 @@
           <a:lstStyle/>
           <a:p>
             <a:pPr algn="ctr"/>
+            <a:endParaRPr/>
           </a:p>
         </p:txBody>
       </p:sp>
@@ -3727,6 +3741,7 @@
           <a:lstStyle/>
           <a:p>
             <a:pPr algn="ctr"/>
+            <a:endParaRPr/>
           </a:p>
         </p:txBody>
       </p:sp>
@@ -3844,6 +3859,7 @@
           <a:lstStyle/>
           <a:p>
             <a:pPr algn="ctr"/>
+            <a:endParaRPr/>
           </a:p>
         </p:txBody>
       </p:sp>
@@ -3887,6 +3903,7 @@
           <a:lstStyle/>
           <a:p>
             <a:pPr algn="ctr"/>
+            <a:endParaRPr/>
           </a:p>
         </p:txBody>
       </p:sp>
@@ -4004,6 +4021,7 @@
           <a:lstStyle/>
           <a:p>
             <a:pPr algn="ctr"/>
+            <a:endParaRPr/>
           </a:p>
         </p:txBody>
       </p:sp>
@@ -4047,6 +4065,7 @@
           <a:lstStyle/>
           <a:p>
             <a:pPr algn="ctr"/>
+            <a:endParaRPr/>
           </a:p>
         </p:txBody>
       </p:sp>
@@ -4167,7 +4186,7 @@
 </file>
 
 <file path=ppt/slides/slide11.xml><?xml version="1.0" encoding="utf-8"?>
-<p:sld xmlns:a="http://schemas.openxmlformats.org/drawingml/2006/main" xmlns:p="http://schemas.openxmlformats.org/presentationml/2006/main" xmlns:r="http://schemas.openxmlformats.org/officeDocument/2006/relationships">
+<p:sld xmlns:a="http://schemas.openxmlformats.org/drawingml/2006/main" xmlns:r="http://schemas.openxmlformats.org/officeDocument/2006/relationships" xmlns:p="http://schemas.openxmlformats.org/presentationml/2006/main">
   <p:cSld>
     <p:spTree>
       <p:nvGrpSpPr>
@@ -4175,7 +4194,14 @@
         <p:cNvGrpSpPr/>
         <p:nvPr/>
       </p:nvGrpSpPr>
-      <p:grpSpPr/>
+      <p:grpSpPr>
+        <a:xfrm>
+          <a:off x="0" y="0"/>
+          <a:ext cx="0" cy="0"/>
+          <a:chOff x="0" y="0"/>
+          <a:chExt cx="0" cy="0"/>
+        </a:xfrm>
+      </p:grpSpPr>
       <p:sp>
         <p:nvSpPr>
           <p:cNvPr id="2" name="Rectangle 1"/>
@@ -4216,6 +4242,7 @@
           <a:lstStyle/>
           <a:p>
             <a:pPr algn="ctr"/>
+            <a:endParaRPr/>
           </a:p>
         </p:txBody>
       </p:sp>
@@ -4259,6 +4286,7 @@
           <a:lstStyle/>
           <a:p>
             <a:pPr algn="ctr"/>
+            <a:endParaRPr/>
           </a:p>
         </p:txBody>
       </p:sp>
@@ -4448,6 +4476,7 @@
           <a:lstStyle/>
           <a:p>
             <a:pPr algn="ctr"/>
+            <a:endParaRPr/>
           </a:p>
         </p:txBody>
       </p:sp>
@@ -4491,6 +4520,7 @@
           <a:lstStyle/>
           <a:p>
             <a:pPr algn="ctr"/>
+            <a:endParaRPr/>
           </a:p>
         </p:txBody>
       </p:sp>
@@ -4572,6 +4602,7 @@
           <a:lstStyle/>
           <a:p>
             <a:pPr algn="ctr"/>
+            <a:endParaRPr/>
           </a:p>
         </p:txBody>
       </p:sp>
@@ -4615,6 +4646,7 @@
           <a:lstStyle/>
           <a:p>
             <a:pPr algn="ctr"/>
+            <a:endParaRPr/>
           </a:p>
         </p:txBody>
       </p:sp>
@@ -4696,6 +4728,7 @@
           <a:lstStyle/>
           <a:p>
             <a:pPr algn="ctr"/>
+            <a:endParaRPr/>
           </a:p>
         </p:txBody>
       </p:sp>
@@ -4739,6 +4772,7 @@
           <a:lstStyle/>
           <a:p>
             <a:pPr algn="ctr"/>
+            <a:endParaRPr/>
           </a:p>
         </p:txBody>
       </p:sp>
@@ -4820,6 +4854,7 @@
           <a:lstStyle/>
           <a:p>
             <a:pPr algn="ctr"/>
+            <a:endParaRPr/>
           </a:p>
         </p:txBody>
       </p:sp>
@@ -4863,6 +4898,7 @@
           <a:lstStyle/>
           <a:p>
             <a:pPr algn="ctr"/>
+            <a:endParaRPr/>
           </a:p>
         </p:txBody>
       </p:sp>
@@ -4944,6 +4980,7 @@
           <a:lstStyle/>
           <a:p>
             <a:pPr algn="ctr"/>
+            <a:endParaRPr/>
           </a:p>
         </p:txBody>
       </p:sp>
@@ -4987,6 +5024,7 @@
           <a:lstStyle/>
           <a:p>
             <a:pPr algn="ctr"/>
+            <a:endParaRPr/>
           </a:p>
         </p:txBody>
       </p:sp>
@@ -5068,6 +5106,7 @@
           <a:lstStyle/>
           <a:p>
             <a:pPr algn="ctr"/>
+            <a:endParaRPr/>
           </a:p>
         </p:txBody>
       </p:sp>
@@ -5111,6 +5150,7 @@
           <a:lstStyle/>
           <a:p>
             <a:pPr algn="ctr"/>
+            <a:endParaRPr/>
           </a:p>
         </p:txBody>
       </p:sp>
@@ -5192,6 +5232,7 @@
           <a:lstStyle/>
           <a:p>
             <a:pPr algn="ctr"/>
+            <a:endParaRPr/>
           </a:p>
         </p:txBody>
       </p:sp>
@@ -5235,6 +5276,7 @@
           <a:lstStyle/>
           <a:p>
             <a:pPr algn="ctr"/>
+            <a:endParaRPr/>
           </a:p>
         </p:txBody>
       </p:sp>
@@ -5316,6 +5358,7 @@
           <a:lstStyle/>
           <a:p>
             <a:pPr algn="ctr"/>
+            <a:endParaRPr/>
           </a:p>
         </p:txBody>
       </p:sp>
@@ -5359,6 +5402,7 @@
           <a:lstStyle/>
           <a:p>
             <a:pPr algn="ctr"/>
+            <a:endParaRPr/>
           </a:p>
         </p:txBody>
       </p:sp>
@@ -5440,6 +5484,7 @@
           <a:lstStyle/>
           <a:p>
             <a:pPr algn="ctr"/>
+            <a:endParaRPr/>
           </a:p>
         </p:txBody>
       </p:sp>
@@ -5483,6 +5528,7 @@
           <a:lstStyle/>
           <a:p>
             <a:pPr algn="ctr"/>
+            <a:endParaRPr/>
           </a:p>
         </p:txBody>
       </p:sp>
@@ -5564,6 +5610,7 @@
           <a:lstStyle/>
           <a:p>
             <a:pPr algn="ctr"/>
+            <a:endParaRPr/>
           </a:p>
         </p:txBody>
       </p:sp>
@@ -5607,6 +5654,7 @@
           <a:lstStyle/>
           <a:p>
             <a:pPr algn="ctr"/>
+            <a:endParaRPr/>
           </a:p>
         </p:txBody>
       </p:sp>
@@ -5688,6 +5736,7 @@
           <a:lstStyle/>
           <a:p>
             <a:pPr algn="ctr"/>
+            <a:endParaRPr/>
           </a:p>
         </p:txBody>
       </p:sp>
@@ -5731,6 +5780,7 @@
           <a:lstStyle/>
           <a:p>
             <a:pPr algn="ctr"/>
+            <a:endParaRPr/>
           </a:p>
         </p:txBody>
       </p:sp>
@@ -5812,6 +5862,7 @@
           <a:lstStyle/>
           <a:p>
             <a:pPr algn="ctr"/>
+            <a:endParaRPr/>
           </a:p>
         </p:txBody>
       </p:sp>
@@ -5855,6 +5906,7 @@
           <a:lstStyle/>
           <a:p>
             <a:pPr algn="ctr"/>
+            <a:endParaRPr/>
           </a:p>
         </p:txBody>
       </p:sp>
@@ -5939,7 +5991,7 @@
 </file>
 
 <file path=ppt/slides/slide12.xml><?xml version="1.0" encoding="utf-8"?>
-<p:sld xmlns:a="http://schemas.openxmlformats.org/drawingml/2006/main" xmlns:p="http://schemas.openxmlformats.org/presentationml/2006/main" xmlns:r="http://schemas.openxmlformats.org/officeDocument/2006/relationships">
+<p:sld xmlns:a="http://schemas.openxmlformats.org/drawingml/2006/main" xmlns:r="http://schemas.openxmlformats.org/officeDocument/2006/relationships" xmlns:p="http://schemas.openxmlformats.org/presentationml/2006/main">
   <p:cSld>
     <p:spTree>
       <p:nvGrpSpPr>
@@ -5947,7 +5999,14 @@
         <p:cNvGrpSpPr/>
         <p:nvPr/>
       </p:nvGrpSpPr>
-      <p:grpSpPr/>
+      <p:grpSpPr>
+        <a:xfrm>
+          <a:off x="0" y="0"/>
+          <a:ext cx="0" cy="0"/>
+          <a:chOff x="0" y="0"/>
+          <a:chExt cx="0" cy="0"/>
+        </a:xfrm>
+      </p:grpSpPr>
       <p:sp>
         <p:nvSpPr>
           <p:cNvPr id="2" name="Rectangle 1"/>
@@ -5988,6 +6047,7 @@
           <a:lstStyle/>
           <a:p>
             <a:pPr algn="ctr"/>
+            <a:endParaRPr/>
           </a:p>
         </p:txBody>
       </p:sp>
@@ -6031,6 +6091,7 @@
           <a:lstStyle/>
           <a:p>
             <a:pPr algn="ctr"/>
+            <a:endParaRPr/>
           </a:p>
         </p:txBody>
       </p:sp>
@@ -6220,6 +6281,7 @@
           <a:lstStyle/>
           <a:p>
             <a:pPr algn="ctr"/>
+            <a:endParaRPr/>
           </a:p>
         </p:txBody>
       </p:sp>
@@ -6263,6 +6325,7 @@
           <a:lstStyle/>
           <a:p>
             <a:pPr algn="ctr"/>
+            <a:endParaRPr/>
           </a:p>
         </p:txBody>
       </p:sp>
@@ -6380,6 +6443,7 @@
           <a:lstStyle/>
           <a:p>
             <a:pPr algn="ctr"/>
+            <a:endParaRPr/>
           </a:p>
         </p:txBody>
       </p:sp>
@@ -6423,6 +6487,7 @@
           <a:lstStyle/>
           <a:p>
             <a:pPr algn="ctr"/>
+            <a:endParaRPr/>
           </a:p>
         </p:txBody>
       </p:sp>
@@ -6540,6 +6605,7 @@
           <a:lstStyle/>
           <a:p>
             <a:pPr algn="ctr"/>
+            <a:endParaRPr/>
           </a:p>
         </p:txBody>
       </p:sp>
@@ -6583,6 +6649,7 @@
           <a:lstStyle/>
           <a:p>
             <a:pPr algn="ctr"/>
+            <a:endParaRPr/>
           </a:p>
         </p:txBody>
       </p:sp>
@@ -6700,6 +6767,7 @@
           <a:lstStyle/>
           <a:p>
             <a:pPr algn="ctr"/>
+            <a:endParaRPr/>
           </a:p>
         </p:txBody>
       </p:sp>
@@ -6743,6 +6811,7 @@
           <a:lstStyle/>
           <a:p>
             <a:pPr algn="ctr"/>
+            <a:endParaRPr/>
           </a:p>
         </p:txBody>
       </p:sp>
@@ -6860,6 +6929,7 @@
           <a:lstStyle/>
           <a:p>
             <a:pPr algn="ctr"/>
+            <a:endParaRPr/>
           </a:p>
         </p:txBody>
       </p:sp>
@@ -6903,6 +6973,7 @@
           <a:lstStyle/>
           <a:p>
             <a:pPr algn="ctr"/>
+            <a:endParaRPr/>
           </a:p>
         </p:txBody>
       </p:sp>
@@ -7040,7 +7111,7 @@
 </file>
 
 <file path=ppt/slides/slide13.xml><?xml version="1.0" encoding="utf-8"?>
-<p:sld xmlns:a="http://schemas.openxmlformats.org/drawingml/2006/main" xmlns:p="http://schemas.openxmlformats.org/presentationml/2006/main" xmlns:r="http://schemas.openxmlformats.org/officeDocument/2006/relationships">
+<p:sld xmlns:a="http://schemas.openxmlformats.org/drawingml/2006/main" xmlns:r="http://schemas.openxmlformats.org/officeDocument/2006/relationships" xmlns:p="http://schemas.openxmlformats.org/presentationml/2006/main">
   <p:cSld>
     <p:spTree>
       <p:nvGrpSpPr>
@@ -7048,7 +7119,14 @@
         <p:cNvGrpSpPr/>
         <p:nvPr/>
       </p:nvGrpSpPr>
-      <p:grpSpPr/>
+      <p:grpSpPr>
+        <a:xfrm>
+          <a:off x="0" y="0"/>
+          <a:ext cx="0" cy="0"/>
+          <a:chOff x="0" y="0"/>
+          <a:chExt cx="0" cy="0"/>
+        </a:xfrm>
+      </p:grpSpPr>
       <p:sp>
         <p:nvSpPr>
           <p:cNvPr id="2" name="Rectangle 1"/>
@@ -7089,6 +7167,7 @@
           <a:lstStyle/>
           <a:p>
             <a:pPr algn="ctr"/>
+            <a:endParaRPr/>
           </a:p>
         </p:txBody>
       </p:sp>
@@ -7132,6 +7211,7 @@
           <a:lstStyle/>
           <a:p>
             <a:pPr algn="ctr"/>
+            <a:endParaRPr/>
           </a:p>
         </p:txBody>
       </p:sp>
@@ -7321,6 +7401,7 @@
           <a:lstStyle/>
           <a:p>
             <a:pPr algn="ctr"/>
+            <a:endParaRPr/>
           </a:p>
         </p:txBody>
       </p:sp>
@@ -7364,6 +7445,7 @@
           <a:lstStyle/>
           <a:p>
             <a:pPr algn="ctr"/>
+            <a:endParaRPr/>
           </a:p>
         </p:txBody>
       </p:sp>
@@ -7481,6 +7563,7 @@
           <a:lstStyle/>
           <a:p>
             <a:pPr algn="ctr"/>
+            <a:endParaRPr/>
           </a:p>
         </p:txBody>
       </p:sp>
@@ -7524,6 +7607,7 @@
           <a:lstStyle/>
           <a:p>
             <a:pPr algn="ctr"/>
+            <a:endParaRPr/>
           </a:p>
         </p:txBody>
       </p:sp>
@@ -7641,6 +7725,7 @@
           <a:lstStyle/>
           <a:p>
             <a:pPr algn="ctr"/>
+            <a:endParaRPr/>
           </a:p>
         </p:txBody>
       </p:sp>
@@ -7684,6 +7769,7 @@
           <a:lstStyle/>
           <a:p>
             <a:pPr algn="ctr"/>
+            <a:endParaRPr/>
           </a:p>
         </p:txBody>
       </p:sp>
@@ -7801,6 +7887,7 @@
           <a:lstStyle/>
           <a:p>
             <a:pPr algn="ctr"/>
+            <a:endParaRPr/>
           </a:p>
         </p:txBody>
       </p:sp>
@@ -7844,6 +7931,7 @@
           <a:lstStyle/>
           <a:p>
             <a:pPr algn="ctr"/>
+            <a:endParaRPr/>
           </a:p>
         </p:txBody>
       </p:sp>
@@ -7964,7 +8052,7 @@
 </file>
 
 <file path=ppt/slides/slide14.xml><?xml version="1.0" encoding="utf-8"?>
-<p:sld xmlns:a="http://schemas.openxmlformats.org/drawingml/2006/main" xmlns:p="http://schemas.openxmlformats.org/presentationml/2006/main" xmlns:r="http://schemas.openxmlformats.org/officeDocument/2006/relationships">
+<p:sld xmlns:a="http://schemas.openxmlformats.org/drawingml/2006/main" xmlns:r="http://schemas.openxmlformats.org/officeDocument/2006/relationships" xmlns:p="http://schemas.openxmlformats.org/presentationml/2006/main">
   <p:cSld>
     <p:spTree>
       <p:nvGrpSpPr>
@@ -7972,7 +8060,14 @@
         <p:cNvGrpSpPr/>
         <p:nvPr/>
       </p:nvGrpSpPr>
-      <p:grpSpPr/>
+      <p:grpSpPr>
+        <a:xfrm>
+          <a:off x="0" y="0"/>
+          <a:ext cx="0" cy="0"/>
+          <a:chOff x="0" y="0"/>
+          <a:chExt cx="0" cy="0"/>
+        </a:xfrm>
+      </p:grpSpPr>
       <p:sp>
         <p:nvSpPr>
           <p:cNvPr id="2" name="Rectangle 1"/>
@@ -8013,6 +8108,7 @@
           <a:lstStyle/>
           <a:p>
             <a:pPr algn="ctr"/>
+            <a:endParaRPr/>
           </a:p>
         </p:txBody>
       </p:sp>
@@ -8056,6 +8152,7 @@
           <a:lstStyle/>
           <a:p>
             <a:pPr algn="ctr"/>
+            <a:endParaRPr/>
           </a:p>
         </p:txBody>
       </p:sp>
@@ -8245,6 +8342,7 @@
           <a:lstStyle/>
           <a:p>
             <a:pPr algn="ctr"/>
+            <a:endParaRPr/>
           </a:p>
         </p:txBody>
       </p:sp>
@@ -8288,6 +8386,7 @@
           <a:lstStyle/>
           <a:p>
             <a:pPr algn="ctr"/>
+            <a:endParaRPr/>
           </a:p>
         </p:txBody>
       </p:sp>
@@ -8405,6 +8504,7 @@
           <a:lstStyle/>
           <a:p>
             <a:pPr algn="ctr"/>
+            <a:endParaRPr/>
           </a:p>
         </p:txBody>
       </p:sp>
@@ -8448,6 +8548,7 @@
           <a:lstStyle/>
           <a:p>
             <a:pPr algn="ctr"/>
+            <a:endParaRPr/>
           </a:p>
         </p:txBody>
       </p:sp>
@@ -8565,6 +8666,7 @@
           <a:lstStyle/>
           <a:p>
             <a:pPr algn="ctr"/>
+            <a:endParaRPr/>
           </a:p>
         </p:txBody>
       </p:sp>
@@ -8608,6 +8710,7 @@
           <a:lstStyle/>
           <a:p>
             <a:pPr algn="ctr"/>
+            <a:endParaRPr/>
           </a:p>
         </p:txBody>
       </p:sp>
@@ -8725,6 +8828,7 @@
           <a:lstStyle/>
           <a:p>
             <a:pPr algn="ctr"/>
+            <a:endParaRPr/>
           </a:p>
         </p:txBody>
       </p:sp>
@@ -8768,6 +8872,7 @@
           <a:lstStyle/>
           <a:p>
             <a:pPr algn="ctr"/>
+            <a:endParaRPr/>
           </a:p>
         </p:txBody>
       </p:sp>
@@ -8885,6 +8990,7 @@
           <a:lstStyle/>
           <a:p>
             <a:pPr algn="ctr"/>
+            <a:endParaRPr/>
           </a:p>
         </p:txBody>
       </p:sp>
@@ -8928,6 +9034,7 @@
           <a:lstStyle/>
           <a:p>
             <a:pPr algn="ctr"/>
+            <a:endParaRPr/>
           </a:p>
         </p:txBody>
       </p:sp>
@@ -9045,6 +9152,7 @@
           <a:lstStyle/>
           <a:p>
             <a:pPr algn="ctr"/>
+            <a:endParaRPr/>
           </a:p>
         </p:txBody>
       </p:sp>
@@ -9088,6 +9196,7 @@
           <a:lstStyle/>
           <a:p>
             <a:pPr algn="ctr"/>
+            <a:endParaRPr/>
           </a:p>
         </p:txBody>
       </p:sp>
@@ -9205,6 +9314,7 @@
           <a:lstStyle/>
           <a:p>
             <a:pPr algn="ctr"/>
+            <a:endParaRPr/>
           </a:p>
         </p:txBody>
       </p:sp>
@@ -9248,6 +9358,7 @@
           <a:lstStyle/>
           <a:p>
             <a:pPr algn="ctr"/>
+            <a:endParaRPr/>
           </a:p>
         </p:txBody>
       </p:sp>
@@ -9365,6 +9476,7 @@
           <a:lstStyle/>
           <a:p>
             <a:pPr algn="ctr"/>
+            <a:endParaRPr/>
           </a:p>
         </p:txBody>
       </p:sp>
@@ -9408,6 +9520,7 @@
           <a:lstStyle/>
           <a:p>
             <a:pPr algn="ctr"/>
+            <a:endParaRPr/>
           </a:p>
         </p:txBody>
       </p:sp>
@@ -9528,7 +9641,7 @@
 </file>
 
 <file path=ppt/slides/slide15.xml><?xml version="1.0" encoding="utf-8"?>
-<p:sld xmlns:a="http://schemas.openxmlformats.org/drawingml/2006/main" xmlns:p="http://schemas.openxmlformats.org/presentationml/2006/main" xmlns:r="http://schemas.openxmlformats.org/officeDocument/2006/relationships">
+<p:sld xmlns:a="http://schemas.openxmlformats.org/drawingml/2006/main" xmlns:r="http://schemas.openxmlformats.org/officeDocument/2006/relationships" xmlns:p="http://schemas.openxmlformats.org/presentationml/2006/main">
   <p:cSld>
     <p:spTree>
       <p:nvGrpSpPr>
@@ -9536,7 +9649,14 @@
         <p:cNvGrpSpPr/>
         <p:nvPr/>
       </p:nvGrpSpPr>
-      <p:grpSpPr/>
+      <p:grpSpPr>
+        <a:xfrm>
+          <a:off x="0" y="0"/>
+          <a:ext cx="0" cy="0"/>
+          <a:chOff x="0" y="0"/>
+          <a:chExt cx="0" cy="0"/>
+        </a:xfrm>
+      </p:grpSpPr>
       <p:sp>
         <p:nvSpPr>
           <p:cNvPr id="2" name="Rectangle 1"/>
@@ -9577,6 +9697,7 @@
           <a:lstStyle/>
           <a:p>
             <a:pPr algn="ctr"/>
+            <a:endParaRPr/>
           </a:p>
         </p:txBody>
       </p:sp>
@@ -9620,6 +9741,7 @@
           <a:lstStyle/>
           <a:p>
             <a:pPr algn="ctr"/>
+            <a:endParaRPr/>
           </a:p>
         </p:txBody>
       </p:sp>
@@ -9809,6 +9931,7 @@
           <a:lstStyle/>
           <a:p>
             <a:pPr algn="ctr"/>
+            <a:endParaRPr/>
           </a:p>
         </p:txBody>
       </p:sp>
@@ -9852,6 +9975,7 @@
           <a:lstStyle/>
           <a:p>
             <a:pPr algn="ctr"/>
+            <a:endParaRPr/>
           </a:p>
         </p:txBody>
       </p:sp>
@@ -9969,6 +10093,7 @@
           <a:lstStyle/>
           <a:p>
             <a:pPr algn="ctr"/>
+            <a:endParaRPr/>
           </a:p>
         </p:txBody>
       </p:sp>
@@ -10012,6 +10137,7 @@
           <a:lstStyle/>
           <a:p>
             <a:pPr algn="ctr"/>
+            <a:endParaRPr/>
           </a:p>
         </p:txBody>
       </p:sp>
@@ -10129,6 +10255,7 @@
           <a:lstStyle/>
           <a:p>
             <a:pPr algn="ctr"/>
+            <a:endParaRPr/>
           </a:p>
         </p:txBody>
       </p:sp>
@@ -10172,6 +10299,7 @@
           <a:lstStyle/>
           <a:p>
             <a:pPr algn="ctr"/>
+            <a:endParaRPr/>
           </a:p>
         </p:txBody>
       </p:sp>
@@ -10289,6 +10417,7 @@
           <a:lstStyle/>
           <a:p>
             <a:pPr algn="ctr"/>
+            <a:endParaRPr/>
           </a:p>
         </p:txBody>
       </p:sp>
@@ -10332,6 +10461,7 @@
           <a:lstStyle/>
           <a:p>
             <a:pPr algn="ctr"/>
+            <a:endParaRPr/>
           </a:p>
         </p:txBody>
       </p:sp>
@@ -10452,7 +10582,7 @@
 </file>
 
 <file path=ppt/slides/slide16.xml><?xml version="1.0" encoding="utf-8"?>
-<p:sld xmlns:a="http://schemas.openxmlformats.org/drawingml/2006/main" xmlns:p="http://schemas.openxmlformats.org/presentationml/2006/main" xmlns:r="http://schemas.openxmlformats.org/officeDocument/2006/relationships">
+<p:sld xmlns:a="http://schemas.openxmlformats.org/drawingml/2006/main" xmlns:r="http://schemas.openxmlformats.org/officeDocument/2006/relationships" xmlns:p="http://schemas.openxmlformats.org/presentationml/2006/main">
   <p:cSld>
     <p:spTree>
       <p:nvGrpSpPr>
@@ -10460,7 +10590,14 @@
         <p:cNvGrpSpPr/>
         <p:nvPr/>
       </p:nvGrpSpPr>
-      <p:grpSpPr/>
+      <p:grpSpPr>
+        <a:xfrm>
+          <a:off x="0" y="0"/>
+          <a:ext cx="0" cy="0"/>
+          <a:chOff x="0" y="0"/>
+          <a:chExt cx="0" cy="0"/>
+        </a:xfrm>
+      </p:grpSpPr>
       <p:sp>
         <p:nvSpPr>
           <p:cNvPr id="2" name="Rectangle 1"/>
@@ -10501,6 +10638,7 @@
           <a:lstStyle/>
           <a:p>
             <a:pPr algn="ctr"/>
+            <a:endParaRPr/>
           </a:p>
         </p:txBody>
       </p:sp>
@@ -10544,6 +10682,7 @@
           <a:lstStyle/>
           <a:p>
             <a:pPr algn="ctr"/>
+            <a:endParaRPr/>
           </a:p>
         </p:txBody>
       </p:sp>
@@ -10697,6 +10836,7 @@
           <a:lstStyle/>
           <a:p>
             <a:pPr algn="ctr"/>
+            <a:endParaRPr/>
           </a:p>
         </p:txBody>
       </p:sp>
@@ -10740,6 +10880,7 @@
           <a:lstStyle/>
           <a:p>
             <a:pPr algn="ctr"/>
+            <a:endParaRPr/>
           </a:p>
         </p:txBody>
       </p:sp>
@@ -10857,6 +10998,7 @@
           <a:lstStyle/>
           <a:p>
             <a:pPr algn="ctr"/>
+            <a:endParaRPr/>
           </a:p>
         </p:txBody>
       </p:sp>
@@ -10900,6 +11042,7 @@
           <a:lstStyle/>
           <a:p>
             <a:pPr algn="ctr"/>
+            <a:endParaRPr/>
           </a:p>
         </p:txBody>
       </p:sp>
@@ -11017,6 +11160,7 @@
           <a:lstStyle/>
           <a:p>
             <a:pPr algn="ctr"/>
+            <a:endParaRPr/>
           </a:p>
         </p:txBody>
       </p:sp>
@@ -11060,6 +11204,7 @@
           <a:lstStyle/>
           <a:p>
             <a:pPr algn="ctr"/>
+            <a:endParaRPr/>
           </a:p>
         </p:txBody>
       </p:sp>
@@ -11177,6 +11322,7 @@
           <a:lstStyle/>
           <a:p>
             <a:pPr algn="ctr"/>
+            <a:endParaRPr/>
           </a:p>
         </p:txBody>
       </p:sp>
@@ -11220,6 +11366,7 @@
           <a:lstStyle/>
           <a:p>
             <a:pPr algn="ctr"/>
+            <a:endParaRPr/>
           </a:p>
         </p:txBody>
       </p:sp>
@@ -11340,7 +11487,7 @@
 </file>
 
 <file path=ppt/slides/slide17.xml><?xml version="1.0" encoding="utf-8"?>
-<p:sld xmlns:a="http://schemas.openxmlformats.org/drawingml/2006/main" xmlns:p="http://schemas.openxmlformats.org/presentationml/2006/main" xmlns:r="http://schemas.openxmlformats.org/officeDocument/2006/relationships">
+<p:sld xmlns:a="http://schemas.openxmlformats.org/drawingml/2006/main" xmlns:r="http://schemas.openxmlformats.org/officeDocument/2006/relationships" xmlns:p="http://schemas.openxmlformats.org/presentationml/2006/main">
   <p:cSld>
     <p:spTree>
       <p:nvGrpSpPr>
@@ -11348,7 +11495,14 @@
         <p:cNvGrpSpPr/>
         <p:nvPr/>
       </p:nvGrpSpPr>
-      <p:grpSpPr/>
+      <p:grpSpPr>
+        <a:xfrm>
+          <a:off x="0" y="0"/>
+          <a:ext cx="0" cy="0"/>
+          <a:chOff x="0" y="0"/>
+          <a:chExt cx="0" cy="0"/>
+        </a:xfrm>
+      </p:grpSpPr>
       <p:sp>
         <p:nvSpPr>
           <p:cNvPr id="2" name="Rectangle 1"/>
@@ -11389,6 +11543,7 @@
           <a:lstStyle/>
           <a:p>
             <a:pPr algn="ctr"/>
+            <a:endParaRPr/>
           </a:p>
         </p:txBody>
       </p:sp>
@@ -11432,6 +11587,7 @@
           <a:lstStyle/>
           <a:p>
             <a:pPr algn="ctr"/>
+            <a:endParaRPr/>
           </a:p>
         </p:txBody>
       </p:sp>
@@ -11621,6 +11777,7 @@
           <a:lstStyle/>
           <a:p>
             <a:pPr algn="ctr"/>
+            <a:endParaRPr/>
           </a:p>
         </p:txBody>
       </p:sp>
@@ -11664,6 +11821,7 @@
           <a:lstStyle/>
           <a:p>
             <a:pPr algn="ctr"/>
+            <a:endParaRPr/>
           </a:p>
         </p:txBody>
       </p:sp>
@@ -11781,6 +11939,7 @@
           <a:lstStyle/>
           <a:p>
             <a:pPr algn="ctr"/>
+            <a:endParaRPr/>
           </a:p>
         </p:txBody>
       </p:sp>
@@ -11824,6 +11983,7 @@
           <a:lstStyle/>
           <a:p>
             <a:pPr algn="ctr"/>
+            <a:endParaRPr/>
           </a:p>
         </p:txBody>
       </p:sp>
@@ -12015,7 +12175,7 @@
 </file>
 
 <file path=ppt/slides/slide18.xml><?xml version="1.0" encoding="utf-8"?>
-<p:sld xmlns:a="http://schemas.openxmlformats.org/drawingml/2006/main" xmlns:p="http://schemas.openxmlformats.org/presentationml/2006/main" xmlns:r="http://schemas.openxmlformats.org/officeDocument/2006/relationships">
+<p:sld xmlns:a="http://schemas.openxmlformats.org/drawingml/2006/main" xmlns:r="http://schemas.openxmlformats.org/officeDocument/2006/relationships" xmlns:p="http://schemas.openxmlformats.org/presentationml/2006/main">
   <p:cSld>
     <p:spTree>
       <p:nvGrpSpPr>
@@ -12023,7 +12183,14 @@
         <p:cNvGrpSpPr/>
         <p:nvPr/>
       </p:nvGrpSpPr>
-      <p:grpSpPr/>
+      <p:grpSpPr>
+        <a:xfrm>
+          <a:off x="0" y="0"/>
+          <a:ext cx="0" cy="0"/>
+          <a:chOff x="0" y="0"/>
+          <a:chExt cx="0" cy="0"/>
+        </a:xfrm>
+      </p:grpSpPr>
       <p:sp>
         <p:nvSpPr>
           <p:cNvPr id="2" name="Rectangle 1"/>
@@ -12064,6 +12231,7 @@
           <a:lstStyle/>
           <a:p>
             <a:pPr algn="ctr"/>
+            <a:endParaRPr/>
           </a:p>
         </p:txBody>
       </p:sp>
@@ -12107,6 +12275,7 @@
           <a:lstStyle/>
           <a:p>
             <a:pPr algn="ctr"/>
+            <a:endParaRPr/>
           </a:p>
         </p:txBody>
       </p:sp>
@@ -12262,7 +12431,7 @@
 </file>
 
 <file path=ppt/slides/slide19.xml><?xml version="1.0" encoding="utf-8"?>
-<p:sld xmlns:a="http://schemas.openxmlformats.org/drawingml/2006/main" xmlns:p="http://schemas.openxmlformats.org/presentationml/2006/main" xmlns:r="http://schemas.openxmlformats.org/officeDocument/2006/relationships">
+<p:sld xmlns:a="http://schemas.openxmlformats.org/drawingml/2006/main" xmlns:r="http://schemas.openxmlformats.org/officeDocument/2006/relationships" xmlns:p="http://schemas.openxmlformats.org/presentationml/2006/main">
   <p:cSld>
     <p:spTree>
       <p:nvGrpSpPr>
@@ -12270,7 +12439,14 @@
         <p:cNvGrpSpPr/>
         <p:nvPr/>
       </p:nvGrpSpPr>
-      <p:grpSpPr/>
+      <p:grpSpPr>
+        <a:xfrm>
+          <a:off x="0" y="0"/>
+          <a:ext cx="0" cy="0"/>
+          <a:chOff x="0" y="0"/>
+          <a:chExt cx="0" cy="0"/>
+        </a:xfrm>
+      </p:grpSpPr>
       <p:sp>
         <p:nvSpPr>
           <p:cNvPr id="2" name="Rectangle 1"/>
@@ -12311,6 +12487,7 @@
           <a:lstStyle/>
           <a:p>
             <a:pPr algn="ctr"/>
+            <a:endParaRPr/>
           </a:p>
         </p:txBody>
       </p:sp>
@@ -12354,6 +12531,7 @@
           <a:lstStyle/>
           <a:p>
             <a:pPr algn="ctr"/>
+            <a:endParaRPr/>
           </a:p>
         </p:txBody>
       </p:sp>
@@ -12543,6 +12721,7 @@
           <a:lstStyle/>
           <a:p>
             <a:pPr algn="ctr"/>
+            <a:endParaRPr/>
           </a:p>
         </p:txBody>
       </p:sp>
@@ -12586,6 +12765,7 @@
           <a:lstStyle/>
           <a:p>
             <a:pPr algn="ctr"/>
+            <a:endParaRPr/>
           </a:p>
         </p:txBody>
       </p:sp>
@@ -12667,6 +12847,7 @@
           <a:lstStyle/>
           <a:p>
             <a:pPr algn="ctr"/>
+            <a:endParaRPr/>
           </a:p>
         </p:txBody>
       </p:sp>
@@ -12710,6 +12891,7 @@
           <a:lstStyle/>
           <a:p>
             <a:pPr algn="ctr"/>
+            <a:endParaRPr/>
           </a:p>
         </p:txBody>
       </p:sp>
@@ -12791,6 +12973,7 @@
           <a:lstStyle/>
           <a:p>
             <a:pPr algn="ctr"/>
+            <a:endParaRPr/>
           </a:p>
         </p:txBody>
       </p:sp>
@@ -12834,6 +13017,7 @@
           <a:lstStyle/>
           <a:p>
             <a:pPr algn="ctr"/>
+            <a:endParaRPr/>
           </a:p>
         </p:txBody>
       </p:sp>
@@ -12951,6 +13135,7 @@
           <a:lstStyle/>
           <a:p>
             <a:pPr algn="ctr"/>
+            <a:endParaRPr/>
           </a:p>
         </p:txBody>
       </p:sp>
@@ -12994,6 +13179,7 @@
           <a:lstStyle/>
           <a:p>
             <a:pPr algn="ctr"/>
+            <a:endParaRPr/>
           </a:p>
         </p:txBody>
       </p:sp>
@@ -13075,6 +13261,7 @@
           <a:lstStyle/>
           <a:p>
             <a:pPr algn="ctr"/>
+            <a:endParaRPr/>
           </a:p>
         </p:txBody>
       </p:sp>
@@ -13118,6 +13305,7 @@
           <a:lstStyle/>
           <a:p>
             <a:pPr algn="ctr"/>
+            <a:endParaRPr/>
           </a:p>
         </p:txBody>
       </p:sp>
@@ -13199,6 +13387,7 @@
           <a:lstStyle/>
           <a:p>
             <a:pPr algn="ctr"/>
+            <a:endParaRPr/>
           </a:p>
         </p:txBody>
       </p:sp>
@@ -13242,6 +13431,7 @@
           <a:lstStyle/>
           <a:p>
             <a:pPr algn="ctr"/>
+            <a:endParaRPr/>
           </a:p>
         </p:txBody>
       </p:sp>
@@ -13359,6 +13549,7 @@
           <a:lstStyle/>
           <a:p>
             <a:pPr algn="ctr"/>
+            <a:endParaRPr/>
           </a:p>
         </p:txBody>
       </p:sp>
@@ -13402,6 +13593,7 @@
           <a:lstStyle/>
           <a:p>
             <a:pPr algn="ctr"/>
+            <a:endParaRPr/>
           </a:p>
         </p:txBody>
       </p:sp>
@@ -13483,6 +13675,7 @@
           <a:lstStyle/>
           <a:p>
             <a:pPr algn="ctr"/>
+            <a:endParaRPr/>
           </a:p>
         </p:txBody>
       </p:sp>
@@ -13526,6 +13719,7 @@
           <a:lstStyle/>
           <a:p>
             <a:pPr algn="ctr"/>
+            <a:endParaRPr/>
           </a:p>
         </p:txBody>
       </p:sp>
@@ -13607,6 +13801,7 @@
           <a:lstStyle/>
           <a:p>
             <a:pPr algn="ctr"/>
+            <a:endParaRPr/>
           </a:p>
         </p:txBody>
       </p:sp>
@@ -13650,6 +13845,7 @@
           <a:lstStyle/>
           <a:p>
             <a:pPr algn="ctr"/>
+            <a:endParaRPr/>
           </a:p>
         </p:txBody>
       </p:sp>
@@ -13767,6 +13963,7 @@
           <a:lstStyle/>
           <a:p>
             <a:pPr algn="ctr"/>
+            <a:endParaRPr/>
           </a:p>
         </p:txBody>
       </p:sp>
@@ -13810,6 +14007,7 @@
           <a:lstStyle/>
           <a:p>
             <a:pPr algn="ctr"/>
+            <a:endParaRPr/>
           </a:p>
         </p:txBody>
       </p:sp>
@@ -13891,6 +14089,7 @@
           <a:lstStyle/>
           <a:p>
             <a:pPr algn="ctr"/>
+            <a:endParaRPr/>
           </a:p>
         </p:txBody>
       </p:sp>
@@ -13934,6 +14133,7 @@
           <a:lstStyle/>
           <a:p>
             <a:pPr algn="ctr"/>
+            <a:endParaRPr/>
           </a:p>
         </p:txBody>
       </p:sp>
@@ -14015,6 +14215,7 @@
           <a:lstStyle/>
           <a:p>
             <a:pPr algn="ctr"/>
+            <a:endParaRPr/>
           </a:p>
         </p:txBody>
       </p:sp>
@@ -14058,6 +14259,7 @@
           <a:lstStyle/>
           <a:p>
             <a:pPr algn="ctr"/>
+            <a:endParaRPr/>
           </a:p>
         </p:txBody>
       </p:sp>
@@ -14178,7 +14380,7 @@
 </file>
 
 <file path=ppt/slides/slide2.xml><?xml version="1.0" encoding="utf-8"?>
-<p:sld xmlns:a="http://schemas.openxmlformats.org/drawingml/2006/main" xmlns:p="http://schemas.openxmlformats.org/presentationml/2006/main" xmlns:r="http://schemas.openxmlformats.org/officeDocument/2006/relationships">
+<p:sld xmlns:a="http://schemas.openxmlformats.org/drawingml/2006/main" xmlns:r="http://schemas.openxmlformats.org/officeDocument/2006/relationships" xmlns:p="http://schemas.openxmlformats.org/presentationml/2006/main">
   <p:cSld>
     <p:spTree>
       <p:nvGrpSpPr>
@@ -14186,7 +14388,14 @@
         <p:cNvGrpSpPr/>
         <p:nvPr/>
       </p:nvGrpSpPr>
-      <p:grpSpPr/>
+      <p:grpSpPr>
+        <a:xfrm>
+          <a:off x="0" y="0"/>
+          <a:ext cx="0" cy="0"/>
+          <a:chOff x="0" y="0"/>
+          <a:chExt cx="0" cy="0"/>
+        </a:xfrm>
+      </p:grpSpPr>
       <p:sp>
         <p:nvSpPr>
           <p:cNvPr id="2" name="Rectangle 1"/>
@@ -14227,6 +14436,7 @@
           <a:lstStyle/>
           <a:p>
             <a:pPr algn="ctr"/>
+            <a:endParaRPr/>
           </a:p>
         </p:txBody>
       </p:sp>
@@ -14270,6 +14480,7 @@
           <a:lstStyle/>
           <a:p>
             <a:pPr algn="ctr"/>
+            <a:endParaRPr/>
           </a:p>
         </p:txBody>
       </p:sp>
@@ -14459,6 +14670,7 @@
           <a:lstStyle/>
           <a:p>
             <a:pPr algn="ctr"/>
+            <a:endParaRPr/>
           </a:p>
         </p:txBody>
       </p:sp>
@@ -14502,6 +14714,7 @@
           <a:lstStyle/>
           <a:p>
             <a:pPr algn="ctr"/>
+            <a:endParaRPr/>
           </a:p>
         </p:txBody>
       </p:sp>
@@ -14619,6 +14832,7 @@
           <a:lstStyle/>
           <a:p>
             <a:pPr algn="ctr"/>
+            <a:endParaRPr/>
           </a:p>
         </p:txBody>
       </p:sp>
@@ -14662,6 +14876,7 @@
           <a:lstStyle/>
           <a:p>
             <a:pPr algn="ctr"/>
+            <a:endParaRPr/>
           </a:p>
         </p:txBody>
       </p:sp>
@@ -14779,6 +14994,7 @@
           <a:lstStyle/>
           <a:p>
             <a:pPr algn="ctr"/>
+            <a:endParaRPr/>
           </a:p>
         </p:txBody>
       </p:sp>
@@ -14822,6 +15038,7 @@
           <a:lstStyle/>
           <a:p>
             <a:pPr algn="ctr"/>
+            <a:endParaRPr/>
           </a:p>
         </p:txBody>
       </p:sp>
@@ -14942,7 +15159,7 @@
 </file>
 
 <file path=ppt/slides/slide20.xml><?xml version="1.0" encoding="utf-8"?>
-<p:sld xmlns:a="http://schemas.openxmlformats.org/drawingml/2006/main" xmlns:p="http://schemas.openxmlformats.org/presentationml/2006/main" xmlns:r="http://schemas.openxmlformats.org/officeDocument/2006/relationships">
+<p:sld xmlns:a="http://schemas.openxmlformats.org/drawingml/2006/main" xmlns:r="http://schemas.openxmlformats.org/officeDocument/2006/relationships" xmlns:p="http://schemas.openxmlformats.org/presentationml/2006/main">
   <p:cSld>
     <p:spTree>
       <p:nvGrpSpPr>
@@ -14950,7 +15167,14 @@
         <p:cNvGrpSpPr/>
         <p:nvPr/>
       </p:nvGrpSpPr>
-      <p:grpSpPr/>
+      <p:grpSpPr>
+        <a:xfrm>
+          <a:off x="0" y="0"/>
+          <a:ext cx="0" cy="0"/>
+          <a:chOff x="0" y="0"/>
+          <a:chExt cx="0" cy="0"/>
+        </a:xfrm>
+      </p:grpSpPr>
       <p:sp>
         <p:nvSpPr>
           <p:cNvPr id="2" name="Rectangle 1"/>
@@ -14991,6 +15215,7 @@
           <a:lstStyle/>
           <a:p>
             <a:pPr algn="ctr"/>
+            <a:endParaRPr/>
           </a:p>
         </p:txBody>
       </p:sp>
@@ -15034,6 +15259,7 @@
           <a:lstStyle/>
           <a:p>
             <a:pPr algn="ctr"/>
+            <a:endParaRPr/>
           </a:p>
         </p:txBody>
       </p:sp>
@@ -15223,6 +15449,7 @@
           <a:lstStyle/>
           <a:p>
             <a:pPr algn="ctr"/>
+            <a:endParaRPr/>
           </a:p>
         </p:txBody>
       </p:sp>
@@ -15266,6 +15493,7 @@
           <a:lstStyle/>
           <a:p>
             <a:pPr algn="ctr"/>
+            <a:endParaRPr/>
           </a:p>
         </p:txBody>
       </p:sp>
@@ -15388,6 +15616,7 @@
           <a:lstStyle/>
           <a:p>
             <a:pPr algn="ctr"/>
+            <a:endParaRPr/>
           </a:p>
         </p:txBody>
       </p:sp>
@@ -15431,6 +15660,7 @@
           <a:lstStyle/>
           <a:p>
             <a:pPr algn="ctr"/>
+            <a:endParaRPr/>
           </a:p>
         </p:txBody>
       </p:sp>
@@ -15548,6 +15778,7 @@
           <a:lstStyle/>
           <a:p>
             <a:pPr algn="ctr"/>
+            <a:endParaRPr/>
           </a:p>
         </p:txBody>
       </p:sp>
@@ -15591,6 +15822,7 @@
           <a:lstStyle/>
           <a:p>
             <a:pPr algn="ctr"/>
+            <a:endParaRPr/>
           </a:p>
         </p:txBody>
       </p:sp>
@@ -15708,6 +15940,7 @@
           <a:lstStyle/>
           <a:p>
             <a:pPr algn="ctr"/>
+            <a:endParaRPr/>
           </a:p>
         </p:txBody>
       </p:sp>
@@ -15751,6 +15984,7 @@
           <a:lstStyle/>
           <a:p>
             <a:pPr algn="ctr"/>
+            <a:endParaRPr/>
           </a:p>
         </p:txBody>
       </p:sp>
@@ -15868,6 +16102,7 @@
           <a:lstStyle/>
           <a:p>
             <a:pPr algn="ctr"/>
+            <a:endParaRPr/>
           </a:p>
         </p:txBody>
       </p:sp>
@@ -15911,6 +16146,7 @@
           <a:lstStyle/>
           <a:p>
             <a:pPr algn="ctr"/>
+            <a:endParaRPr/>
           </a:p>
         </p:txBody>
       </p:sp>
@@ -16031,7 +16267,7 @@
 </file>
 
 <file path=ppt/slides/slide21.xml><?xml version="1.0" encoding="utf-8"?>
-<p:sld xmlns:a="http://schemas.openxmlformats.org/drawingml/2006/main" xmlns:p="http://schemas.openxmlformats.org/presentationml/2006/main" xmlns:r="http://schemas.openxmlformats.org/officeDocument/2006/relationships">
+<p:sld xmlns:a="http://schemas.openxmlformats.org/drawingml/2006/main" xmlns:r="http://schemas.openxmlformats.org/officeDocument/2006/relationships" xmlns:p="http://schemas.openxmlformats.org/presentationml/2006/main">
   <p:cSld>
     <p:spTree>
       <p:nvGrpSpPr>
@@ -16039,7 +16275,14 @@
         <p:cNvGrpSpPr/>
         <p:nvPr/>
       </p:nvGrpSpPr>
-      <p:grpSpPr/>
+      <p:grpSpPr>
+        <a:xfrm>
+          <a:off x="0" y="0"/>
+          <a:ext cx="0" cy="0"/>
+          <a:chOff x="0" y="0"/>
+          <a:chExt cx="0" cy="0"/>
+        </a:xfrm>
+      </p:grpSpPr>
       <p:sp>
         <p:nvSpPr>
           <p:cNvPr id="2" name="Rectangle 1"/>
@@ -16080,6 +16323,7 @@
           <a:lstStyle/>
           <a:p>
             <a:pPr algn="ctr"/>
+            <a:endParaRPr/>
           </a:p>
         </p:txBody>
       </p:sp>
@@ -16123,6 +16367,7 @@
           <a:lstStyle/>
           <a:p>
             <a:pPr algn="ctr"/>
+            <a:endParaRPr/>
           </a:p>
         </p:txBody>
       </p:sp>
@@ -16312,6 +16557,7 @@
           <a:lstStyle/>
           <a:p>
             <a:pPr algn="ctr"/>
+            <a:endParaRPr/>
           </a:p>
         </p:txBody>
       </p:sp>
@@ -16355,6 +16601,7 @@
           <a:lstStyle/>
           <a:p>
             <a:pPr algn="ctr"/>
+            <a:endParaRPr/>
           </a:p>
         </p:txBody>
       </p:sp>
@@ -16472,6 +16719,7 @@
           <a:lstStyle/>
           <a:p>
             <a:pPr algn="ctr"/>
+            <a:endParaRPr/>
           </a:p>
         </p:txBody>
       </p:sp>
@@ -16515,6 +16763,7 @@
           <a:lstStyle/>
           <a:p>
             <a:pPr algn="ctr"/>
+            <a:endParaRPr/>
           </a:p>
         </p:txBody>
       </p:sp>
@@ -16632,6 +16881,7 @@
           <a:lstStyle/>
           <a:p>
             <a:pPr algn="ctr"/>
+            <a:endParaRPr/>
           </a:p>
         </p:txBody>
       </p:sp>
@@ -16675,6 +16925,7 @@
           <a:lstStyle/>
           <a:p>
             <a:pPr algn="ctr"/>
+            <a:endParaRPr/>
           </a:p>
         </p:txBody>
       </p:sp>
@@ -16795,7 +17046,7 @@
 </file>
 
 <file path=ppt/slides/slide22.xml><?xml version="1.0" encoding="utf-8"?>
-<p:sld xmlns:a="http://schemas.openxmlformats.org/drawingml/2006/main" xmlns:p="http://schemas.openxmlformats.org/presentationml/2006/main" xmlns:r="http://schemas.openxmlformats.org/officeDocument/2006/relationships">
+<p:sld xmlns:a="http://schemas.openxmlformats.org/drawingml/2006/main" xmlns:r="http://schemas.openxmlformats.org/officeDocument/2006/relationships" xmlns:p="http://schemas.openxmlformats.org/presentationml/2006/main">
   <p:cSld>
     <p:spTree>
       <p:nvGrpSpPr>
@@ -16803,7 +17054,14 @@
         <p:cNvGrpSpPr/>
         <p:nvPr/>
       </p:nvGrpSpPr>
-      <p:grpSpPr/>
+      <p:grpSpPr>
+        <a:xfrm>
+          <a:off x="0" y="0"/>
+          <a:ext cx="0" cy="0"/>
+          <a:chOff x="0" y="0"/>
+          <a:chExt cx="0" cy="0"/>
+        </a:xfrm>
+      </p:grpSpPr>
       <p:sp>
         <p:nvSpPr>
           <p:cNvPr id="2" name="Rectangle 1"/>
@@ -16844,6 +17102,7 @@
           <a:lstStyle/>
           <a:p>
             <a:pPr algn="ctr"/>
+            <a:endParaRPr/>
           </a:p>
         </p:txBody>
       </p:sp>
@@ -16887,6 +17146,7 @@
           <a:lstStyle/>
           <a:p>
             <a:pPr algn="ctr"/>
+            <a:endParaRPr/>
           </a:p>
         </p:txBody>
       </p:sp>
@@ -17076,6 +17336,7 @@
           <a:lstStyle/>
           <a:p>
             <a:pPr algn="ctr"/>
+            <a:endParaRPr/>
           </a:p>
         </p:txBody>
       </p:sp>
@@ -17119,6 +17380,7 @@
           <a:lstStyle/>
           <a:p>
             <a:pPr algn="ctr"/>
+            <a:endParaRPr/>
           </a:p>
         </p:txBody>
       </p:sp>
@@ -17236,6 +17498,7 @@
           <a:lstStyle/>
           <a:p>
             <a:pPr algn="ctr"/>
+            <a:endParaRPr/>
           </a:p>
         </p:txBody>
       </p:sp>
@@ -17279,6 +17542,7 @@
           <a:lstStyle/>
           <a:p>
             <a:pPr algn="ctr"/>
+            <a:endParaRPr/>
           </a:p>
         </p:txBody>
       </p:sp>
@@ -17400,6 +17664,7 @@
           <a:lstStyle/>
           <a:p>
             <a:pPr algn="ctr"/>
+            <a:endParaRPr/>
           </a:p>
         </p:txBody>
       </p:sp>
@@ -17443,6 +17708,7 @@
           <a:lstStyle/>
           <a:p>
             <a:pPr algn="ctr"/>
+            <a:endParaRPr/>
           </a:p>
         </p:txBody>
       </p:sp>
@@ -17560,6 +17826,7 @@
           <a:lstStyle/>
           <a:p>
             <a:pPr algn="ctr"/>
+            <a:endParaRPr/>
           </a:p>
         </p:txBody>
       </p:sp>
@@ -17603,6 +17870,7 @@
           <a:lstStyle/>
           <a:p>
             <a:pPr algn="ctr"/>
+            <a:endParaRPr/>
           </a:p>
         </p:txBody>
       </p:sp>
@@ -17724,6 +17992,7 @@
           <a:lstStyle/>
           <a:p>
             <a:pPr algn="ctr"/>
+            <a:endParaRPr/>
           </a:p>
         </p:txBody>
       </p:sp>
@@ -17767,6 +18036,7 @@
           <a:lstStyle/>
           <a:p>
             <a:pPr algn="ctr"/>
+            <a:endParaRPr/>
           </a:p>
         </p:txBody>
       </p:sp>
@@ -17815,7 +18085,7 @@
         <p:spPr>
           <a:xfrm>
             <a:off x="1188720" y="6062472"/>
-            <a:ext cx="9710928" cy="-91440"/>
+            <a:ext cx="9710928" cy="0"/>
           </a:xfrm>
           <a:prstGeom prst="rect">
             <a:avLst/>
@@ -17887,7 +18157,7 @@
 </file>
 
 <file path=ppt/slides/slide23.xml><?xml version="1.0" encoding="utf-8"?>
-<p:sld xmlns:a="http://schemas.openxmlformats.org/drawingml/2006/main" xmlns:p="http://schemas.openxmlformats.org/presentationml/2006/main" xmlns:r="http://schemas.openxmlformats.org/officeDocument/2006/relationships">
+<p:sld xmlns:a="http://schemas.openxmlformats.org/drawingml/2006/main" xmlns:r="http://schemas.openxmlformats.org/officeDocument/2006/relationships" xmlns:p="http://schemas.openxmlformats.org/presentationml/2006/main">
   <p:cSld>
     <p:spTree>
       <p:nvGrpSpPr>
@@ -17895,7 +18165,14 @@
         <p:cNvGrpSpPr/>
         <p:nvPr/>
       </p:nvGrpSpPr>
-      <p:grpSpPr/>
+      <p:grpSpPr>
+        <a:xfrm>
+          <a:off x="0" y="0"/>
+          <a:ext cx="0" cy="0"/>
+          <a:chOff x="0" y="0"/>
+          <a:chExt cx="0" cy="0"/>
+        </a:xfrm>
+      </p:grpSpPr>
       <p:sp>
         <p:nvSpPr>
           <p:cNvPr id="2" name="Rectangle 1"/>
@@ -17936,6 +18213,7 @@
           <a:lstStyle/>
           <a:p>
             <a:pPr algn="ctr"/>
+            <a:endParaRPr/>
           </a:p>
         </p:txBody>
       </p:sp>
@@ -17979,6 +18257,7 @@
           <a:lstStyle/>
           <a:p>
             <a:pPr algn="ctr"/>
+            <a:endParaRPr/>
           </a:p>
         </p:txBody>
       </p:sp>
@@ -18132,6 +18411,7 @@
           <a:lstStyle/>
           <a:p>
             <a:pPr algn="ctr"/>
+            <a:endParaRPr/>
           </a:p>
         </p:txBody>
       </p:sp>
@@ -18175,6 +18455,7 @@
           <a:lstStyle/>
           <a:p>
             <a:pPr algn="ctr"/>
+            <a:endParaRPr/>
           </a:p>
         </p:txBody>
       </p:sp>
@@ -18297,6 +18578,7 @@
           <a:lstStyle/>
           <a:p>
             <a:pPr algn="ctr"/>
+            <a:endParaRPr/>
           </a:p>
         </p:txBody>
       </p:sp>
@@ -18340,6 +18622,7 @@
           <a:lstStyle/>
           <a:p>
             <a:pPr algn="ctr"/>
+            <a:endParaRPr/>
           </a:p>
         </p:txBody>
       </p:sp>
@@ -18462,6 +18745,7 @@
           <a:lstStyle/>
           <a:p>
             <a:pPr algn="ctr"/>
+            <a:endParaRPr/>
           </a:p>
         </p:txBody>
       </p:sp>
@@ -18505,6 +18789,7 @@
           <a:lstStyle/>
           <a:p>
             <a:pPr algn="ctr"/>
+            <a:endParaRPr/>
           </a:p>
         </p:txBody>
       </p:sp>
@@ -18627,6 +18912,7 @@
           <a:lstStyle/>
           <a:p>
             <a:pPr algn="ctr"/>
+            <a:endParaRPr/>
           </a:p>
         </p:txBody>
       </p:sp>
@@ -18670,6 +18956,7 @@
           <a:lstStyle/>
           <a:p>
             <a:pPr algn="ctr"/>
+            <a:endParaRPr/>
           </a:p>
         </p:txBody>
       </p:sp>
@@ -18795,7 +19082,7 @@
 </file>
 
 <file path=ppt/slides/slide24.xml><?xml version="1.0" encoding="utf-8"?>
-<p:sld xmlns:a="http://schemas.openxmlformats.org/drawingml/2006/main" xmlns:p="http://schemas.openxmlformats.org/presentationml/2006/main" xmlns:r="http://schemas.openxmlformats.org/officeDocument/2006/relationships">
+<p:sld xmlns:a="http://schemas.openxmlformats.org/drawingml/2006/main" xmlns:r="http://schemas.openxmlformats.org/officeDocument/2006/relationships" xmlns:p="http://schemas.openxmlformats.org/presentationml/2006/main">
   <p:cSld>
     <p:spTree>
       <p:nvGrpSpPr>
@@ -18803,7 +19090,14 @@
         <p:cNvGrpSpPr/>
         <p:nvPr/>
       </p:nvGrpSpPr>
-      <p:grpSpPr/>
+      <p:grpSpPr>
+        <a:xfrm>
+          <a:off x="0" y="0"/>
+          <a:ext cx="0" cy="0"/>
+          <a:chOff x="0" y="0"/>
+          <a:chExt cx="0" cy="0"/>
+        </a:xfrm>
+      </p:grpSpPr>
       <p:sp>
         <p:nvSpPr>
           <p:cNvPr id="2" name="Rectangle 1"/>
@@ -18844,6 +19138,7 @@
           <a:lstStyle/>
           <a:p>
             <a:pPr algn="ctr"/>
+            <a:endParaRPr/>
           </a:p>
         </p:txBody>
       </p:sp>
@@ -18887,6 +19182,7 @@
           <a:lstStyle/>
           <a:p>
             <a:pPr algn="ctr"/>
+            <a:endParaRPr/>
           </a:p>
         </p:txBody>
       </p:sp>
@@ -19076,6 +19372,7 @@
           <a:lstStyle/>
           <a:p>
             <a:pPr algn="ctr"/>
+            <a:endParaRPr/>
           </a:p>
         </p:txBody>
       </p:sp>
@@ -19119,6 +19416,7 @@
           <a:lstStyle/>
           <a:p>
             <a:pPr algn="ctr"/>
+            <a:endParaRPr/>
           </a:p>
         </p:txBody>
       </p:sp>
@@ -19244,6 +19542,7 @@
           <a:lstStyle/>
           <a:p>
             <a:pPr algn="ctr"/>
+            <a:endParaRPr/>
           </a:p>
         </p:txBody>
       </p:sp>
@@ -19287,6 +19586,7 @@
           <a:lstStyle/>
           <a:p>
             <a:pPr algn="ctr"/>
+            <a:endParaRPr/>
           </a:p>
         </p:txBody>
       </p:sp>
@@ -19415,7 +19715,7 @@
 </file>
 
 <file path=ppt/slides/slide25.xml><?xml version="1.0" encoding="utf-8"?>
-<p:sld xmlns:a="http://schemas.openxmlformats.org/drawingml/2006/main" xmlns:p="http://schemas.openxmlformats.org/presentationml/2006/main" xmlns:r="http://schemas.openxmlformats.org/officeDocument/2006/relationships">
+<p:sld xmlns:a="http://schemas.openxmlformats.org/drawingml/2006/main" xmlns:r="http://schemas.openxmlformats.org/officeDocument/2006/relationships" xmlns:p="http://schemas.openxmlformats.org/presentationml/2006/main">
   <p:cSld>
     <p:spTree>
       <p:nvGrpSpPr>
@@ -19423,7 +19723,14 @@
         <p:cNvGrpSpPr/>
         <p:nvPr/>
       </p:nvGrpSpPr>
-      <p:grpSpPr/>
+      <p:grpSpPr>
+        <a:xfrm>
+          <a:off x="0" y="0"/>
+          <a:ext cx="0" cy="0"/>
+          <a:chOff x="0" y="0"/>
+          <a:chExt cx="0" cy="0"/>
+        </a:xfrm>
+      </p:grpSpPr>
       <p:sp>
         <p:nvSpPr>
           <p:cNvPr id="2" name="Rectangle 1"/>
@@ -19464,6 +19771,7 @@
           <a:lstStyle/>
           <a:p>
             <a:pPr algn="ctr"/>
+            <a:endParaRPr/>
           </a:p>
         </p:txBody>
       </p:sp>
@@ -19507,6 +19815,7 @@
           <a:lstStyle/>
           <a:p>
             <a:pPr algn="ctr"/>
+            <a:endParaRPr/>
           </a:p>
         </p:txBody>
       </p:sp>
@@ -19696,6 +20005,7 @@
           <a:lstStyle/>
           <a:p>
             <a:pPr algn="ctr"/>
+            <a:endParaRPr/>
           </a:p>
         </p:txBody>
       </p:sp>
@@ -19739,6 +20049,7 @@
           <a:lstStyle/>
           <a:p>
             <a:pPr algn="ctr"/>
+            <a:endParaRPr/>
           </a:p>
         </p:txBody>
       </p:sp>
@@ -19856,6 +20167,7 @@
           <a:lstStyle/>
           <a:p>
             <a:pPr algn="ctr"/>
+            <a:endParaRPr/>
           </a:p>
         </p:txBody>
       </p:sp>
@@ -19899,6 +20211,7 @@
           <a:lstStyle/>
           <a:p>
             <a:pPr algn="ctr"/>
+            <a:endParaRPr/>
           </a:p>
         </p:txBody>
       </p:sp>
@@ -20016,6 +20329,7 @@
           <a:lstStyle/>
           <a:p>
             <a:pPr algn="ctr"/>
+            <a:endParaRPr/>
           </a:p>
         </p:txBody>
       </p:sp>
@@ -20059,6 +20373,7 @@
           <a:lstStyle/>
           <a:p>
             <a:pPr algn="ctr"/>
+            <a:endParaRPr/>
           </a:p>
         </p:txBody>
       </p:sp>
@@ -20176,6 +20491,7 @@
           <a:lstStyle/>
           <a:p>
             <a:pPr algn="ctr"/>
+            <a:endParaRPr/>
           </a:p>
         </p:txBody>
       </p:sp>
@@ -20219,6 +20535,7 @@
           <a:lstStyle/>
           <a:p>
             <a:pPr algn="ctr"/>
+            <a:endParaRPr/>
           </a:p>
         </p:txBody>
       </p:sp>
@@ -20339,7 +20656,7 @@
 </file>
 
 <file path=ppt/slides/slide26.xml><?xml version="1.0" encoding="utf-8"?>
-<p:sld xmlns:a="http://schemas.openxmlformats.org/drawingml/2006/main" xmlns:p="http://schemas.openxmlformats.org/presentationml/2006/main" xmlns:r="http://schemas.openxmlformats.org/officeDocument/2006/relationships">
+<p:sld xmlns:a="http://schemas.openxmlformats.org/drawingml/2006/main" xmlns:r="http://schemas.openxmlformats.org/officeDocument/2006/relationships" xmlns:p="http://schemas.openxmlformats.org/presentationml/2006/main">
   <p:cSld>
     <p:spTree>
       <p:nvGrpSpPr>
@@ -20347,7 +20664,14 @@
         <p:cNvGrpSpPr/>
         <p:nvPr/>
       </p:nvGrpSpPr>
-      <p:grpSpPr/>
+      <p:grpSpPr>
+        <a:xfrm>
+          <a:off x="0" y="0"/>
+          <a:ext cx="0" cy="0"/>
+          <a:chOff x="0" y="0"/>
+          <a:chExt cx="0" cy="0"/>
+        </a:xfrm>
+      </p:grpSpPr>
       <p:sp>
         <p:nvSpPr>
           <p:cNvPr id="2" name="Rectangle 1"/>
@@ -20388,6 +20712,7 @@
           <a:lstStyle/>
           <a:p>
             <a:pPr algn="ctr"/>
+            <a:endParaRPr/>
           </a:p>
         </p:txBody>
       </p:sp>
@@ -20431,6 +20756,7 @@
           <a:lstStyle/>
           <a:p>
             <a:pPr algn="ctr"/>
+            <a:endParaRPr/>
           </a:p>
         </p:txBody>
       </p:sp>
@@ -20620,6 +20946,7 @@
           <a:lstStyle/>
           <a:p>
             <a:pPr algn="ctr"/>
+            <a:endParaRPr/>
           </a:p>
         </p:txBody>
       </p:sp>
@@ -20663,6 +20990,7 @@
           <a:lstStyle/>
           <a:p>
             <a:pPr algn="ctr"/>
+            <a:endParaRPr/>
           </a:p>
         </p:txBody>
       </p:sp>
@@ -20780,6 +21108,7 @@
           <a:lstStyle/>
           <a:p>
             <a:pPr algn="ctr"/>
+            <a:endParaRPr/>
           </a:p>
         </p:txBody>
       </p:sp>
@@ -20823,6 +21152,7 @@
           <a:lstStyle/>
           <a:p>
             <a:pPr algn="ctr"/>
+            <a:endParaRPr/>
           </a:p>
         </p:txBody>
       </p:sp>
@@ -20940,6 +21270,7 @@
           <a:lstStyle/>
           <a:p>
             <a:pPr algn="ctr"/>
+            <a:endParaRPr/>
           </a:p>
         </p:txBody>
       </p:sp>
@@ -20983,6 +21314,7 @@
           <a:lstStyle/>
           <a:p>
             <a:pPr algn="ctr"/>
+            <a:endParaRPr/>
           </a:p>
         </p:txBody>
       </p:sp>
@@ -21100,6 +21432,7 @@
           <a:lstStyle/>
           <a:p>
             <a:pPr algn="ctr"/>
+            <a:endParaRPr/>
           </a:p>
         </p:txBody>
       </p:sp>
@@ -21143,6 +21476,7 @@
           <a:lstStyle/>
           <a:p>
             <a:pPr algn="ctr"/>
+            <a:endParaRPr/>
           </a:p>
         </p:txBody>
       </p:sp>
@@ -21263,7 +21597,7 @@
 </file>
 
 <file path=ppt/slides/slide27.xml><?xml version="1.0" encoding="utf-8"?>
-<p:sld xmlns:a="http://schemas.openxmlformats.org/drawingml/2006/main" xmlns:p="http://schemas.openxmlformats.org/presentationml/2006/main" xmlns:r="http://schemas.openxmlformats.org/officeDocument/2006/relationships">
+<p:sld xmlns:a="http://schemas.openxmlformats.org/drawingml/2006/main" xmlns:r="http://schemas.openxmlformats.org/officeDocument/2006/relationships" xmlns:p="http://schemas.openxmlformats.org/presentationml/2006/main">
   <p:cSld>
     <p:spTree>
       <p:nvGrpSpPr>
@@ -21271,7 +21605,14 @@
         <p:cNvGrpSpPr/>
         <p:nvPr/>
       </p:nvGrpSpPr>
-      <p:grpSpPr/>
+      <p:grpSpPr>
+        <a:xfrm>
+          <a:off x="0" y="0"/>
+          <a:ext cx="0" cy="0"/>
+          <a:chOff x="0" y="0"/>
+          <a:chExt cx="0" cy="0"/>
+        </a:xfrm>
+      </p:grpSpPr>
       <p:sp>
         <p:nvSpPr>
           <p:cNvPr id="2" name="Rectangle 1"/>
@@ -21312,6 +21653,7 @@
           <a:lstStyle/>
           <a:p>
             <a:pPr algn="ctr"/>
+            <a:endParaRPr/>
           </a:p>
         </p:txBody>
       </p:sp>
@@ -21355,6 +21697,7 @@
           <a:lstStyle/>
           <a:p>
             <a:pPr algn="ctr"/>
+            <a:endParaRPr/>
           </a:p>
         </p:txBody>
       </p:sp>
@@ -21508,6 +21851,7 @@
           <a:lstStyle/>
           <a:p>
             <a:pPr algn="ctr"/>
+            <a:endParaRPr/>
           </a:p>
         </p:txBody>
       </p:sp>
@@ -21551,6 +21895,7 @@
           <a:lstStyle/>
           <a:p>
             <a:pPr algn="ctr"/>
+            <a:endParaRPr/>
           </a:p>
         </p:txBody>
       </p:sp>
@@ -21668,6 +22013,7 @@
           <a:lstStyle/>
           <a:p>
             <a:pPr algn="ctr"/>
+            <a:endParaRPr/>
           </a:p>
         </p:txBody>
       </p:sp>
@@ -21711,6 +22057,7 @@
           <a:lstStyle/>
           <a:p>
             <a:pPr algn="ctr"/>
+            <a:endParaRPr/>
           </a:p>
         </p:txBody>
       </p:sp>
@@ -21828,6 +22175,7 @@
           <a:lstStyle/>
           <a:p>
             <a:pPr algn="ctr"/>
+            <a:endParaRPr/>
           </a:p>
         </p:txBody>
       </p:sp>
@@ -21871,6 +22219,7 @@
           <a:lstStyle/>
           <a:p>
             <a:pPr algn="ctr"/>
+            <a:endParaRPr/>
           </a:p>
         </p:txBody>
       </p:sp>
@@ -21988,6 +22337,7 @@
           <a:lstStyle/>
           <a:p>
             <a:pPr algn="ctr"/>
+            <a:endParaRPr/>
           </a:p>
         </p:txBody>
       </p:sp>
@@ -22031,6 +22381,7 @@
           <a:lstStyle/>
           <a:p>
             <a:pPr algn="ctr"/>
+            <a:endParaRPr/>
           </a:p>
         </p:txBody>
       </p:sp>
@@ -22148,6 +22499,7 @@
           <a:lstStyle/>
           <a:p>
             <a:pPr algn="ctr"/>
+            <a:endParaRPr/>
           </a:p>
         </p:txBody>
       </p:sp>
@@ -22191,6 +22543,7 @@
           <a:lstStyle/>
           <a:p>
             <a:pPr algn="ctr"/>
+            <a:endParaRPr/>
           </a:p>
         </p:txBody>
       </p:sp>
@@ -22239,7 +22592,7 @@
         <p:spPr>
           <a:xfrm>
             <a:off x="1280160" y="5788152"/>
-            <a:ext cx="9528048" cy="-45720"/>
+            <a:ext cx="9528048" cy="0"/>
           </a:xfrm>
           <a:prstGeom prst="rect">
             <a:avLst/>
@@ -22311,7 +22664,7 @@
 </file>
 
 <file path=ppt/slides/slide28.xml><?xml version="1.0" encoding="utf-8"?>
-<p:sld xmlns:a="http://schemas.openxmlformats.org/drawingml/2006/main" xmlns:p="http://schemas.openxmlformats.org/presentationml/2006/main" xmlns:r="http://schemas.openxmlformats.org/officeDocument/2006/relationships">
+<p:sld xmlns:a="http://schemas.openxmlformats.org/drawingml/2006/main" xmlns:r="http://schemas.openxmlformats.org/officeDocument/2006/relationships" xmlns:p="http://schemas.openxmlformats.org/presentationml/2006/main">
   <p:cSld>
     <p:spTree>
       <p:nvGrpSpPr>
@@ -22319,7 +22672,14 @@
         <p:cNvGrpSpPr/>
         <p:nvPr/>
       </p:nvGrpSpPr>
-      <p:grpSpPr/>
+      <p:grpSpPr>
+        <a:xfrm>
+          <a:off x="0" y="0"/>
+          <a:ext cx="0" cy="0"/>
+          <a:chOff x="0" y="0"/>
+          <a:chExt cx="0" cy="0"/>
+        </a:xfrm>
+      </p:grpSpPr>
       <p:sp>
         <p:nvSpPr>
           <p:cNvPr id="2" name="Rectangle 1"/>
@@ -22360,6 +22720,7 @@
           <a:lstStyle/>
           <a:p>
             <a:pPr algn="ctr"/>
+            <a:endParaRPr/>
           </a:p>
         </p:txBody>
       </p:sp>
@@ -22403,6 +22764,7 @@
           <a:lstStyle/>
           <a:p>
             <a:pPr algn="ctr"/>
+            <a:endParaRPr/>
           </a:p>
         </p:txBody>
       </p:sp>
@@ -22556,6 +22918,7 @@
           <a:lstStyle/>
           <a:p>
             <a:pPr algn="ctr"/>
+            <a:endParaRPr/>
           </a:p>
         </p:txBody>
       </p:sp>
@@ -22599,6 +22962,7 @@
           <a:lstStyle/>
           <a:p>
             <a:pPr algn="ctr"/>
+            <a:endParaRPr/>
           </a:p>
         </p:txBody>
       </p:sp>
@@ -22716,6 +23080,7 @@
           <a:lstStyle/>
           <a:p>
             <a:pPr algn="ctr"/>
+            <a:endParaRPr/>
           </a:p>
         </p:txBody>
       </p:sp>
@@ -22759,6 +23124,7 @@
           <a:lstStyle/>
           <a:p>
             <a:pPr algn="ctr"/>
+            <a:endParaRPr/>
           </a:p>
         </p:txBody>
       </p:sp>
@@ -22876,6 +23242,7 @@
           <a:lstStyle/>
           <a:p>
             <a:pPr algn="ctr"/>
+            <a:endParaRPr/>
           </a:p>
         </p:txBody>
       </p:sp>
@@ -22919,6 +23286,7 @@
           <a:lstStyle/>
           <a:p>
             <a:pPr algn="ctr"/>
+            <a:endParaRPr/>
           </a:p>
         </p:txBody>
       </p:sp>
@@ -23036,6 +23404,7 @@
           <a:lstStyle/>
           <a:p>
             <a:pPr algn="ctr"/>
+            <a:endParaRPr/>
           </a:p>
         </p:txBody>
       </p:sp>
@@ -23079,6 +23448,7 @@
           <a:lstStyle/>
           <a:p>
             <a:pPr algn="ctr"/>
+            <a:endParaRPr/>
           </a:p>
         </p:txBody>
       </p:sp>
@@ -23199,7 +23569,7 @@
 </file>
 
 <file path=ppt/slides/slide29.xml><?xml version="1.0" encoding="utf-8"?>
-<p:sld xmlns:a="http://schemas.openxmlformats.org/drawingml/2006/main" xmlns:p="http://schemas.openxmlformats.org/presentationml/2006/main" xmlns:r="http://schemas.openxmlformats.org/officeDocument/2006/relationships">
+<p:sld xmlns:a="http://schemas.openxmlformats.org/drawingml/2006/main" xmlns:r="http://schemas.openxmlformats.org/officeDocument/2006/relationships" xmlns:p="http://schemas.openxmlformats.org/presentationml/2006/main">
   <p:cSld>
     <p:spTree>
       <p:nvGrpSpPr>
@@ -23207,7 +23577,14 @@
         <p:cNvGrpSpPr/>
         <p:nvPr/>
       </p:nvGrpSpPr>
-      <p:grpSpPr/>
+      <p:grpSpPr>
+        <a:xfrm>
+          <a:off x="0" y="0"/>
+          <a:ext cx="0" cy="0"/>
+          <a:chOff x="0" y="0"/>
+          <a:chExt cx="0" cy="0"/>
+        </a:xfrm>
+      </p:grpSpPr>
       <p:sp>
         <p:nvSpPr>
           <p:cNvPr id="2" name="Rectangle 1"/>
@@ -23248,6 +23625,7 @@
           <a:lstStyle/>
           <a:p>
             <a:pPr algn="ctr"/>
+            <a:endParaRPr/>
           </a:p>
         </p:txBody>
       </p:sp>
@@ -23291,6 +23669,7 @@
           <a:lstStyle/>
           <a:p>
             <a:pPr algn="ctr"/>
+            <a:endParaRPr/>
           </a:p>
         </p:txBody>
       </p:sp>
@@ -23567,6 +23946,7 @@
           <a:lstStyle/>
           <a:p>
             <a:pPr algn="ctr"/>
+            <a:endParaRPr/>
           </a:p>
         </p:txBody>
       </p:sp>
@@ -23610,6 +23990,7 @@
           <a:lstStyle/>
           <a:p>
             <a:pPr algn="ctr"/>
+            <a:endParaRPr/>
           </a:p>
         </p:txBody>
       </p:sp>
@@ -23658,7 +24039,7 @@
         <p:spPr>
           <a:xfrm>
             <a:off x="1188720" y="5971031"/>
-            <a:ext cx="9710928" cy="-91440"/>
+            <a:ext cx="9710928" cy="0"/>
           </a:xfrm>
           <a:prstGeom prst="rect">
             <a:avLst/>
@@ -23730,7 +24111,7 @@
 </file>
 
 <file path=ppt/slides/slide3.xml><?xml version="1.0" encoding="utf-8"?>
-<p:sld xmlns:a="http://schemas.openxmlformats.org/drawingml/2006/main" xmlns:p="http://schemas.openxmlformats.org/presentationml/2006/main" xmlns:r="http://schemas.openxmlformats.org/officeDocument/2006/relationships">
+<p:sld xmlns:a="http://schemas.openxmlformats.org/drawingml/2006/main" xmlns:r="http://schemas.openxmlformats.org/officeDocument/2006/relationships" xmlns:p="http://schemas.openxmlformats.org/presentationml/2006/main">
   <p:cSld>
     <p:spTree>
       <p:nvGrpSpPr>
@@ -23738,7 +24119,14 @@
         <p:cNvGrpSpPr/>
         <p:nvPr/>
       </p:nvGrpSpPr>
-      <p:grpSpPr/>
+      <p:grpSpPr>
+        <a:xfrm>
+          <a:off x="0" y="0"/>
+          <a:ext cx="0" cy="0"/>
+          <a:chOff x="0" y="0"/>
+          <a:chExt cx="0" cy="0"/>
+        </a:xfrm>
+      </p:grpSpPr>
       <p:sp>
         <p:nvSpPr>
           <p:cNvPr id="2" name="Rectangle 1"/>
@@ -23779,6 +24167,7 @@
           <a:lstStyle/>
           <a:p>
             <a:pPr algn="ctr"/>
+            <a:endParaRPr/>
           </a:p>
         </p:txBody>
       </p:sp>
@@ -23822,6 +24211,7 @@
           <a:lstStyle/>
           <a:p>
             <a:pPr algn="ctr"/>
+            <a:endParaRPr/>
           </a:p>
         </p:txBody>
       </p:sp>
@@ -24011,6 +24401,7 @@
           <a:lstStyle/>
           <a:p>
             <a:pPr algn="ctr"/>
+            <a:endParaRPr/>
           </a:p>
         </p:txBody>
       </p:sp>
@@ -24054,6 +24445,7 @@
           <a:lstStyle/>
           <a:p>
             <a:pPr algn="ctr"/>
+            <a:endParaRPr/>
           </a:p>
         </p:txBody>
       </p:sp>
@@ -24199,6 +24591,7 @@
           <a:lstStyle/>
           <a:p>
             <a:pPr algn="ctr"/>
+            <a:endParaRPr/>
           </a:p>
         </p:txBody>
       </p:sp>
@@ -24242,6 +24635,7 @@
           <a:lstStyle/>
           <a:p>
             <a:pPr algn="ctr"/>
+            <a:endParaRPr/>
           </a:p>
         </p:txBody>
       </p:sp>
@@ -24383,6 +24777,7 @@
           <a:lstStyle/>
           <a:p>
             <a:pPr algn="ctr"/>
+            <a:endParaRPr/>
           </a:p>
         </p:txBody>
       </p:sp>
@@ -24426,6 +24821,7 @@
           <a:lstStyle/>
           <a:p>
             <a:pPr algn="ctr"/>
+            <a:endParaRPr/>
           </a:p>
         </p:txBody>
       </p:sp>
@@ -24562,7 +24958,7 @@
 </file>
 
 <file path=ppt/slides/slide30.xml><?xml version="1.0" encoding="utf-8"?>
-<p:sld xmlns:a="http://schemas.openxmlformats.org/drawingml/2006/main" xmlns:p="http://schemas.openxmlformats.org/presentationml/2006/main" xmlns:r="http://schemas.openxmlformats.org/officeDocument/2006/relationships">
+<p:sld xmlns:a="http://schemas.openxmlformats.org/drawingml/2006/main" xmlns:r="http://schemas.openxmlformats.org/officeDocument/2006/relationships" xmlns:p="http://schemas.openxmlformats.org/presentationml/2006/main">
   <p:cSld>
     <p:spTree>
       <p:nvGrpSpPr>
@@ -24570,7 +24966,14 @@
         <p:cNvGrpSpPr/>
         <p:nvPr/>
       </p:nvGrpSpPr>
-      <p:grpSpPr/>
+      <p:grpSpPr>
+        <a:xfrm>
+          <a:off x="0" y="0"/>
+          <a:ext cx="0" cy="0"/>
+          <a:chOff x="0" y="0"/>
+          <a:chExt cx="0" cy="0"/>
+        </a:xfrm>
+      </p:grpSpPr>
       <p:sp>
         <p:nvSpPr>
           <p:cNvPr id="2" name="Rectangle 1"/>
@@ -24611,6 +25014,7 @@
           <a:lstStyle/>
           <a:p>
             <a:pPr algn="ctr"/>
+            <a:endParaRPr/>
           </a:p>
         </p:txBody>
       </p:sp>
@@ -24654,6 +25058,7 @@
           <a:lstStyle/>
           <a:p>
             <a:pPr algn="ctr"/>
+            <a:endParaRPr/>
           </a:p>
         </p:txBody>
       </p:sp>
@@ -24809,7 +25214,7 @@
 </file>
 
 <file path=ppt/slides/slide31.xml><?xml version="1.0" encoding="utf-8"?>
-<p:sld xmlns:a="http://schemas.openxmlformats.org/drawingml/2006/main" xmlns:p="http://schemas.openxmlformats.org/presentationml/2006/main" xmlns:r="http://schemas.openxmlformats.org/officeDocument/2006/relationships">
+<p:sld xmlns:a="http://schemas.openxmlformats.org/drawingml/2006/main" xmlns:r="http://schemas.openxmlformats.org/officeDocument/2006/relationships" xmlns:p="http://schemas.openxmlformats.org/presentationml/2006/main">
   <p:cSld>
     <p:spTree>
       <p:nvGrpSpPr>
@@ -24817,7 +25222,14 @@
         <p:cNvGrpSpPr/>
         <p:nvPr/>
       </p:nvGrpSpPr>
-      <p:grpSpPr/>
+      <p:grpSpPr>
+        <a:xfrm>
+          <a:off x="0" y="0"/>
+          <a:ext cx="0" cy="0"/>
+          <a:chOff x="0" y="0"/>
+          <a:chExt cx="0" cy="0"/>
+        </a:xfrm>
+      </p:grpSpPr>
       <p:sp>
         <p:nvSpPr>
           <p:cNvPr id="2" name="Rectangle 1"/>
@@ -24858,6 +25270,7 @@
           <a:lstStyle/>
           <a:p>
             <a:pPr algn="ctr"/>
+            <a:endParaRPr/>
           </a:p>
         </p:txBody>
       </p:sp>
@@ -24901,6 +25314,7 @@
           <a:lstStyle/>
           <a:p>
             <a:pPr algn="ctr"/>
+            <a:endParaRPr/>
           </a:p>
         </p:txBody>
       </p:sp>
@@ -25090,6 +25504,7 @@
           <a:lstStyle/>
           <a:p>
             <a:pPr algn="ctr"/>
+            <a:endParaRPr/>
           </a:p>
         </p:txBody>
       </p:sp>
@@ -25133,6 +25548,7 @@
           <a:lstStyle/>
           <a:p>
             <a:pPr algn="ctr"/>
+            <a:endParaRPr/>
           </a:p>
         </p:txBody>
       </p:sp>
@@ -25180,16 +25596,16 @@
         </p:nvSpPr>
         <p:spPr>
           <a:xfrm>
-            <a:off x="914400" y="2496312"/>
-            <a:ext cx="2990088" cy="2651760"/>
-          </a:xfrm>
-          <a:prstGeom prst="rect">
-            <a:avLst/>
-          </a:prstGeom>
-          <a:noFill/>
-        </p:spPr>
-        <p:txBody>
-          <a:bodyPr wrap="none">
+            <a:off x="914400" y="2441448"/>
+            <a:ext cx="2926080" cy="784830"/>
+          </a:xfrm>
+          <a:prstGeom prst="rect">
+            <a:avLst/>
+          </a:prstGeom>
+          <a:noFill/>
+        </p:spPr>
+        <p:txBody>
+          <a:bodyPr wrap="square">
             <a:spAutoFit/>
           </a:bodyPr>
           <a:lstStyle/>
@@ -25203,6 +25619,7 @@
               </a:defRPr>
             </a:pPr>
             <a:r>
+              <a:rPr dirty="0"/>
               <a:t>Personal or confidential information is leaked to the outside.</a:t>
             </a:r>
           </a:p>
@@ -25250,6 +25667,7 @@
           <a:lstStyle/>
           <a:p>
             <a:pPr algn="ctr"/>
+            <a:endParaRPr/>
           </a:p>
         </p:txBody>
       </p:sp>
@@ -25293,6 +25711,7 @@
           <a:lstStyle/>
           <a:p>
             <a:pPr algn="ctr"/>
+            <a:endParaRPr/>
           </a:p>
         </p:txBody>
       </p:sp>
@@ -25341,15 +25760,15 @@
         <p:spPr>
           <a:xfrm>
             <a:off x="4617720" y="2496312"/>
-            <a:ext cx="2990088" cy="2651760"/>
-          </a:xfrm>
-          <a:prstGeom prst="rect">
-            <a:avLst/>
-          </a:prstGeom>
-          <a:noFill/>
-        </p:spPr>
-        <p:txBody>
-          <a:bodyPr wrap="none">
+            <a:ext cx="2926080" cy="553998"/>
+          </a:xfrm>
+          <a:prstGeom prst="rect">
+            <a:avLst/>
+          </a:prstGeom>
+          <a:noFill/>
+        </p:spPr>
+        <p:txBody>
+          <a:bodyPr wrap="square">
             <a:spAutoFit/>
           </a:bodyPr>
           <a:lstStyle/>
@@ -25410,6 +25829,7 @@
           <a:lstStyle/>
           <a:p>
             <a:pPr algn="ctr"/>
+            <a:endParaRPr/>
           </a:p>
         </p:txBody>
       </p:sp>
@@ -25453,6 +25873,7 @@
           <a:lstStyle/>
           <a:p>
             <a:pPr algn="ctr"/>
+            <a:endParaRPr/>
           </a:p>
         </p:txBody>
       </p:sp>
@@ -25500,16 +25921,16 @@
         </p:nvSpPr>
         <p:spPr>
           <a:xfrm>
-            <a:off x="8321040" y="2496312"/>
-            <a:ext cx="2990088" cy="2651760"/>
-          </a:xfrm>
-          <a:prstGeom prst="rect">
-            <a:avLst/>
-          </a:prstGeom>
-          <a:noFill/>
-        </p:spPr>
-        <p:txBody>
-          <a:bodyPr wrap="none">
+            <a:off x="8321040" y="2441448"/>
+            <a:ext cx="2926080" cy="784830"/>
+          </a:xfrm>
+          <a:prstGeom prst="rect">
+            <a:avLst/>
+          </a:prstGeom>
+          <a:noFill/>
+        </p:spPr>
+        <p:txBody>
+          <a:bodyPr wrap="square">
             <a:spAutoFit/>
           </a:bodyPr>
           <a:lstStyle/>
@@ -25523,6 +25944,7 @@
               </a:defRPr>
             </a:pPr>
             <a:r>
+              <a:rPr dirty="0"/>
               <a:t>A service becomes unavailable because of an attack or similar problem.</a:t>
             </a:r>
           </a:p>
@@ -25573,7 +25995,7 @@
 </file>
 
 <file path=ppt/slides/slide32.xml><?xml version="1.0" encoding="utf-8"?>
-<p:sld xmlns:a="http://schemas.openxmlformats.org/drawingml/2006/main" xmlns:p="http://schemas.openxmlformats.org/presentationml/2006/main" xmlns:r="http://schemas.openxmlformats.org/officeDocument/2006/relationships">
+<p:sld xmlns:a="http://schemas.openxmlformats.org/drawingml/2006/main" xmlns:r="http://schemas.openxmlformats.org/officeDocument/2006/relationships" xmlns:p="http://schemas.openxmlformats.org/presentationml/2006/main">
   <p:cSld>
     <p:spTree>
       <p:nvGrpSpPr>
@@ -25581,7 +26003,14 @@
         <p:cNvGrpSpPr/>
         <p:nvPr/>
       </p:nvGrpSpPr>
-      <p:grpSpPr/>
+      <p:grpSpPr>
+        <a:xfrm>
+          <a:off x="0" y="0"/>
+          <a:ext cx="0" cy="0"/>
+          <a:chOff x="0" y="0"/>
+          <a:chExt cx="0" cy="0"/>
+        </a:xfrm>
+      </p:grpSpPr>
       <p:sp>
         <p:nvSpPr>
           <p:cNvPr id="2" name="Rectangle 1"/>
@@ -25622,6 +26051,7 @@
           <a:lstStyle/>
           <a:p>
             <a:pPr algn="ctr"/>
+            <a:endParaRPr/>
           </a:p>
         </p:txBody>
       </p:sp>
@@ -25665,6 +26095,7 @@
           <a:lstStyle/>
           <a:p>
             <a:pPr algn="ctr"/>
+            <a:endParaRPr/>
           </a:p>
         </p:txBody>
       </p:sp>
@@ -25854,6 +26285,7 @@
           <a:lstStyle/>
           <a:p>
             <a:pPr algn="ctr"/>
+            <a:endParaRPr/>
           </a:p>
         </p:txBody>
       </p:sp>
@@ -25897,6 +26329,7 @@
           <a:lstStyle/>
           <a:p>
             <a:pPr algn="ctr"/>
+            <a:endParaRPr/>
           </a:p>
         </p:txBody>
       </p:sp>
@@ -26014,6 +26447,7 @@
           <a:lstStyle/>
           <a:p>
             <a:pPr algn="ctr"/>
+            <a:endParaRPr/>
           </a:p>
         </p:txBody>
       </p:sp>
@@ -26057,6 +26491,7 @@
           <a:lstStyle/>
           <a:p>
             <a:pPr algn="ctr"/>
+            <a:endParaRPr/>
           </a:p>
         </p:txBody>
       </p:sp>
@@ -26174,6 +26609,7 @@
           <a:lstStyle/>
           <a:p>
             <a:pPr algn="ctr"/>
+            <a:endParaRPr/>
           </a:p>
         </p:txBody>
       </p:sp>
@@ -26217,6 +26653,7 @@
           <a:lstStyle/>
           <a:p>
             <a:pPr algn="ctr"/>
+            <a:endParaRPr/>
           </a:p>
         </p:txBody>
       </p:sp>
@@ -26334,6 +26771,7 @@
           <a:lstStyle/>
           <a:p>
             <a:pPr algn="ctr"/>
+            <a:endParaRPr/>
           </a:p>
         </p:txBody>
       </p:sp>
@@ -26377,6 +26815,7 @@
           <a:lstStyle/>
           <a:p>
             <a:pPr algn="ctr"/>
+            <a:endParaRPr/>
           </a:p>
         </p:txBody>
       </p:sp>
@@ -26494,6 +26933,7 @@
           <a:lstStyle/>
           <a:p>
             <a:pPr algn="ctr"/>
+            <a:endParaRPr/>
           </a:p>
         </p:txBody>
       </p:sp>
@@ -26537,6 +26977,7 @@
           <a:lstStyle/>
           <a:p>
             <a:pPr algn="ctr"/>
+            <a:endParaRPr/>
           </a:p>
         </p:txBody>
       </p:sp>
@@ -26654,6 +27095,7 @@
           <a:lstStyle/>
           <a:p>
             <a:pPr algn="ctr"/>
+            <a:endParaRPr/>
           </a:p>
         </p:txBody>
       </p:sp>
@@ -26697,6 +27139,7 @@
           <a:lstStyle/>
           <a:p>
             <a:pPr algn="ctr"/>
+            <a:endParaRPr/>
           </a:p>
         </p:txBody>
       </p:sp>
@@ -26817,7 +27260,7 @@
 </file>
 
 <file path=ppt/slides/slide33.xml><?xml version="1.0" encoding="utf-8"?>
-<p:sld xmlns:a="http://schemas.openxmlformats.org/drawingml/2006/main" xmlns:p="http://schemas.openxmlformats.org/presentationml/2006/main" xmlns:r="http://schemas.openxmlformats.org/officeDocument/2006/relationships">
+<p:sld xmlns:a="http://schemas.openxmlformats.org/drawingml/2006/main" xmlns:r="http://schemas.openxmlformats.org/officeDocument/2006/relationships" xmlns:p="http://schemas.openxmlformats.org/presentationml/2006/main">
   <p:cSld>
     <p:spTree>
       <p:nvGrpSpPr>
@@ -26825,7 +27268,14 @@
         <p:cNvGrpSpPr/>
         <p:nvPr/>
       </p:nvGrpSpPr>
-      <p:grpSpPr/>
+      <p:grpSpPr>
+        <a:xfrm>
+          <a:off x="0" y="0"/>
+          <a:ext cx="0" cy="0"/>
+          <a:chOff x="0" y="0"/>
+          <a:chExt cx="0" cy="0"/>
+        </a:xfrm>
+      </p:grpSpPr>
       <p:sp>
         <p:nvSpPr>
           <p:cNvPr id="2" name="Rectangle 1"/>
@@ -26866,6 +27316,7 @@
           <a:lstStyle/>
           <a:p>
             <a:pPr algn="ctr"/>
+            <a:endParaRPr/>
           </a:p>
         </p:txBody>
       </p:sp>
@@ -26909,6 +27360,7 @@
           <a:lstStyle/>
           <a:p>
             <a:pPr algn="ctr"/>
+            <a:endParaRPr/>
           </a:p>
         </p:txBody>
       </p:sp>
@@ -27098,6 +27550,7 @@
           <a:lstStyle/>
           <a:p>
             <a:pPr algn="ctr"/>
+            <a:endParaRPr/>
           </a:p>
         </p:txBody>
       </p:sp>
@@ -27141,6 +27594,7 @@
           <a:lstStyle/>
           <a:p>
             <a:pPr algn="ctr"/>
+            <a:endParaRPr/>
           </a:p>
         </p:txBody>
       </p:sp>
@@ -27189,15 +27643,15 @@
         <p:spPr>
           <a:xfrm>
             <a:off x="868680" y="2450592"/>
-            <a:ext cx="2898648" cy="2651760"/>
-          </a:xfrm>
-          <a:prstGeom prst="rect">
-            <a:avLst/>
-          </a:prstGeom>
-          <a:noFill/>
-        </p:spPr>
-        <p:txBody>
-          <a:bodyPr wrap="none">
+            <a:ext cx="2898648" cy="1015663"/>
+          </a:xfrm>
+          <a:prstGeom prst="rect">
+            <a:avLst/>
+          </a:prstGeom>
+          <a:noFill/>
+        </p:spPr>
+        <p:txBody>
+          <a:bodyPr wrap="square">
             <a:spAutoFit/>
           </a:bodyPr>
           <a:lstStyle/>
@@ -27211,11 +27665,17 @@
               </a:defRPr>
             </a:pPr>
             <a:r>
+              <a:rPr dirty="0"/>
               <a:t>Disconnect the infected machine from the network.</a:t>
             </a:r>
-            <a:br/>
-            <a:br/>
-            <a:r>
+            <a:br>
+              <a:rPr dirty="0"/>
+            </a:br>
+            <a:br>
+              <a:rPr dirty="0"/>
+            </a:br>
+            <a:r>
+              <a:rPr dirty="0"/>
               <a:t>Goal: stop damage spreading.</a:t>
             </a:r>
           </a:p>
@@ -27263,6 +27723,7 @@
           <a:lstStyle/>
           <a:p>
             <a:pPr algn="ctr"/>
+            <a:endParaRPr/>
           </a:p>
         </p:txBody>
       </p:sp>
@@ -27306,6 +27767,7 @@
           <a:lstStyle/>
           <a:p>
             <a:pPr algn="ctr"/>
+            <a:endParaRPr/>
           </a:p>
         </p:txBody>
       </p:sp>
@@ -27354,15 +27816,15 @@
         <p:spPr>
           <a:xfrm>
             <a:off x="4663440" y="2450592"/>
-            <a:ext cx="2898648" cy="2651760"/>
-          </a:xfrm>
-          <a:prstGeom prst="rect">
-            <a:avLst/>
-          </a:prstGeom>
-          <a:noFill/>
-        </p:spPr>
-        <p:txBody>
-          <a:bodyPr wrap="none">
+            <a:ext cx="2770632" cy="1246495"/>
+          </a:xfrm>
+          <a:prstGeom prst="rect">
+            <a:avLst/>
+          </a:prstGeom>
+          <a:noFill/>
+        </p:spPr>
+        <p:txBody>
+          <a:bodyPr wrap="square">
             <a:spAutoFit/>
           </a:bodyPr>
           <a:lstStyle/>
@@ -27376,11 +27838,17 @@
               </a:defRPr>
             </a:pPr>
             <a:r>
+              <a:rPr dirty="0"/>
               <a:t>Remove the malware and the cause.</a:t>
             </a:r>
-            <a:br/>
-            <a:br/>
-            <a:r>
+            <a:br>
+              <a:rPr dirty="0"/>
+            </a:br>
+            <a:br>
+              <a:rPr dirty="0"/>
+            </a:br>
+            <a:r>
+              <a:rPr dirty="0"/>
               <a:t>Goal: stop the source of the problem.</a:t>
             </a:r>
           </a:p>
@@ -27428,6 +27896,7 @@
           <a:lstStyle/>
           <a:p>
             <a:pPr algn="ctr"/>
+            <a:endParaRPr/>
           </a:p>
         </p:txBody>
       </p:sp>
@@ -27471,6 +27940,7 @@
           <a:lstStyle/>
           <a:p>
             <a:pPr algn="ctr"/>
+            <a:endParaRPr/>
           </a:p>
         </p:txBody>
       </p:sp>
@@ -27519,15 +27989,15 @@
         <p:spPr>
           <a:xfrm>
             <a:off x="8458200" y="2450592"/>
-            <a:ext cx="2898648" cy="2651760"/>
-          </a:xfrm>
-          <a:prstGeom prst="rect">
-            <a:avLst/>
-          </a:prstGeom>
-          <a:noFill/>
-        </p:spPr>
-        <p:txBody>
-          <a:bodyPr wrap="none">
+            <a:ext cx="2865120" cy="784830"/>
+          </a:xfrm>
+          <a:prstGeom prst="rect">
+            <a:avLst/>
+          </a:prstGeom>
+          <a:noFill/>
+        </p:spPr>
+        <p:txBody>
+          <a:bodyPr wrap="square">
             <a:spAutoFit/>
           </a:bodyPr>
           <a:lstStyle/>
@@ -27588,6 +28058,7 @@
           <a:lstStyle/>
           <a:p>
             <a:pPr algn="ctr"/>
+            <a:endParaRPr/>
           </a:p>
         </p:txBody>
       </p:sp>
@@ -27631,6 +28102,7 @@
           <a:lstStyle/>
           <a:p>
             <a:pPr algn="ctr"/>
+            <a:endParaRPr/>
           </a:p>
         </p:txBody>
       </p:sp>
@@ -27678,8 +28150,8 @@
         </p:nvSpPr>
         <p:spPr>
           <a:xfrm>
-            <a:off x="1371600" y="6153912"/>
-            <a:ext cx="9436607" cy="-228600"/>
+            <a:off x="1371600" y="5888441"/>
+            <a:ext cx="9436607" cy="0"/>
           </a:xfrm>
           <a:prstGeom prst="rect">
             <a:avLst/>
@@ -27701,6 +28173,7 @@
               </a:defRPr>
             </a:pPr>
             <a:r>
+              <a:rPr dirty="0"/>
               <a:t>If you recover before removing the cause, the same incident may happen again.</a:t>
             </a:r>
           </a:p>
@@ -27751,7 +28224,7 @@
 </file>
 
 <file path=ppt/slides/slide34.xml><?xml version="1.0" encoding="utf-8"?>
-<p:sld xmlns:a="http://schemas.openxmlformats.org/drawingml/2006/main" xmlns:p="http://schemas.openxmlformats.org/presentationml/2006/main" xmlns:r="http://schemas.openxmlformats.org/officeDocument/2006/relationships">
+<p:sld xmlns:a="http://schemas.openxmlformats.org/drawingml/2006/main" xmlns:r="http://schemas.openxmlformats.org/officeDocument/2006/relationships" xmlns:p="http://schemas.openxmlformats.org/presentationml/2006/main">
   <p:cSld>
     <p:spTree>
       <p:nvGrpSpPr>
@@ -27759,7 +28232,14 @@
         <p:cNvGrpSpPr/>
         <p:nvPr/>
       </p:nvGrpSpPr>
-      <p:grpSpPr/>
+      <p:grpSpPr>
+        <a:xfrm>
+          <a:off x="0" y="0"/>
+          <a:ext cx="0" cy="0"/>
+          <a:chOff x="0" y="0"/>
+          <a:chExt cx="0" cy="0"/>
+        </a:xfrm>
+      </p:grpSpPr>
       <p:sp>
         <p:nvSpPr>
           <p:cNvPr id="2" name="Rectangle 1"/>
@@ -27800,6 +28280,7 @@
           <a:lstStyle/>
           <a:p>
             <a:pPr algn="ctr"/>
+            <a:endParaRPr/>
           </a:p>
         </p:txBody>
       </p:sp>
@@ -27843,6 +28324,7 @@
           <a:lstStyle/>
           <a:p>
             <a:pPr algn="ctr"/>
+            <a:endParaRPr/>
           </a:p>
         </p:txBody>
       </p:sp>
@@ -28032,6 +28514,7 @@
           <a:lstStyle/>
           <a:p>
             <a:pPr algn="ctr"/>
+            <a:endParaRPr/>
           </a:p>
         </p:txBody>
       </p:sp>
@@ -28075,6 +28558,7 @@
           <a:lstStyle/>
           <a:p>
             <a:pPr algn="ctr"/>
+            <a:endParaRPr/>
           </a:p>
         </p:txBody>
       </p:sp>
@@ -28123,15 +28607,15 @@
         <p:spPr>
           <a:xfrm>
             <a:off x="914400" y="2450592"/>
-            <a:ext cx="2944368" cy="2743200"/>
-          </a:xfrm>
-          <a:prstGeom prst="rect">
-            <a:avLst/>
-          </a:prstGeom>
-          <a:noFill/>
-        </p:spPr>
-        <p:txBody>
-          <a:bodyPr wrap="none">
+            <a:ext cx="2880360" cy="615553"/>
+          </a:xfrm>
+          <a:prstGeom prst="rect">
+            <a:avLst/>
+          </a:prstGeom>
+          <a:noFill/>
+        </p:spPr>
+        <p:txBody>
+          <a:bodyPr wrap="square">
             <a:spAutoFit/>
           </a:bodyPr>
           <a:lstStyle/>
@@ -28145,6 +28629,7 @@
               </a:defRPr>
             </a:pPr>
             <a:r>
+              <a:rPr dirty="0"/>
               <a:t>How much damage occurs if the risk happens?</a:t>
             </a:r>
           </a:p>
@@ -28192,6 +28677,7 @@
           <a:lstStyle/>
           <a:p>
             <a:pPr algn="ctr"/>
+            <a:endParaRPr/>
           </a:p>
         </p:txBody>
       </p:sp>
@@ -28235,6 +28721,7 @@
           <a:lstStyle/>
           <a:p>
             <a:pPr algn="ctr"/>
+            <a:endParaRPr/>
           </a:p>
         </p:txBody>
       </p:sp>
@@ -28283,15 +28770,15 @@
         <p:spPr>
           <a:xfrm>
             <a:off x="4617720" y="2450592"/>
-            <a:ext cx="2944368" cy="2743200"/>
-          </a:xfrm>
-          <a:prstGeom prst="rect">
-            <a:avLst/>
-          </a:prstGeom>
-          <a:noFill/>
-        </p:spPr>
-        <p:txBody>
-          <a:bodyPr wrap="none">
+            <a:ext cx="2844964" cy="615553"/>
+          </a:xfrm>
+          <a:prstGeom prst="rect">
+            <a:avLst/>
+          </a:prstGeom>
+          <a:noFill/>
+        </p:spPr>
+        <p:txBody>
+          <a:bodyPr wrap="square">
             <a:spAutoFit/>
           </a:bodyPr>
           <a:lstStyle/>
@@ -28305,6 +28792,7 @@
               </a:defRPr>
             </a:pPr>
             <a:r>
+              <a:rPr dirty="0"/>
               <a:t>How probable is it that the risk will happen?</a:t>
             </a:r>
           </a:p>
@@ -28352,6 +28840,7 @@
           <a:lstStyle/>
           <a:p>
             <a:pPr algn="ctr"/>
+            <a:endParaRPr/>
           </a:p>
         </p:txBody>
       </p:sp>
@@ -28395,6 +28884,7 @@
           <a:lstStyle/>
           <a:p>
             <a:pPr algn="ctr"/>
+            <a:endParaRPr/>
           </a:p>
         </p:txBody>
       </p:sp>
@@ -28443,15 +28933,15 @@
         <p:spPr>
           <a:xfrm>
             <a:off x="8321040" y="2450592"/>
-            <a:ext cx="2944368" cy="2743200"/>
-          </a:xfrm>
-          <a:prstGeom prst="rect">
-            <a:avLst/>
-          </a:prstGeom>
-          <a:noFill/>
-        </p:spPr>
-        <p:txBody>
-          <a:bodyPr wrap="none">
+            <a:ext cx="2944368" cy="1138773"/>
+          </a:xfrm>
+          <a:prstGeom prst="rect">
+            <a:avLst/>
+          </a:prstGeom>
+          <a:noFill/>
+        </p:spPr>
+        <p:txBody>
+          <a:bodyPr wrap="square">
             <a:spAutoFit/>
           </a:bodyPr>
           <a:lstStyle/>
@@ -28465,11 +28955,17 @@
               </a:defRPr>
             </a:pPr>
             <a:r>
+              <a:rPr dirty="0"/>
               <a:t>Impact × likelihood</a:t>
             </a:r>
-            <a:br/>
-            <a:br/>
-            <a:r>
+            <a:br>
+              <a:rPr dirty="0"/>
+            </a:br>
+            <a:br>
+              <a:rPr dirty="0"/>
+            </a:br>
+            <a:r>
+              <a:rPr dirty="0"/>
               <a:t>High impact + high likelihood → address first.</a:t>
             </a:r>
           </a:p>
@@ -28520,7 +29016,7 @@
 </file>
 
 <file path=ppt/slides/slide35.xml><?xml version="1.0" encoding="utf-8"?>
-<p:sld xmlns:a="http://schemas.openxmlformats.org/drawingml/2006/main" xmlns:p="http://schemas.openxmlformats.org/presentationml/2006/main" xmlns:r="http://schemas.openxmlformats.org/officeDocument/2006/relationships">
+<p:sld xmlns:a="http://schemas.openxmlformats.org/drawingml/2006/main" xmlns:r="http://schemas.openxmlformats.org/officeDocument/2006/relationships" xmlns:p="http://schemas.openxmlformats.org/presentationml/2006/main">
   <p:cSld>
     <p:spTree>
       <p:nvGrpSpPr>
@@ -28528,7 +29024,14 @@
         <p:cNvGrpSpPr/>
         <p:nvPr/>
       </p:nvGrpSpPr>
-      <p:grpSpPr/>
+      <p:grpSpPr>
+        <a:xfrm>
+          <a:off x="0" y="0"/>
+          <a:ext cx="0" cy="0"/>
+          <a:chOff x="0" y="0"/>
+          <a:chExt cx="0" cy="0"/>
+        </a:xfrm>
+      </p:grpSpPr>
       <p:sp>
         <p:nvSpPr>
           <p:cNvPr id="2" name="Rectangle 1"/>
@@ -28569,6 +29072,7 @@
           <a:lstStyle/>
           <a:p>
             <a:pPr algn="ctr"/>
+            <a:endParaRPr/>
           </a:p>
         </p:txBody>
       </p:sp>
@@ -28612,6 +29116,7 @@
           <a:lstStyle/>
           <a:p>
             <a:pPr algn="ctr"/>
+            <a:endParaRPr/>
           </a:p>
         </p:txBody>
       </p:sp>
@@ -28761,24 +29266,24 @@
       </p:sp>
       <p:sp>
         <p:nvSpPr>
-          <p:cNvPr id="8" name="Rectangle 7"/>
+          <p:cNvPr id="28" name="Rounded Rectangle 27"/>
           <p:cNvSpPr/>
           <p:nvPr/>
         </p:nvSpPr>
         <p:spPr>
           <a:xfrm>
-            <a:off x="1645920" y="1828800"/>
-            <a:ext cx="1645920" cy="1005840"/>
-          </a:xfrm>
-          <a:prstGeom prst="rect">
-            <a:avLst/>
-          </a:prstGeom>
-          <a:solidFill>
-            <a:srgbClr val="E2F1E5"/>
+            <a:off x="7040880" y="1828800"/>
+            <a:ext cx="4297680" cy="3017520"/>
+          </a:xfrm>
+          <a:prstGeom prst="roundRect">
+            <a:avLst/>
+          </a:prstGeom>
+          <a:solidFill>
+            <a:srgbClr val="F4F7FA"/>
           </a:solidFill>
           <a:ln>
             <a:solidFill>
-              <a:srgbClr val="FFFFFF"/>
+              <a:srgbClr val="E0E8F0"/>
             </a:solidFill>
           </a:ln>
         </p:spPr>
@@ -28801,65 +29306,29 @@
           <a:lstStyle/>
           <a:p>
             <a:pPr algn="ctr"/>
-          </a:p>
-        </p:txBody>
-      </p:sp>
-      <p:sp>
-        <p:nvSpPr>
-          <p:cNvPr id="9" name="TextBox 8"/>
-          <p:cNvSpPr txBox="1"/>
-          <p:nvPr/>
-        </p:nvSpPr>
-        <p:spPr>
-          <a:xfrm>
-            <a:off x="1645920" y="2121408"/>
-            <a:ext cx="1645920" cy="274320"/>
-          </a:xfrm>
-          <a:prstGeom prst="rect">
-            <a:avLst/>
-          </a:prstGeom>
-          <a:noFill/>
-        </p:spPr>
-        <p:txBody>
-          <a:bodyPr wrap="none">
-            <a:spAutoFit/>
-          </a:bodyPr>
-          <a:lstStyle/>
-          <a:p>
-            <a:pPr algn="ctr">
-              <a:defRPr sz="1200" b="1">
-                <a:solidFill>
-                  <a:srgbClr val="232D37"/>
-                </a:solidFill>
-              </a:defRPr>
-            </a:pPr>
-            <a:r>
-              <a:t>Low</a:t>
-            </a:r>
-          </a:p>
-        </p:txBody>
-      </p:sp>
-      <p:sp>
-        <p:nvSpPr>
-          <p:cNvPr id="10" name="Rectangle 9"/>
+            <a:endParaRPr/>
+          </a:p>
+        </p:txBody>
+      </p:sp>
+      <p:sp>
+        <p:nvSpPr>
+          <p:cNvPr id="29" name="Rectangle 28"/>
           <p:cNvSpPr/>
           <p:nvPr/>
         </p:nvSpPr>
         <p:spPr>
           <a:xfrm>
-            <a:off x="3291840" y="1828800"/>
-            <a:ext cx="1645920" cy="1005840"/>
-          </a:xfrm>
-          <a:prstGeom prst="rect">
-            <a:avLst/>
-          </a:prstGeom>
-          <a:solidFill>
-            <a:srgbClr val="F8EDD2"/>
+            <a:off x="7040880" y="1828800"/>
+            <a:ext cx="64008" cy="3017520"/>
+          </a:xfrm>
+          <a:prstGeom prst="rect">
+            <a:avLst/>
+          </a:prstGeom>
+          <a:solidFill>
+            <a:srgbClr val="1C7D7D"/>
           </a:solidFill>
           <a:ln>
-            <a:solidFill>
-              <a:srgbClr val="FFFFFF"/>
-            </a:solidFill>
+            <a:noFill/>
           </a:ln>
         </p:spPr>
         <p:style>
@@ -28881,763 +29350,7 @@
           <a:lstStyle/>
           <a:p>
             <a:pPr algn="ctr"/>
-          </a:p>
-        </p:txBody>
-      </p:sp>
-      <p:sp>
-        <p:nvSpPr>
-          <p:cNvPr id="11" name="TextBox 10"/>
-          <p:cNvSpPr txBox="1"/>
-          <p:nvPr/>
-        </p:nvSpPr>
-        <p:spPr>
-          <a:xfrm>
-            <a:off x="3291840" y="2121408"/>
-            <a:ext cx="1645920" cy="274320"/>
-          </a:xfrm>
-          <a:prstGeom prst="rect">
-            <a:avLst/>
-          </a:prstGeom>
-          <a:noFill/>
-        </p:spPr>
-        <p:txBody>
-          <a:bodyPr wrap="none">
-            <a:spAutoFit/>
-          </a:bodyPr>
-          <a:lstStyle/>
-          <a:p>
-            <a:pPr algn="ctr">
-              <a:defRPr sz="1200" b="1">
-                <a:solidFill>
-                  <a:srgbClr val="232D37"/>
-                </a:solidFill>
-              </a:defRPr>
-            </a:pPr>
-            <a:r>
-              <a:t>Medium</a:t>
-            </a:r>
-          </a:p>
-        </p:txBody>
-      </p:sp>
-      <p:sp>
-        <p:nvSpPr>
-          <p:cNvPr id="12" name="Rectangle 11"/>
-          <p:cNvSpPr/>
-          <p:nvPr/>
-        </p:nvSpPr>
-        <p:spPr>
-          <a:xfrm>
-            <a:off x="4937760" y="1828800"/>
-            <a:ext cx="1645920" cy="1005840"/>
-          </a:xfrm>
-          <a:prstGeom prst="rect">
-            <a:avLst/>
-          </a:prstGeom>
-          <a:solidFill>
-            <a:srgbClr val="F5D8D8"/>
-          </a:solidFill>
-          <a:ln>
-            <a:solidFill>
-              <a:srgbClr val="FFFFFF"/>
-            </a:solidFill>
-          </a:ln>
-        </p:spPr>
-        <p:style>
-          <a:lnRef idx="1">
-            <a:schemeClr val="accent1"/>
-          </a:lnRef>
-          <a:fillRef idx="3">
-            <a:schemeClr val="accent1"/>
-          </a:fillRef>
-          <a:effectRef idx="2">
-            <a:schemeClr val="accent1"/>
-          </a:effectRef>
-          <a:fontRef idx="minor">
-            <a:schemeClr val="lt1"/>
-          </a:fontRef>
-        </p:style>
-        <p:txBody>
-          <a:bodyPr rtlCol="0" anchor="ctr"/>
-          <a:lstStyle/>
-          <a:p>
-            <a:pPr algn="ctr"/>
-          </a:p>
-        </p:txBody>
-      </p:sp>
-      <p:sp>
-        <p:nvSpPr>
-          <p:cNvPr id="13" name="TextBox 12"/>
-          <p:cNvSpPr txBox="1"/>
-          <p:nvPr/>
-        </p:nvSpPr>
-        <p:spPr>
-          <a:xfrm>
-            <a:off x="4937760" y="2121408"/>
-            <a:ext cx="1645920" cy="274320"/>
-          </a:xfrm>
-          <a:prstGeom prst="rect">
-            <a:avLst/>
-          </a:prstGeom>
-          <a:noFill/>
-        </p:spPr>
-        <p:txBody>
-          <a:bodyPr wrap="none">
-            <a:spAutoFit/>
-          </a:bodyPr>
-          <a:lstStyle/>
-          <a:p>
-            <a:pPr algn="ctr">
-              <a:defRPr sz="1200" b="1">
-                <a:solidFill>
-                  <a:srgbClr val="232D37"/>
-                </a:solidFill>
-              </a:defRPr>
-            </a:pPr>
-            <a:r>
-              <a:t>High</a:t>
-            </a:r>
-          </a:p>
-        </p:txBody>
-      </p:sp>
-      <p:sp>
-        <p:nvSpPr>
-          <p:cNvPr id="14" name="Rectangle 13"/>
-          <p:cNvSpPr/>
-          <p:nvPr/>
-        </p:nvSpPr>
-        <p:spPr>
-          <a:xfrm>
-            <a:off x="1645920" y="2834640"/>
-            <a:ext cx="1645920" cy="1005840"/>
-          </a:xfrm>
-          <a:prstGeom prst="rect">
-            <a:avLst/>
-          </a:prstGeom>
-          <a:solidFill>
-            <a:srgbClr val="F8EDD2"/>
-          </a:solidFill>
-          <a:ln>
-            <a:solidFill>
-              <a:srgbClr val="FFFFFF"/>
-            </a:solidFill>
-          </a:ln>
-        </p:spPr>
-        <p:style>
-          <a:lnRef idx="1">
-            <a:schemeClr val="accent1"/>
-          </a:lnRef>
-          <a:fillRef idx="3">
-            <a:schemeClr val="accent1"/>
-          </a:fillRef>
-          <a:effectRef idx="2">
-            <a:schemeClr val="accent1"/>
-          </a:effectRef>
-          <a:fontRef idx="minor">
-            <a:schemeClr val="lt1"/>
-          </a:fontRef>
-        </p:style>
-        <p:txBody>
-          <a:bodyPr rtlCol="0" anchor="ctr"/>
-          <a:lstStyle/>
-          <a:p>
-            <a:pPr algn="ctr"/>
-          </a:p>
-        </p:txBody>
-      </p:sp>
-      <p:sp>
-        <p:nvSpPr>
-          <p:cNvPr id="15" name="TextBox 14"/>
-          <p:cNvSpPr txBox="1"/>
-          <p:nvPr/>
-        </p:nvSpPr>
-        <p:spPr>
-          <a:xfrm>
-            <a:off x="1645920" y="3127248"/>
-            <a:ext cx="1645920" cy="274320"/>
-          </a:xfrm>
-          <a:prstGeom prst="rect">
-            <a:avLst/>
-          </a:prstGeom>
-          <a:noFill/>
-        </p:spPr>
-        <p:txBody>
-          <a:bodyPr wrap="none">
-            <a:spAutoFit/>
-          </a:bodyPr>
-          <a:lstStyle/>
-          <a:p>
-            <a:pPr algn="ctr">
-              <a:defRPr sz="1200" b="1">
-                <a:solidFill>
-                  <a:srgbClr val="232D37"/>
-                </a:solidFill>
-              </a:defRPr>
-            </a:pPr>
-            <a:r>
-              <a:t>Medium</a:t>
-            </a:r>
-          </a:p>
-        </p:txBody>
-      </p:sp>
-      <p:sp>
-        <p:nvSpPr>
-          <p:cNvPr id="16" name="Rectangle 15"/>
-          <p:cNvSpPr/>
-          <p:nvPr/>
-        </p:nvSpPr>
-        <p:spPr>
-          <a:xfrm>
-            <a:off x="3291840" y="2834640"/>
-            <a:ext cx="1645920" cy="1005840"/>
-          </a:xfrm>
-          <a:prstGeom prst="rect">
-            <a:avLst/>
-          </a:prstGeom>
-          <a:solidFill>
-            <a:srgbClr val="F5D8D8"/>
-          </a:solidFill>
-          <a:ln>
-            <a:solidFill>
-              <a:srgbClr val="FFFFFF"/>
-            </a:solidFill>
-          </a:ln>
-        </p:spPr>
-        <p:style>
-          <a:lnRef idx="1">
-            <a:schemeClr val="accent1"/>
-          </a:lnRef>
-          <a:fillRef idx="3">
-            <a:schemeClr val="accent1"/>
-          </a:fillRef>
-          <a:effectRef idx="2">
-            <a:schemeClr val="accent1"/>
-          </a:effectRef>
-          <a:fontRef idx="minor">
-            <a:schemeClr val="lt1"/>
-          </a:fontRef>
-        </p:style>
-        <p:txBody>
-          <a:bodyPr rtlCol="0" anchor="ctr"/>
-          <a:lstStyle/>
-          <a:p>
-            <a:pPr algn="ctr"/>
-          </a:p>
-        </p:txBody>
-      </p:sp>
-      <p:sp>
-        <p:nvSpPr>
-          <p:cNvPr id="17" name="TextBox 16"/>
-          <p:cNvSpPr txBox="1"/>
-          <p:nvPr/>
-        </p:nvSpPr>
-        <p:spPr>
-          <a:xfrm>
-            <a:off x="3291840" y="3127248"/>
-            <a:ext cx="1645920" cy="274320"/>
-          </a:xfrm>
-          <a:prstGeom prst="rect">
-            <a:avLst/>
-          </a:prstGeom>
-          <a:noFill/>
-        </p:spPr>
-        <p:txBody>
-          <a:bodyPr wrap="none">
-            <a:spAutoFit/>
-          </a:bodyPr>
-          <a:lstStyle/>
-          <a:p>
-            <a:pPr algn="ctr">
-              <a:defRPr sz="1200" b="1">
-                <a:solidFill>
-                  <a:srgbClr val="232D37"/>
-                </a:solidFill>
-              </a:defRPr>
-            </a:pPr>
-            <a:r>
-              <a:t>High</a:t>
-            </a:r>
-          </a:p>
-        </p:txBody>
-      </p:sp>
-      <p:sp>
-        <p:nvSpPr>
-          <p:cNvPr id="18" name="Rectangle 17"/>
-          <p:cNvSpPr/>
-          <p:nvPr/>
-        </p:nvSpPr>
-        <p:spPr>
-          <a:xfrm>
-            <a:off x="4937760" y="2834640"/>
-            <a:ext cx="1645920" cy="1005840"/>
-          </a:xfrm>
-          <a:prstGeom prst="rect">
-            <a:avLst/>
-          </a:prstGeom>
-          <a:solidFill>
-            <a:srgbClr val="F5D8D8"/>
-          </a:solidFill>
-          <a:ln>
-            <a:solidFill>
-              <a:srgbClr val="FFFFFF"/>
-            </a:solidFill>
-          </a:ln>
-        </p:spPr>
-        <p:style>
-          <a:lnRef idx="1">
-            <a:schemeClr val="accent1"/>
-          </a:lnRef>
-          <a:fillRef idx="3">
-            <a:schemeClr val="accent1"/>
-          </a:fillRef>
-          <a:effectRef idx="2">
-            <a:schemeClr val="accent1"/>
-          </a:effectRef>
-          <a:fontRef idx="minor">
-            <a:schemeClr val="lt1"/>
-          </a:fontRef>
-        </p:style>
-        <p:txBody>
-          <a:bodyPr rtlCol="0" anchor="ctr"/>
-          <a:lstStyle/>
-          <a:p>
-            <a:pPr algn="ctr"/>
-          </a:p>
-        </p:txBody>
-      </p:sp>
-      <p:sp>
-        <p:nvSpPr>
-          <p:cNvPr id="19" name="TextBox 18"/>
-          <p:cNvSpPr txBox="1"/>
-          <p:nvPr/>
-        </p:nvSpPr>
-        <p:spPr>
-          <a:xfrm>
-            <a:off x="4937760" y="3127248"/>
-            <a:ext cx="1645920" cy="274320"/>
-          </a:xfrm>
-          <a:prstGeom prst="rect">
-            <a:avLst/>
-          </a:prstGeom>
-          <a:noFill/>
-        </p:spPr>
-        <p:txBody>
-          <a:bodyPr wrap="none">
-            <a:spAutoFit/>
-          </a:bodyPr>
-          <a:lstStyle/>
-          <a:p>
-            <a:pPr algn="ctr">
-              <a:defRPr sz="1200" b="1">
-                <a:solidFill>
-                  <a:srgbClr val="232D37"/>
-                </a:solidFill>
-              </a:defRPr>
-            </a:pPr>
-            <a:r>
-              <a:t>High</a:t>
-            </a:r>
-          </a:p>
-        </p:txBody>
-      </p:sp>
-      <p:sp>
-        <p:nvSpPr>
-          <p:cNvPr id="20" name="Rectangle 19"/>
-          <p:cNvSpPr/>
-          <p:nvPr/>
-        </p:nvSpPr>
-        <p:spPr>
-          <a:xfrm>
-            <a:off x="1645920" y="3840480"/>
-            <a:ext cx="1645920" cy="1005840"/>
-          </a:xfrm>
-          <a:prstGeom prst="rect">
-            <a:avLst/>
-          </a:prstGeom>
-          <a:solidFill>
-            <a:srgbClr val="F5D8D8"/>
-          </a:solidFill>
-          <a:ln>
-            <a:solidFill>
-              <a:srgbClr val="FFFFFF"/>
-            </a:solidFill>
-          </a:ln>
-        </p:spPr>
-        <p:style>
-          <a:lnRef idx="1">
-            <a:schemeClr val="accent1"/>
-          </a:lnRef>
-          <a:fillRef idx="3">
-            <a:schemeClr val="accent1"/>
-          </a:fillRef>
-          <a:effectRef idx="2">
-            <a:schemeClr val="accent1"/>
-          </a:effectRef>
-          <a:fontRef idx="minor">
-            <a:schemeClr val="lt1"/>
-          </a:fontRef>
-        </p:style>
-        <p:txBody>
-          <a:bodyPr rtlCol="0" anchor="ctr"/>
-          <a:lstStyle/>
-          <a:p>
-            <a:pPr algn="ctr"/>
-          </a:p>
-        </p:txBody>
-      </p:sp>
-      <p:sp>
-        <p:nvSpPr>
-          <p:cNvPr id="21" name="TextBox 20"/>
-          <p:cNvSpPr txBox="1"/>
-          <p:nvPr/>
-        </p:nvSpPr>
-        <p:spPr>
-          <a:xfrm>
-            <a:off x="1645920" y="4133088"/>
-            <a:ext cx="1645920" cy="274320"/>
-          </a:xfrm>
-          <a:prstGeom prst="rect">
-            <a:avLst/>
-          </a:prstGeom>
-          <a:noFill/>
-        </p:spPr>
-        <p:txBody>
-          <a:bodyPr wrap="none">
-            <a:spAutoFit/>
-          </a:bodyPr>
-          <a:lstStyle/>
-          <a:p>
-            <a:pPr algn="ctr">
-              <a:defRPr sz="1200" b="1">
-                <a:solidFill>
-                  <a:srgbClr val="232D37"/>
-                </a:solidFill>
-              </a:defRPr>
-            </a:pPr>
-            <a:r>
-              <a:t>High</a:t>
-            </a:r>
-          </a:p>
-        </p:txBody>
-      </p:sp>
-      <p:sp>
-        <p:nvSpPr>
-          <p:cNvPr id="22" name="Rectangle 21"/>
-          <p:cNvSpPr/>
-          <p:nvPr/>
-        </p:nvSpPr>
-        <p:spPr>
-          <a:xfrm>
-            <a:off x="3291840" y="3840480"/>
-            <a:ext cx="1645920" cy="1005840"/>
-          </a:xfrm>
-          <a:prstGeom prst="rect">
-            <a:avLst/>
-          </a:prstGeom>
-          <a:solidFill>
-            <a:srgbClr val="F5D8D8"/>
-          </a:solidFill>
-          <a:ln>
-            <a:solidFill>
-              <a:srgbClr val="FFFFFF"/>
-            </a:solidFill>
-          </a:ln>
-        </p:spPr>
-        <p:style>
-          <a:lnRef idx="1">
-            <a:schemeClr val="accent1"/>
-          </a:lnRef>
-          <a:fillRef idx="3">
-            <a:schemeClr val="accent1"/>
-          </a:fillRef>
-          <a:effectRef idx="2">
-            <a:schemeClr val="accent1"/>
-          </a:effectRef>
-          <a:fontRef idx="minor">
-            <a:schemeClr val="lt1"/>
-          </a:fontRef>
-        </p:style>
-        <p:txBody>
-          <a:bodyPr rtlCol="0" anchor="ctr"/>
-          <a:lstStyle/>
-          <a:p>
-            <a:pPr algn="ctr"/>
-          </a:p>
-        </p:txBody>
-      </p:sp>
-      <p:sp>
-        <p:nvSpPr>
-          <p:cNvPr id="23" name="TextBox 22"/>
-          <p:cNvSpPr txBox="1"/>
-          <p:nvPr/>
-        </p:nvSpPr>
-        <p:spPr>
-          <a:xfrm>
-            <a:off x="3291840" y="4133088"/>
-            <a:ext cx="1645920" cy="274320"/>
-          </a:xfrm>
-          <a:prstGeom prst="rect">
-            <a:avLst/>
-          </a:prstGeom>
-          <a:noFill/>
-        </p:spPr>
-        <p:txBody>
-          <a:bodyPr wrap="none">
-            <a:spAutoFit/>
-          </a:bodyPr>
-          <a:lstStyle/>
-          <a:p>
-            <a:pPr algn="ctr">
-              <a:defRPr sz="1200" b="1">
-                <a:solidFill>
-                  <a:srgbClr val="232D37"/>
-                </a:solidFill>
-              </a:defRPr>
-            </a:pPr>
-            <a:r>
-              <a:t>High</a:t>
-            </a:r>
-          </a:p>
-        </p:txBody>
-      </p:sp>
-      <p:sp>
-        <p:nvSpPr>
-          <p:cNvPr id="24" name="Rectangle 23"/>
-          <p:cNvSpPr/>
-          <p:nvPr/>
-        </p:nvSpPr>
-        <p:spPr>
-          <a:xfrm>
-            <a:off x="4937760" y="3840480"/>
-            <a:ext cx="1645920" cy="1005840"/>
-          </a:xfrm>
-          <a:prstGeom prst="rect">
-            <a:avLst/>
-          </a:prstGeom>
-          <a:solidFill>
-            <a:srgbClr val="F5D8D8"/>
-          </a:solidFill>
-          <a:ln>
-            <a:solidFill>
-              <a:srgbClr val="FFFFFF"/>
-            </a:solidFill>
-          </a:ln>
-        </p:spPr>
-        <p:style>
-          <a:lnRef idx="1">
-            <a:schemeClr val="accent1"/>
-          </a:lnRef>
-          <a:fillRef idx="3">
-            <a:schemeClr val="accent1"/>
-          </a:fillRef>
-          <a:effectRef idx="2">
-            <a:schemeClr val="accent1"/>
-          </a:effectRef>
-          <a:fontRef idx="minor">
-            <a:schemeClr val="lt1"/>
-          </a:fontRef>
-        </p:style>
-        <p:txBody>
-          <a:bodyPr rtlCol="0" anchor="ctr"/>
-          <a:lstStyle/>
-          <a:p>
-            <a:pPr algn="ctr"/>
-          </a:p>
-        </p:txBody>
-      </p:sp>
-      <p:sp>
-        <p:nvSpPr>
-          <p:cNvPr id="25" name="TextBox 24"/>
-          <p:cNvSpPr txBox="1"/>
-          <p:nvPr/>
-        </p:nvSpPr>
-        <p:spPr>
-          <a:xfrm>
-            <a:off x="4937760" y="4133088"/>
-            <a:ext cx="1645920" cy="274320"/>
-          </a:xfrm>
-          <a:prstGeom prst="rect">
-            <a:avLst/>
-          </a:prstGeom>
-          <a:noFill/>
-        </p:spPr>
-        <p:txBody>
-          <a:bodyPr wrap="none">
-            <a:spAutoFit/>
-          </a:bodyPr>
-          <a:lstStyle/>
-          <a:p>
-            <a:pPr algn="ctr">
-              <a:defRPr sz="1200" b="1">
-                <a:solidFill>
-                  <a:srgbClr val="232D37"/>
-                </a:solidFill>
-              </a:defRPr>
-            </a:pPr>
-            <a:r>
-              <a:t>High</a:t>
-            </a:r>
-          </a:p>
-        </p:txBody>
-      </p:sp>
-      <p:sp>
-        <p:nvSpPr>
-          <p:cNvPr id="26" name="TextBox 25"/>
-          <p:cNvSpPr txBox="1"/>
-          <p:nvPr/>
-        </p:nvSpPr>
-        <p:spPr>
-          <a:xfrm>
-            <a:off x="1645920" y="5074920"/>
-            <a:ext cx="4937760" cy="320040"/>
-          </a:xfrm>
-          <a:prstGeom prst="rect">
-            <a:avLst/>
-          </a:prstGeom>
-          <a:noFill/>
-        </p:spPr>
-        <p:txBody>
-          <a:bodyPr wrap="none">
-            <a:spAutoFit/>
-          </a:bodyPr>
-          <a:lstStyle/>
-          <a:p>
-            <a:pPr>
-              <a:defRPr sz="1500" b="1">
-                <a:solidFill>
-                  <a:srgbClr val="182A44"/>
-                </a:solidFill>
-              </a:defRPr>
-            </a:pPr>
-            <a:r>
-              <a:t>Likelihood →</a:t>
-            </a:r>
-          </a:p>
-        </p:txBody>
-      </p:sp>
-      <p:sp>
-        <p:nvSpPr>
-          <p:cNvPr id="27" name="TextBox 26"/>
-          <p:cNvSpPr txBox="1"/>
-          <p:nvPr/>
-        </p:nvSpPr>
-        <p:spPr>
-          <a:xfrm>
-            <a:off x="502920" y="2788920"/>
-            <a:ext cx="914400" cy="640080"/>
-          </a:xfrm>
-          <a:prstGeom prst="rect">
-            <a:avLst/>
-          </a:prstGeom>
-          <a:noFill/>
-        </p:spPr>
-        <p:txBody>
-          <a:bodyPr wrap="none">
-            <a:spAutoFit/>
-          </a:bodyPr>
-          <a:lstStyle/>
-          <a:p>
-            <a:pPr algn="ctr">
-              <a:defRPr sz="1500" b="1">
-                <a:solidFill>
-                  <a:srgbClr val="182A44"/>
-                </a:solidFill>
-              </a:defRPr>
-            </a:pPr>
-            <a:r>
-              <a:t>Impact</a:t>
-            </a:r>
-            <a:br/>
-            <a:r>
-              <a:t>↑</a:t>
-            </a:r>
-          </a:p>
-        </p:txBody>
-      </p:sp>
-      <p:sp>
-        <p:nvSpPr>
-          <p:cNvPr id="28" name="Rounded Rectangle 27"/>
-          <p:cNvSpPr/>
-          <p:nvPr/>
-        </p:nvSpPr>
-        <p:spPr>
-          <a:xfrm>
-            <a:off x="7040880" y="1828800"/>
-            <a:ext cx="4297680" cy="3017520"/>
-          </a:xfrm>
-          <a:prstGeom prst="roundRect">
-            <a:avLst/>
-          </a:prstGeom>
-          <a:solidFill>
-            <a:srgbClr val="F4F7FA"/>
-          </a:solidFill>
-          <a:ln>
-            <a:solidFill>
-              <a:srgbClr val="E0E8F0"/>
-            </a:solidFill>
-          </a:ln>
-        </p:spPr>
-        <p:style>
-          <a:lnRef idx="1">
-            <a:schemeClr val="accent1"/>
-          </a:lnRef>
-          <a:fillRef idx="3">
-            <a:schemeClr val="accent1"/>
-          </a:fillRef>
-          <a:effectRef idx="2">
-            <a:schemeClr val="accent1"/>
-          </a:effectRef>
-          <a:fontRef idx="minor">
-            <a:schemeClr val="lt1"/>
-          </a:fontRef>
-        </p:style>
-        <p:txBody>
-          <a:bodyPr rtlCol="0" anchor="ctr"/>
-          <a:lstStyle/>
-          <a:p>
-            <a:pPr algn="ctr"/>
-          </a:p>
-        </p:txBody>
-      </p:sp>
-      <p:sp>
-        <p:nvSpPr>
-          <p:cNvPr id="29" name="Rectangle 28"/>
-          <p:cNvSpPr/>
-          <p:nvPr/>
-        </p:nvSpPr>
-        <p:spPr>
-          <a:xfrm>
-            <a:off x="7040880" y="1828800"/>
-            <a:ext cx="64008" cy="3017520"/>
-          </a:xfrm>
-          <a:prstGeom prst="rect">
-            <a:avLst/>
-          </a:prstGeom>
-          <a:solidFill>
-            <a:srgbClr val="1C7D7D"/>
-          </a:solidFill>
-          <a:ln>
-            <a:noFill/>
-          </a:ln>
-        </p:spPr>
-        <p:style>
-          <a:lnRef idx="1">
-            <a:schemeClr val="accent1"/>
-          </a:lnRef>
-          <a:fillRef idx="3">
-            <a:schemeClr val="accent1"/>
-          </a:fillRef>
-          <a:effectRef idx="2">
-            <a:schemeClr val="accent1"/>
-          </a:effectRef>
-          <a:fontRef idx="minor">
-            <a:schemeClr val="lt1"/>
-          </a:fontRef>
-        </p:style>
-        <p:txBody>
-          <a:bodyPr rtlCol="0" anchor="ctr"/>
-          <a:lstStyle/>
-          <a:p>
-            <a:pPr algn="ctr"/>
+            <a:endParaRPr/>
           </a:p>
         </p:txBody>
       </p:sp>
@@ -29754,6 +29467,36 @@
           </a:p>
         </p:txBody>
       </p:sp>
+      <p:pic>
+        <p:nvPicPr>
+          <p:cNvPr id="36" name="Picture 35">
+            <a:extLst>
+              <a:ext uri="{FF2B5EF4-FFF2-40B4-BE49-F238E27FC236}">
+                <a16:creationId xmlns:a16="http://schemas.microsoft.com/office/drawing/2014/main" id="{9AAB6C4A-578D-A54F-25BF-5BB94E67054F}"/>
+              </a:ext>
+            </a:extLst>
+          </p:cNvPr>
+          <p:cNvPicPr>
+            <a:picLocks noChangeAspect="1"/>
+          </p:cNvPicPr>
+          <p:nvPr/>
+        </p:nvPicPr>
+        <p:blipFill>
+          <a:blip r:embed="rId2"/>
+          <a:stretch>
+            <a:fillRect/>
+          </a:stretch>
+        </p:blipFill>
+        <p:spPr>
+          <a:xfrm>
+            <a:off x="621791" y="1591627"/>
+            <a:ext cx="6132969" cy="4169094"/>
+          </a:xfrm>
+          <a:prstGeom prst="rect">
+            <a:avLst/>
+          </a:prstGeom>
+        </p:spPr>
+      </p:pic>
     </p:spTree>
   </p:cSld>
   <p:clrMapOvr>
@@ -29763,7 +29506,7 @@
 </file>
 
 <file path=ppt/slides/slide36.xml><?xml version="1.0" encoding="utf-8"?>
-<p:sld xmlns:a="http://schemas.openxmlformats.org/drawingml/2006/main" xmlns:p="http://schemas.openxmlformats.org/presentationml/2006/main" xmlns:r="http://schemas.openxmlformats.org/officeDocument/2006/relationships">
+<p:sld xmlns:a="http://schemas.openxmlformats.org/drawingml/2006/main" xmlns:r="http://schemas.openxmlformats.org/officeDocument/2006/relationships" xmlns:p="http://schemas.openxmlformats.org/presentationml/2006/main">
   <p:cSld>
     <p:spTree>
       <p:nvGrpSpPr>
@@ -29771,7 +29514,14 @@
         <p:cNvGrpSpPr/>
         <p:nvPr/>
       </p:nvGrpSpPr>
-      <p:grpSpPr/>
+      <p:grpSpPr>
+        <a:xfrm>
+          <a:off x="0" y="0"/>
+          <a:ext cx="0" cy="0"/>
+          <a:chOff x="0" y="0"/>
+          <a:chExt cx="0" cy="0"/>
+        </a:xfrm>
+      </p:grpSpPr>
       <p:sp>
         <p:nvSpPr>
           <p:cNvPr id="2" name="Rectangle 1"/>
@@ -29812,6 +29562,7 @@
           <a:lstStyle/>
           <a:p>
             <a:pPr algn="ctr"/>
+            <a:endParaRPr/>
           </a:p>
         </p:txBody>
       </p:sp>
@@ -29855,6 +29606,7 @@
           <a:lstStyle/>
           <a:p>
             <a:pPr algn="ctr"/>
+            <a:endParaRPr/>
           </a:p>
         </p:txBody>
       </p:sp>
@@ -30044,6 +29796,7 @@
           <a:lstStyle/>
           <a:p>
             <a:pPr algn="ctr"/>
+            <a:endParaRPr/>
           </a:p>
         </p:txBody>
       </p:sp>
@@ -30087,6 +29840,7 @@
           <a:lstStyle/>
           <a:p>
             <a:pPr algn="ctr"/>
+            <a:endParaRPr/>
           </a:p>
         </p:txBody>
       </p:sp>
@@ -30204,6 +29958,7 @@
           <a:lstStyle/>
           <a:p>
             <a:pPr algn="ctr"/>
+            <a:endParaRPr/>
           </a:p>
         </p:txBody>
       </p:sp>
@@ -30247,6 +30002,7 @@
           <a:lstStyle/>
           <a:p>
             <a:pPr algn="ctr"/>
+            <a:endParaRPr/>
           </a:p>
         </p:txBody>
       </p:sp>
@@ -30364,6 +30120,7 @@
           <a:lstStyle/>
           <a:p>
             <a:pPr algn="ctr"/>
+            <a:endParaRPr/>
           </a:p>
         </p:txBody>
       </p:sp>
@@ -30407,6 +30164,7 @@
           <a:lstStyle/>
           <a:p>
             <a:pPr algn="ctr"/>
+            <a:endParaRPr/>
           </a:p>
         </p:txBody>
       </p:sp>
@@ -30524,6 +30282,7 @@
           <a:lstStyle/>
           <a:p>
             <a:pPr algn="ctr"/>
+            <a:endParaRPr/>
           </a:p>
         </p:txBody>
       </p:sp>
@@ -30567,6 +30326,7 @@
           <a:lstStyle/>
           <a:p>
             <a:pPr algn="ctr"/>
+            <a:endParaRPr/>
           </a:p>
         </p:txBody>
       </p:sp>
@@ -30687,7 +30447,7 @@
 </file>
 
 <file path=ppt/slides/slide37.xml><?xml version="1.0" encoding="utf-8"?>
-<p:sld xmlns:a="http://schemas.openxmlformats.org/drawingml/2006/main" xmlns:p="http://schemas.openxmlformats.org/presentationml/2006/main" xmlns:r="http://schemas.openxmlformats.org/officeDocument/2006/relationships">
+<p:sld xmlns:a="http://schemas.openxmlformats.org/drawingml/2006/main" xmlns:r="http://schemas.openxmlformats.org/officeDocument/2006/relationships" xmlns:p="http://schemas.openxmlformats.org/presentationml/2006/main">
   <p:cSld>
     <p:spTree>
       <p:nvGrpSpPr>
@@ -30695,7 +30455,14 @@
         <p:cNvGrpSpPr/>
         <p:nvPr/>
       </p:nvGrpSpPr>
-      <p:grpSpPr/>
+      <p:grpSpPr>
+        <a:xfrm>
+          <a:off x="0" y="0"/>
+          <a:ext cx="0" cy="0"/>
+          <a:chOff x="0" y="0"/>
+          <a:chExt cx="0" cy="0"/>
+        </a:xfrm>
+      </p:grpSpPr>
       <p:sp>
         <p:nvSpPr>
           <p:cNvPr id="2" name="Rectangle 1"/>
@@ -30736,6 +30503,7 @@
           <a:lstStyle/>
           <a:p>
             <a:pPr algn="ctr"/>
+            <a:endParaRPr/>
           </a:p>
         </p:txBody>
       </p:sp>
@@ -30779,6 +30547,7 @@
           <a:lstStyle/>
           <a:p>
             <a:pPr algn="ctr"/>
+            <a:endParaRPr/>
           </a:p>
         </p:txBody>
       </p:sp>
@@ -30968,6 +30737,7 @@
           <a:lstStyle/>
           <a:p>
             <a:pPr algn="ctr"/>
+            <a:endParaRPr/>
           </a:p>
         </p:txBody>
       </p:sp>
@@ -31011,6 +30781,7 @@
           <a:lstStyle/>
           <a:p>
             <a:pPr algn="ctr"/>
+            <a:endParaRPr/>
           </a:p>
         </p:txBody>
       </p:sp>
@@ -31128,6 +30899,7 @@
           <a:lstStyle/>
           <a:p>
             <a:pPr algn="ctr"/>
+            <a:endParaRPr/>
           </a:p>
         </p:txBody>
       </p:sp>
@@ -31171,6 +30943,7 @@
           <a:lstStyle/>
           <a:p>
             <a:pPr algn="ctr"/>
+            <a:endParaRPr/>
           </a:p>
         </p:txBody>
       </p:sp>
@@ -31288,6 +31061,7 @@
           <a:lstStyle/>
           <a:p>
             <a:pPr algn="ctr"/>
+            <a:endParaRPr/>
           </a:p>
         </p:txBody>
       </p:sp>
@@ -31331,6 +31105,7 @@
           <a:lstStyle/>
           <a:p>
             <a:pPr algn="ctr"/>
+            <a:endParaRPr/>
           </a:p>
         </p:txBody>
       </p:sp>
@@ -31448,6 +31223,7 @@
           <a:lstStyle/>
           <a:p>
             <a:pPr algn="ctr"/>
+            <a:endParaRPr/>
           </a:p>
         </p:txBody>
       </p:sp>
@@ -31491,6 +31267,7 @@
           <a:lstStyle/>
           <a:p>
             <a:pPr algn="ctr"/>
+            <a:endParaRPr/>
           </a:p>
         </p:txBody>
       </p:sp>
@@ -31608,6 +31385,7 @@
           <a:lstStyle/>
           <a:p>
             <a:pPr algn="ctr"/>
+            <a:endParaRPr/>
           </a:p>
         </p:txBody>
       </p:sp>
@@ -31651,6 +31429,7 @@
           <a:lstStyle/>
           <a:p>
             <a:pPr algn="ctr"/>
+            <a:endParaRPr/>
           </a:p>
         </p:txBody>
       </p:sp>
@@ -31698,8 +31477,8 @@
         </p:nvSpPr>
         <p:spPr>
           <a:xfrm>
-            <a:off x="1097280" y="5879592"/>
-            <a:ext cx="9802367" cy="-45720"/>
+            <a:off x="1097280" y="5692779"/>
+            <a:ext cx="9802367" cy="0"/>
           </a:xfrm>
           <a:prstGeom prst="rect">
             <a:avLst/>
@@ -31721,6 +31500,7 @@
               </a:defRPr>
             </a:pPr>
             <a:r>
+              <a:rPr lang="pt-BR" dirty="0"/>
               <a:t>a → A • b → B • c → C • d → D</a:t>
             </a:r>
           </a:p>
@@ -31771,7 +31551,7 @@
 </file>
 
 <file path=ppt/slides/slide38.xml><?xml version="1.0" encoding="utf-8"?>
-<p:sld xmlns:a="http://schemas.openxmlformats.org/drawingml/2006/main" xmlns:p="http://schemas.openxmlformats.org/presentationml/2006/main" xmlns:r="http://schemas.openxmlformats.org/officeDocument/2006/relationships">
+<p:sld xmlns:a="http://schemas.openxmlformats.org/drawingml/2006/main" xmlns:r="http://schemas.openxmlformats.org/officeDocument/2006/relationships" xmlns:p="http://schemas.openxmlformats.org/presentationml/2006/main">
   <p:cSld>
     <p:spTree>
       <p:nvGrpSpPr>
@@ -31779,7 +31559,14 @@
         <p:cNvGrpSpPr/>
         <p:nvPr/>
       </p:nvGrpSpPr>
-      <p:grpSpPr/>
+      <p:grpSpPr>
+        <a:xfrm>
+          <a:off x="0" y="0"/>
+          <a:ext cx="0" cy="0"/>
+          <a:chOff x="0" y="0"/>
+          <a:chExt cx="0" cy="0"/>
+        </a:xfrm>
+      </p:grpSpPr>
       <p:sp>
         <p:nvSpPr>
           <p:cNvPr id="2" name="Rectangle 1"/>
@@ -31820,6 +31607,7 @@
           <a:lstStyle/>
           <a:p>
             <a:pPr algn="ctr"/>
+            <a:endParaRPr/>
           </a:p>
         </p:txBody>
       </p:sp>
@@ -31863,6 +31651,7 @@
           <a:lstStyle/>
           <a:p>
             <a:pPr algn="ctr"/>
+            <a:endParaRPr/>
           </a:p>
         </p:txBody>
       </p:sp>
@@ -32123,6 +31912,7 @@
           <a:lstStyle/>
           <a:p>
             <a:pPr algn="ctr"/>
+            <a:endParaRPr/>
           </a:p>
         </p:txBody>
       </p:sp>
@@ -32166,6 +31956,7 @@
           <a:lstStyle/>
           <a:p>
             <a:pPr algn="ctr"/>
+            <a:endParaRPr/>
           </a:p>
         </p:txBody>
       </p:sp>
@@ -32286,7 +32077,7 @@
 </file>
 
 <file path=ppt/slides/slide39.xml><?xml version="1.0" encoding="utf-8"?>
-<p:sld xmlns:a="http://schemas.openxmlformats.org/drawingml/2006/main" xmlns:p="http://schemas.openxmlformats.org/presentationml/2006/main" xmlns:r="http://schemas.openxmlformats.org/officeDocument/2006/relationships">
+<p:sld xmlns:a="http://schemas.openxmlformats.org/drawingml/2006/main" xmlns:r="http://schemas.openxmlformats.org/officeDocument/2006/relationships" xmlns:p="http://schemas.openxmlformats.org/presentationml/2006/main">
   <p:cSld>
     <p:spTree>
       <p:nvGrpSpPr>
@@ -32294,7 +32085,14 @@
         <p:cNvGrpSpPr/>
         <p:nvPr/>
       </p:nvGrpSpPr>
-      <p:grpSpPr/>
+      <p:grpSpPr>
+        <a:xfrm>
+          <a:off x="0" y="0"/>
+          <a:ext cx="0" cy="0"/>
+          <a:chOff x="0" y="0"/>
+          <a:chExt cx="0" cy="0"/>
+        </a:xfrm>
+      </p:grpSpPr>
       <p:sp>
         <p:nvSpPr>
           <p:cNvPr id="2" name="Rectangle 1"/>
@@ -32335,6 +32133,7 @@
           <a:lstStyle/>
           <a:p>
             <a:pPr algn="ctr"/>
+            <a:endParaRPr/>
           </a:p>
         </p:txBody>
       </p:sp>
@@ -32378,6 +32177,7 @@
           <a:lstStyle/>
           <a:p>
             <a:pPr algn="ctr"/>
+            <a:endParaRPr/>
           </a:p>
         </p:txBody>
       </p:sp>
@@ -32531,6 +32331,7 @@
           <a:lstStyle/>
           <a:p>
             <a:pPr algn="ctr"/>
+            <a:endParaRPr/>
           </a:p>
         </p:txBody>
       </p:sp>
@@ -32574,6 +32375,7 @@
           <a:lstStyle/>
           <a:p>
             <a:pPr algn="ctr"/>
+            <a:endParaRPr/>
           </a:p>
         </p:txBody>
       </p:sp>
@@ -32691,6 +32493,7 @@
           <a:lstStyle/>
           <a:p>
             <a:pPr algn="ctr"/>
+            <a:endParaRPr/>
           </a:p>
         </p:txBody>
       </p:sp>
@@ -32734,6 +32537,7 @@
           <a:lstStyle/>
           <a:p>
             <a:pPr algn="ctr"/>
+            <a:endParaRPr/>
           </a:p>
         </p:txBody>
       </p:sp>
@@ -32851,6 +32655,7 @@
           <a:lstStyle/>
           <a:p>
             <a:pPr algn="ctr"/>
+            <a:endParaRPr/>
           </a:p>
         </p:txBody>
       </p:sp>
@@ -32894,6 +32699,7 @@
           <a:lstStyle/>
           <a:p>
             <a:pPr algn="ctr"/>
+            <a:endParaRPr/>
           </a:p>
         </p:txBody>
       </p:sp>
@@ -33011,6 +32817,7 @@
           <a:lstStyle/>
           <a:p>
             <a:pPr algn="ctr"/>
+            <a:endParaRPr/>
           </a:p>
         </p:txBody>
       </p:sp>
@@ -33054,6 +32861,7 @@
           <a:lstStyle/>
           <a:p>
             <a:pPr algn="ctr"/>
+            <a:endParaRPr/>
           </a:p>
         </p:txBody>
       </p:sp>
@@ -33171,6 +32979,7 @@
           <a:lstStyle/>
           <a:p>
             <a:pPr algn="ctr"/>
+            <a:endParaRPr/>
           </a:p>
         </p:txBody>
       </p:sp>
@@ -33214,6 +33023,7 @@
           <a:lstStyle/>
           <a:p>
             <a:pPr algn="ctr"/>
+            <a:endParaRPr/>
           </a:p>
         </p:txBody>
       </p:sp>
@@ -33262,7 +33072,7 @@
         <p:spPr>
           <a:xfrm>
             <a:off x="1280160" y="5788152"/>
-            <a:ext cx="9528048" cy="-45720"/>
+            <a:ext cx="9528048" cy="0"/>
           </a:xfrm>
           <a:prstGeom prst="rect">
             <a:avLst/>
@@ -33334,7 +33144,7 @@
 </file>
 
 <file path=ppt/slides/slide4.xml><?xml version="1.0" encoding="utf-8"?>
-<p:sld xmlns:a="http://schemas.openxmlformats.org/drawingml/2006/main" xmlns:p="http://schemas.openxmlformats.org/presentationml/2006/main" xmlns:r="http://schemas.openxmlformats.org/officeDocument/2006/relationships">
+<p:sld xmlns:a="http://schemas.openxmlformats.org/drawingml/2006/main" xmlns:r="http://schemas.openxmlformats.org/officeDocument/2006/relationships" xmlns:p="http://schemas.openxmlformats.org/presentationml/2006/main">
   <p:cSld>
     <p:spTree>
       <p:nvGrpSpPr>
@@ -33342,7 +33152,14 @@
         <p:cNvGrpSpPr/>
         <p:nvPr/>
       </p:nvGrpSpPr>
-      <p:grpSpPr/>
+      <p:grpSpPr>
+        <a:xfrm>
+          <a:off x="0" y="0"/>
+          <a:ext cx="0" cy="0"/>
+          <a:chOff x="0" y="0"/>
+          <a:chExt cx="0" cy="0"/>
+        </a:xfrm>
+      </p:grpSpPr>
       <p:sp>
         <p:nvSpPr>
           <p:cNvPr id="2" name="Rectangle 1"/>
@@ -33383,6 +33200,7 @@
           <a:lstStyle/>
           <a:p>
             <a:pPr algn="ctr"/>
+            <a:endParaRPr/>
           </a:p>
         </p:txBody>
       </p:sp>
@@ -33426,6 +33244,7 @@
           <a:lstStyle/>
           <a:p>
             <a:pPr algn="ctr"/>
+            <a:endParaRPr/>
           </a:p>
         </p:txBody>
       </p:sp>
@@ -33581,7 +33400,7 @@
 </file>
 
 <file path=ppt/slides/slide40.xml><?xml version="1.0" encoding="utf-8"?>
-<p:sld xmlns:a="http://schemas.openxmlformats.org/drawingml/2006/main" xmlns:p="http://schemas.openxmlformats.org/presentationml/2006/main" xmlns:r="http://schemas.openxmlformats.org/officeDocument/2006/relationships">
+<p:sld xmlns:a="http://schemas.openxmlformats.org/drawingml/2006/main" xmlns:r="http://schemas.openxmlformats.org/officeDocument/2006/relationships" xmlns:p="http://schemas.openxmlformats.org/presentationml/2006/main">
   <p:cSld>
     <p:spTree>
       <p:nvGrpSpPr>
@@ -33589,7 +33408,14 @@
         <p:cNvGrpSpPr/>
         <p:nvPr/>
       </p:nvGrpSpPr>
-      <p:grpSpPr/>
+      <p:grpSpPr>
+        <a:xfrm>
+          <a:off x="0" y="0"/>
+          <a:ext cx="0" cy="0"/>
+          <a:chOff x="0" y="0"/>
+          <a:chExt cx="0" cy="0"/>
+        </a:xfrm>
+      </p:grpSpPr>
       <p:sp>
         <p:nvSpPr>
           <p:cNvPr id="2" name="Rectangle 1"/>
@@ -33630,6 +33456,7 @@
           <a:lstStyle/>
           <a:p>
             <a:pPr algn="ctr"/>
+            <a:endParaRPr/>
           </a:p>
         </p:txBody>
       </p:sp>
@@ -33673,6 +33500,7 @@
           <a:lstStyle/>
           <a:p>
             <a:pPr algn="ctr"/>
+            <a:endParaRPr/>
           </a:p>
         </p:txBody>
       </p:sp>
@@ -33826,6 +33654,7 @@
           <a:lstStyle/>
           <a:p>
             <a:pPr algn="ctr"/>
+            <a:endParaRPr/>
           </a:p>
         </p:txBody>
       </p:sp>
@@ -33869,6 +33698,7 @@
           <a:lstStyle/>
           <a:p>
             <a:pPr algn="ctr"/>
+            <a:endParaRPr/>
           </a:p>
         </p:txBody>
       </p:sp>
@@ -33986,6 +33816,7 @@
           <a:lstStyle/>
           <a:p>
             <a:pPr algn="ctr"/>
+            <a:endParaRPr/>
           </a:p>
         </p:txBody>
       </p:sp>
@@ -34029,6 +33860,7 @@
           <a:lstStyle/>
           <a:p>
             <a:pPr algn="ctr"/>
+            <a:endParaRPr/>
           </a:p>
         </p:txBody>
       </p:sp>
@@ -34146,6 +33978,7 @@
           <a:lstStyle/>
           <a:p>
             <a:pPr algn="ctr"/>
+            <a:endParaRPr/>
           </a:p>
         </p:txBody>
       </p:sp>
@@ -34189,6 +34022,7 @@
           <a:lstStyle/>
           <a:p>
             <a:pPr algn="ctr"/>
+            <a:endParaRPr/>
           </a:p>
         </p:txBody>
       </p:sp>
@@ -34306,6 +34140,7 @@
           <a:lstStyle/>
           <a:p>
             <a:pPr algn="ctr"/>
+            <a:endParaRPr/>
           </a:p>
         </p:txBody>
       </p:sp>
@@ -34349,6 +34184,7 @@
           <a:lstStyle/>
           <a:p>
             <a:pPr algn="ctr"/>
+            <a:endParaRPr/>
           </a:p>
         </p:txBody>
       </p:sp>
@@ -34466,6 +34302,7 @@
           <a:lstStyle/>
           <a:p>
             <a:pPr algn="ctr"/>
+            <a:endParaRPr/>
           </a:p>
         </p:txBody>
       </p:sp>
@@ -34509,6 +34346,7 @@
           <a:lstStyle/>
           <a:p>
             <a:pPr algn="ctr"/>
+            <a:endParaRPr/>
           </a:p>
         </p:txBody>
       </p:sp>
@@ -34557,7 +34395,7 @@
         <p:spPr>
           <a:xfrm>
             <a:off x="1280160" y="5788152"/>
-            <a:ext cx="9528048" cy="-45720"/>
+            <a:ext cx="9528048" cy="0"/>
           </a:xfrm>
           <a:prstGeom prst="rect">
             <a:avLst/>
@@ -34579,6 +34417,7 @@
               </a:defRPr>
             </a:pPr>
             <a:r>
+              <a:rPr dirty="0"/>
               <a:t>C — risk size depends on impact × likelihood, and high-high risks get priority.</a:t>
             </a:r>
           </a:p>
@@ -34629,7 +34468,7 @@
 </file>
 
 <file path=ppt/slides/slide41.xml><?xml version="1.0" encoding="utf-8"?>
-<p:sld xmlns:a="http://schemas.openxmlformats.org/drawingml/2006/main" xmlns:p="http://schemas.openxmlformats.org/presentationml/2006/main" xmlns:r="http://schemas.openxmlformats.org/officeDocument/2006/relationships">
+<p:sld xmlns:a="http://schemas.openxmlformats.org/drawingml/2006/main" xmlns:r="http://schemas.openxmlformats.org/officeDocument/2006/relationships" xmlns:p="http://schemas.openxmlformats.org/presentationml/2006/main">
   <p:cSld>
     <p:spTree>
       <p:nvGrpSpPr>
@@ -34637,7 +34476,14 @@
         <p:cNvGrpSpPr/>
         <p:nvPr/>
       </p:nvGrpSpPr>
-      <p:grpSpPr/>
+      <p:grpSpPr>
+        <a:xfrm>
+          <a:off x="0" y="0"/>
+          <a:ext cx="0" cy="0"/>
+          <a:chOff x="0" y="0"/>
+          <a:chExt cx="0" cy="0"/>
+        </a:xfrm>
+      </p:grpSpPr>
       <p:sp>
         <p:nvSpPr>
           <p:cNvPr id="2" name="Rectangle 1"/>
@@ -34678,6 +34524,7 @@
           <a:lstStyle/>
           <a:p>
             <a:pPr algn="ctr"/>
+            <a:endParaRPr/>
           </a:p>
         </p:txBody>
       </p:sp>
@@ -34721,6 +34568,7 @@
           <a:lstStyle/>
           <a:p>
             <a:pPr algn="ctr"/>
+            <a:endParaRPr/>
           </a:p>
         </p:txBody>
       </p:sp>
@@ -34874,6 +34722,7 @@
           <a:lstStyle/>
           <a:p>
             <a:pPr algn="ctr"/>
+            <a:endParaRPr/>
           </a:p>
         </p:txBody>
       </p:sp>
@@ -34917,6 +34766,7 @@
           <a:lstStyle/>
           <a:p>
             <a:pPr algn="ctr"/>
+            <a:endParaRPr/>
           </a:p>
         </p:txBody>
       </p:sp>
@@ -35034,6 +34884,7 @@
           <a:lstStyle/>
           <a:p>
             <a:pPr algn="ctr"/>
+            <a:endParaRPr/>
           </a:p>
         </p:txBody>
       </p:sp>
@@ -35077,6 +34928,7 @@
           <a:lstStyle/>
           <a:p>
             <a:pPr algn="ctr"/>
+            <a:endParaRPr/>
           </a:p>
         </p:txBody>
       </p:sp>
@@ -35194,6 +35046,7 @@
           <a:lstStyle/>
           <a:p>
             <a:pPr algn="ctr"/>
+            <a:endParaRPr/>
           </a:p>
         </p:txBody>
       </p:sp>
@@ -35237,6 +35090,7 @@
           <a:lstStyle/>
           <a:p>
             <a:pPr algn="ctr"/>
+            <a:endParaRPr/>
           </a:p>
         </p:txBody>
       </p:sp>
@@ -35285,15 +35139,15 @@
         <p:spPr>
           <a:xfrm>
             <a:off x="4617720" y="4279392"/>
-            <a:ext cx="2944368" cy="914400"/>
-          </a:xfrm>
-          <a:prstGeom prst="rect">
-            <a:avLst/>
-          </a:prstGeom>
-          <a:noFill/>
-        </p:spPr>
-        <p:txBody>
-          <a:bodyPr wrap="none">
+            <a:ext cx="2944368" cy="523220"/>
+          </a:xfrm>
+          <a:prstGeom prst="rect">
+            <a:avLst/>
+          </a:prstGeom>
+          <a:noFill/>
+        </p:spPr>
+        <p:txBody>
+          <a:bodyPr wrap="square">
             <a:spAutoFit/>
           </a:bodyPr>
           <a:lstStyle/>
@@ -35307,6 +35161,7 @@
               </a:defRPr>
             </a:pPr>
             <a:r>
+              <a:rPr dirty="0"/>
               <a:t>Restore the system to a clean, normal state.</a:t>
             </a:r>
           </a:p>
@@ -35354,6 +35209,7 @@
           <a:lstStyle/>
           <a:p>
             <a:pPr algn="ctr"/>
+            <a:endParaRPr/>
           </a:p>
         </p:txBody>
       </p:sp>
@@ -35397,6 +35253,7 @@
           <a:lstStyle/>
           <a:p>
             <a:pPr algn="ctr"/>
+            <a:endParaRPr/>
           </a:p>
         </p:txBody>
       </p:sp>
@@ -35444,16 +35301,16 @@
         </p:nvSpPr>
         <p:spPr>
           <a:xfrm>
-            <a:off x="8275319" y="4279392"/>
-            <a:ext cx="2944368" cy="914400"/>
-          </a:xfrm>
-          <a:prstGeom prst="rect">
-            <a:avLst/>
-          </a:prstGeom>
-          <a:noFill/>
-        </p:spPr>
-        <p:txBody>
-          <a:bodyPr wrap="none">
+            <a:off x="8275319" y="4297680"/>
+            <a:ext cx="2880361" cy="523220"/>
+          </a:xfrm>
+          <a:prstGeom prst="rect">
+            <a:avLst/>
+          </a:prstGeom>
+          <a:noFill/>
+        </p:spPr>
+        <p:txBody>
+          <a:bodyPr wrap="square">
             <a:spAutoFit/>
           </a:bodyPr>
           <a:lstStyle/>
@@ -35467,6 +35324,7 @@
               </a:defRPr>
             </a:pPr>
             <a:r>
+              <a:rPr dirty="0"/>
               <a:t>If the cause remains, the same incident can return.</a:t>
             </a:r>
           </a:p>
@@ -35517,7 +35375,7 @@
 </file>
 
 <file path=ppt/slides/slide42.xml><?xml version="1.0" encoding="utf-8"?>
-<p:sld xmlns:a="http://schemas.openxmlformats.org/drawingml/2006/main" xmlns:p="http://schemas.openxmlformats.org/presentationml/2006/main" xmlns:r="http://schemas.openxmlformats.org/officeDocument/2006/relationships">
+<p:sld xmlns:a="http://schemas.openxmlformats.org/drawingml/2006/main" xmlns:r="http://schemas.openxmlformats.org/officeDocument/2006/relationships" xmlns:p="http://schemas.openxmlformats.org/presentationml/2006/main">
   <p:cSld>
     <p:spTree>
       <p:nvGrpSpPr>
@@ -35525,7 +35383,14 @@
         <p:cNvGrpSpPr/>
         <p:nvPr/>
       </p:nvGrpSpPr>
-      <p:grpSpPr/>
+      <p:grpSpPr>
+        <a:xfrm>
+          <a:off x="0" y="0"/>
+          <a:ext cx="0" cy="0"/>
+          <a:chOff x="0" y="0"/>
+          <a:chExt cx="0" cy="0"/>
+        </a:xfrm>
+      </p:grpSpPr>
       <p:sp>
         <p:nvSpPr>
           <p:cNvPr id="2" name="Rectangle 1"/>
@@ -35566,6 +35431,7 @@
           <a:lstStyle/>
           <a:p>
             <a:pPr algn="ctr"/>
+            <a:endParaRPr/>
           </a:p>
         </p:txBody>
       </p:sp>
@@ -35609,6 +35475,7 @@
           <a:lstStyle/>
           <a:p>
             <a:pPr algn="ctr"/>
+            <a:endParaRPr/>
           </a:p>
         </p:txBody>
       </p:sp>
@@ -35798,6 +35665,7 @@
           <a:lstStyle/>
           <a:p>
             <a:pPr algn="ctr"/>
+            <a:endParaRPr/>
           </a:p>
         </p:txBody>
       </p:sp>
@@ -35841,6 +35709,7 @@
           <a:lstStyle/>
           <a:p>
             <a:pPr algn="ctr"/>
+            <a:endParaRPr/>
           </a:p>
         </p:txBody>
       </p:sp>
@@ -36048,7 +35917,7 @@
 </file>
 
 <file path=ppt/slides/slide43.xml><?xml version="1.0" encoding="utf-8"?>
-<p:sld xmlns:a="http://schemas.openxmlformats.org/drawingml/2006/main" xmlns:p="http://schemas.openxmlformats.org/presentationml/2006/main" xmlns:r="http://schemas.openxmlformats.org/officeDocument/2006/relationships">
+<p:sld xmlns:a="http://schemas.openxmlformats.org/drawingml/2006/main" xmlns:r="http://schemas.openxmlformats.org/officeDocument/2006/relationships" xmlns:p="http://schemas.openxmlformats.org/presentationml/2006/main">
   <p:cSld>
     <p:spTree>
       <p:nvGrpSpPr>
@@ -36056,7 +35925,14 @@
         <p:cNvGrpSpPr/>
         <p:nvPr/>
       </p:nvGrpSpPr>
-      <p:grpSpPr/>
+      <p:grpSpPr>
+        <a:xfrm>
+          <a:off x="0" y="0"/>
+          <a:ext cx="0" cy="0"/>
+          <a:chOff x="0" y="0"/>
+          <a:chExt cx="0" cy="0"/>
+        </a:xfrm>
+      </p:grpSpPr>
       <p:sp>
         <p:nvSpPr>
           <p:cNvPr id="2" name="Rectangle 1"/>
@@ -36097,6 +35973,7 @@
           <a:lstStyle/>
           <a:p>
             <a:pPr algn="ctr"/>
+            <a:endParaRPr/>
           </a:p>
         </p:txBody>
       </p:sp>
@@ -36140,6 +36017,7 @@
           <a:lstStyle/>
           <a:p>
             <a:pPr algn="ctr"/>
+            <a:endParaRPr/>
           </a:p>
         </p:txBody>
       </p:sp>
@@ -36293,6 +36171,7 @@
           <a:lstStyle/>
           <a:p>
             <a:pPr algn="ctr"/>
+            <a:endParaRPr/>
           </a:p>
         </p:txBody>
       </p:sp>
@@ -36336,6 +36215,7 @@
           <a:lstStyle/>
           <a:p>
             <a:pPr algn="ctr"/>
+            <a:endParaRPr/>
           </a:p>
         </p:txBody>
       </p:sp>
@@ -36384,15 +36264,15 @@
         <p:spPr>
           <a:xfrm>
             <a:off x="914400" y="2450592"/>
-            <a:ext cx="3035808" cy="2834639"/>
-          </a:xfrm>
-          <a:prstGeom prst="rect">
-            <a:avLst/>
-          </a:prstGeom>
-          <a:noFill/>
-        </p:spPr>
-        <p:txBody>
-          <a:bodyPr wrap="none">
+            <a:ext cx="2971800" cy="1708160"/>
+          </a:xfrm>
+          <a:prstGeom prst="rect">
+            <a:avLst/>
+          </a:prstGeom>
+          <a:noFill/>
+        </p:spPr>
+        <p:txBody>
+          <a:bodyPr wrap="square">
             <a:spAutoFit/>
           </a:bodyPr>
           <a:lstStyle/>
@@ -36406,16 +36286,27 @@
               </a:defRPr>
             </a:pPr>
             <a:r>
+              <a:rPr dirty="0"/>
               <a:t>HTTPS combines safe key sharing + fast data exchange.</a:t>
             </a:r>
-            <a:br/>
-            <a:br/>
-            <a:r>
+            <a:br>
+              <a:rPr dirty="0"/>
+            </a:br>
+            <a:br>
+              <a:rPr dirty="0"/>
+            </a:br>
+            <a:r>
+              <a:rPr dirty="0"/>
               <a:t>MFA combines different factors.</a:t>
             </a:r>
-            <a:br/>
-            <a:br/>
-            <a:r>
+            <a:br>
+              <a:rPr dirty="0"/>
+            </a:br>
+            <a:br>
+              <a:rPr dirty="0"/>
+            </a:br>
+            <a:r>
+              <a:rPr dirty="0"/>
               <a:t>Security technologies work best together.</a:t>
             </a:r>
           </a:p>
@@ -36463,6 +36354,7 @@
           <a:lstStyle/>
           <a:p>
             <a:pPr algn="ctr"/>
+            <a:endParaRPr/>
           </a:p>
         </p:txBody>
       </p:sp>
@@ -36506,6 +36398,7 @@
           <a:lstStyle/>
           <a:p>
             <a:pPr algn="ctr"/>
+            <a:endParaRPr/>
           </a:p>
         </p:txBody>
       </p:sp>
@@ -36553,16 +36446,16 @@
         </p:nvSpPr>
         <p:spPr>
           <a:xfrm>
-            <a:off x="4590288" y="2450592"/>
-            <a:ext cx="3035808" cy="2834639"/>
-          </a:xfrm>
-          <a:prstGeom prst="rect">
-            <a:avLst/>
-          </a:prstGeom>
-          <a:noFill/>
-        </p:spPr>
-        <p:txBody>
-          <a:bodyPr wrap="none">
+            <a:off x="4590288" y="2172930"/>
+            <a:ext cx="2703881" cy="1938992"/>
+          </a:xfrm>
+          <a:prstGeom prst="rect">
+            <a:avLst/>
+          </a:prstGeom>
+          <a:noFill/>
+        </p:spPr>
+        <p:txBody>
+          <a:bodyPr wrap="square">
             <a:spAutoFit/>
           </a:bodyPr>
           <a:lstStyle/>
@@ -36576,16 +36469,27 @@
               </a:defRPr>
             </a:pPr>
             <a:r>
+              <a:rPr dirty="0"/>
               <a:t>Use layers: firewall + VPN + DMZ + endpoints.</a:t>
             </a:r>
-            <a:br/>
-            <a:br/>
-            <a:r>
+            <a:br>
+              <a:rPr dirty="0"/>
+            </a:br>
+            <a:br>
+              <a:rPr dirty="0"/>
+            </a:br>
+            <a:r>
+              <a:rPr dirty="0"/>
               <a:t>Defense in depth limits damage.</a:t>
             </a:r>
-            <a:br/>
-            <a:br/>
-            <a:r>
+            <a:br>
+              <a:rPr dirty="0"/>
+            </a:br>
+            <a:br>
+              <a:rPr dirty="0"/>
+            </a:br>
+            <a:r>
+              <a:rPr dirty="0"/>
               <a:t>Zero trust = verify every access.</a:t>
             </a:r>
           </a:p>
@@ -36633,6 +36537,7 @@
           <a:lstStyle/>
           <a:p>
             <a:pPr algn="ctr"/>
+            <a:endParaRPr/>
           </a:p>
         </p:txBody>
       </p:sp>
@@ -36676,6 +36581,7 @@
           <a:lstStyle/>
           <a:p>
             <a:pPr algn="ctr"/>
+            <a:endParaRPr/>
           </a:p>
         </p:txBody>
       </p:sp>
@@ -36724,15 +36630,15 @@
         <p:spPr>
           <a:xfrm>
             <a:off x="8266175" y="2450592"/>
-            <a:ext cx="3035808" cy="2834639"/>
-          </a:xfrm>
-          <a:prstGeom prst="rect">
-            <a:avLst/>
-          </a:prstGeom>
-          <a:noFill/>
-        </p:spPr>
-        <p:txBody>
-          <a:bodyPr wrap="none">
+            <a:ext cx="2889505" cy="1015663"/>
+          </a:xfrm>
+          <a:prstGeom prst="rect">
+            <a:avLst/>
+          </a:prstGeom>
+          <a:noFill/>
+        </p:spPr>
+        <p:txBody>
+          <a:bodyPr wrap="square">
             <a:spAutoFit/>
           </a:bodyPr>
           <a:lstStyle/>
@@ -36746,11 +36652,17 @@
               </a:defRPr>
             </a:pPr>
             <a:r>
+              <a:rPr dirty="0"/>
               <a:t>Prepare → Detect → Contain → Eradicate → Recover → Prevent.</a:t>
             </a:r>
-            <a:br/>
-            <a:br/>
-            <a:r>
+            <a:br>
+              <a:rPr dirty="0"/>
+            </a:br>
+            <a:br>
+              <a:rPr dirty="0"/>
+            </a:br>
+            <a:r>
+              <a:rPr dirty="0"/>
               <a:t>Risk = impact × likelihood.</a:t>
             </a:r>
           </a:p>
@@ -36801,7 +36713,7 @@
 </file>
 
 <file path=ppt/slides/slide44.xml><?xml version="1.0" encoding="utf-8"?>
-<p:sld xmlns:a="http://schemas.openxmlformats.org/drawingml/2006/main" xmlns:p="http://schemas.openxmlformats.org/presentationml/2006/main" xmlns:r="http://schemas.openxmlformats.org/officeDocument/2006/relationships">
+<p:sld xmlns:a="http://schemas.openxmlformats.org/drawingml/2006/main" xmlns:r="http://schemas.openxmlformats.org/officeDocument/2006/relationships" xmlns:p="http://schemas.openxmlformats.org/presentationml/2006/main">
   <p:cSld>
     <p:spTree>
       <p:nvGrpSpPr>
@@ -36809,7 +36721,14 @@
         <p:cNvGrpSpPr/>
         <p:nvPr/>
       </p:nvGrpSpPr>
-      <p:grpSpPr/>
+      <p:grpSpPr>
+        <a:xfrm>
+          <a:off x="0" y="0"/>
+          <a:ext cx="0" cy="0"/>
+          <a:chOff x="0" y="0"/>
+          <a:chExt cx="0" cy="0"/>
+        </a:xfrm>
+      </p:grpSpPr>
       <p:sp>
         <p:nvSpPr>
           <p:cNvPr id="2" name="Rectangle 1"/>
@@ -36850,6 +36769,7 @@
           <a:lstStyle/>
           <a:p>
             <a:pPr algn="ctr"/>
+            <a:endParaRPr/>
           </a:p>
         </p:txBody>
       </p:sp>
@@ -36893,6 +36813,7 @@
           <a:lstStyle/>
           <a:p>
             <a:pPr algn="ctr"/>
+            <a:endParaRPr/>
           </a:p>
         </p:txBody>
       </p:sp>
@@ -37169,6 +37090,7 @@
           <a:lstStyle/>
           <a:p>
             <a:pPr algn="ctr"/>
+            <a:endParaRPr/>
           </a:p>
         </p:txBody>
       </p:sp>
@@ -37212,6 +37134,7 @@
           <a:lstStyle/>
           <a:p>
             <a:pPr algn="ctr"/>
+            <a:endParaRPr/>
           </a:p>
         </p:txBody>
       </p:sp>
@@ -37260,7 +37183,7 @@
         <p:spPr>
           <a:xfrm>
             <a:off x="1188720" y="6062472"/>
-            <a:ext cx="9710928" cy="-137160"/>
+            <a:ext cx="9710928" cy="0"/>
           </a:xfrm>
           <a:prstGeom prst="rect">
             <a:avLst/>
@@ -37332,7 +37255,7 @@
 </file>
 
 <file path=ppt/slides/slide5.xml><?xml version="1.0" encoding="utf-8"?>
-<p:sld xmlns:a="http://schemas.openxmlformats.org/drawingml/2006/main" xmlns:p="http://schemas.openxmlformats.org/presentationml/2006/main" xmlns:r="http://schemas.openxmlformats.org/officeDocument/2006/relationships">
+<p:sld xmlns:a="http://schemas.openxmlformats.org/drawingml/2006/main" xmlns:r="http://schemas.openxmlformats.org/officeDocument/2006/relationships" xmlns:p="http://schemas.openxmlformats.org/presentationml/2006/main">
   <p:cSld>
     <p:spTree>
       <p:nvGrpSpPr>
@@ -37340,7 +37263,14 @@
         <p:cNvGrpSpPr/>
         <p:nvPr/>
       </p:nvGrpSpPr>
-      <p:grpSpPr/>
+      <p:grpSpPr>
+        <a:xfrm>
+          <a:off x="0" y="0"/>
+          <a:ext cx="0" cy="0"/>
+          <a:chOff x="0" y="0"/>
+          <a:chExt cx="0" cy="0"/>
+        </a:xfrm>
+      </p:grpSpPr>
       <p:sp>
         <p:nvSpPr>
           <p:cNvPr id="2" name="Rectangle 1"/>
@@ -37381,6 +37311,7 @@
           <a:lstStyle/>
           <a:p>
             <a:pPr algn="ctr"/>
+            <a:endParaRPr/>
           </a:p>
         </p:txBody>
       </p:sp>
@@ -37424,6 +37355,7 @@
           <a:lstStyle/>
           <a:p>
             <a:pPr algn="ctr"/>
+            <a:endParaRPr/>
           </a:p>
         </p:txBody>
       </p:sp>
@@ -37613,6 +37545,7 @@
           <a:lstStyle/>
           <a:p>
             <a:pPr algn="ctr"/>
+            <a:endParaRPr/>
           </a:p>
         </p:txBody>
       </p:sp>
@@ -37656,6 +37589,7 @@
           <a:lstStyle/>
           <a:p>
             <a:pPr algn="ctr"/>
+            <a:endParaRPr/>
           </a:p>
         </p:txBody>
       </p:sp>
@@ -37773,6 +37707,7 @@
           <a:lstStyle/>
           <a:p>
             <a:pPr algn="ctr"/>
+            <a:endParaRPr/>
           </a:p>
         </p:txBody>
       </p:sp>
@@ -37816,6 +37751,7 @@
           <a:lstStyle/>
           <a:p>
             <a:pPr algn="ctr"/>
+            <a:endParaRPr/>
           </a:p>
         </p:txBody>
       </p:sp>
@@ -37933,6 +37869,7 @@
           <a:lstStyle/>
           <a:p>
             <a:pPr algn="ctr"/>
+            <a:endParaRPr/>
           </a:p>
         </p:txBody>
       </p:sp>
@@ -37976,6 +37913,7 @@
           <a:lstStyle/>
           <a:p>
             <a:pPr algn="ctr"/>
+            <a:endParaRPr/>
           </a:p>
         </p:txBody>
       </p:sp>
@@ -38096,7 +38034,7 @@
 </file>
 
 <file path=ppt/slides/slide6.xml><?xml version="1.0" encoding="utf-8"?>
-<p:sld xmlns:a="http://schemas.openxmlformats.org/drawingml/2006/main" xmlns:p="http://schemas.openxmlformats.org/presentationml/2006/main" xmlns:r="http://schemas.openxmlformats.org/officeDocument/2006/relationships">
+<p:sld xmlns:a="http://schemas.openxmlformats.org/drawingml/2006/main" xmlns:r="http://schemas.openxmlformats.org/officeDocument/2006/relationships" xmlns:p="http://schemas.openxmlformats.org/presentationml/2006/main">
   <p:cSld>
     <p:spTree>
       <p:nvGrpSpPr>
@@ -38104,7 +38042,14 @@
         <p:cNvGrpSpPr/>
         <p:nvPr/>
       </p:nvGrpSpPr>
-      <p:grpSpPr/>
+      <p:grpSpPr>
+        <a:xfrm>
+          <a:off x="0" y="0"/>
+          <a:ext cx="0" cy="0"/>
+          <a:chOff x="0" y="0"/>
+          <a:chExt cx="0" cy="0"/>
+        </a:xfrm>
+      </p:grpSpPr>
       <p:sp>
         <p:nvSpPr>
           <p:cNvPr id="2" name="Rectangle 1"/>
@@ -38145,6 +38090,7 @@
           <a:lstStyle/>
           <a:p>
             <a:pPr algn="ctr"/>
+            <a:endParaRPr/>
           </a:p>
         </p:txBody>
       </p:sp>
@@ -38188,6 +38134,7 @@
           <a:lstStyle/>
           <a:p>
             <a:pPr algn="ctr"/>
+            <a:endParaRPr/>
           </a:p>
         </p:txBody>
       </p:sp>
@@ -38377,6 +38324,7 @@
           <a:lstStyle/>
           <a:p>
             <a:pPr algn="ctr"/>
+            <a:endParaRPr/>
           </a:p>
         </p:txBody>
       </p:sp>
@@ -38420,6 +38368,7 @@
           <a:lstStyle/>
           <a:p>
             <a:pPr algn="ctr"/>
+            <a:endParaRPr/>
           </a:p>
         </p:txBody>
       </p:sp>
@@ -38542,6 +38491,7 @@
           <a:lstStyle/>
           <a:p>
             <a:pPr algn="ctr"/>
+            <a:endParaRPr/>
           </a:p>
         </p:txBody>
       </p:sp>
@@ -38585,6 +38535,7 @@
           <a:lstStyle/>
           <a:p>
             <a:pPr algn="ctr"/>
+            <a:endParaRPr/>
           </a:p>
         </p:txBody>
       </p:sp>
@@ -38702,6 +38653,7 @@
           <a:lstStyle/>
           <a:p>
             <a:pPr algn="ctr"/>
+            <a:endParaRPr/>
           </a:p>
         </p:txBody>
       </p:sp>
@@ -38745,6 +38697,7 @@
           <a:lstStyle/>
           <a:p>
             <a:pPr algn="ctr"/>
+            <a:endParaRPr/>
           </a:p>
         </p:txBody>
       </p:sp>
@@ -38865,7 +38818,7 @@
 </file>
 
 <file path=ppt/slides/slide7.xml><?xml version="1.0" encoding="utf-8"?>
-<p:sld xmlns:a="http://schemas.openxmlformats.org/drawingml/2006/main" xmlns:p="http://schemas.openxmlformats.org/presentationml/2006/main" xmlns:r="http://schemas.openxmlformats.org/officeDocument/2006/relationships">
+<p:sld xmlns:a="http://schemas.openxmlformats.org/drawingml/2006/main" xmlns:r="http://schemas.openxmlformats.org/officeDocument/2006/relationships" xmlns:p="http://schemas.openxmlformats.org/presentationml/2006/main">
   <p:cSld>
     <p:spTree>
       <p:nvGrpSpPr>
@@ -38873,7 +38826,14 @@
         <p:cNvGrpSpPr/>
         <p:nvPr/>
       </p:nvGrpSpPr>
-      <p:grpSpPr/>
+      <p:grpSpPr>
+        <a:xfrm>
+          <a:off x="0" y="0"/>
+          <a:ext cx="0" cy="0"/>
+          <a:chOff x="0" y="0"/>
+          <a:chExt cx="0" cy="0"/>
+        </a:xfrm>
+      </p:grpSpPr>
       <p:sp>
         <p:nvSpPr>
           <p:cNvPr id="2" name="Rectangle 1"/>
@@ -38914,6 +38874,7 @@
           <a:lstStyle/>
           <a:p>
             <a:pPr algn="ctr"/>
+            <a:endParaRPr/>
           </a:p>
         </p:txBody>
       </p:sp>
@@ -38957,6 +38918,7 @@
           <a:lstStyle/>
           <a:p>
             <a:pPr algn="ctr"/>
+            <a:endParaRPr/>
           </a:p>
         </p:txBody>
       </p:sp>
@@ -39146,6 +39108,7 @@
           <a:lstStyle/>
           <a:p>
             <a:pPr algn="ctr"/>
+            <a:endParaRPr/>
           </a:p>
         </p:txBody>
       </p:sp>
@@ -39189,6 +39152,7 @@
           <a:lstStyle/>
           <a:p>
             <a:pPr algn="ctr"/>
+            <a:endParaRPr/>
           </a:p>
         </p:txBody>
       </p:sp>
@@ -39314,6 +39278,7 @@
           <a:lstStyle/>
           <a:p>
             <a:pPr algn="ctr"/>
+            <a:endParaRPr/>
           </a:p>
         </p:txBody>
       </p:sp>
@@ -39357,6 +39322,7 @@
           <a:lstStyle/>
           <a:p>
             <a:pPr algn="ctr"/>
+            <a:endParaRPr/>
           </a:p>
         </p:txBody>
       </p:sp>
@@ -39485,7 +39451,7 @@
 </file>
 
 <file path=ppt/slides/slide8.xml><?xml version="1.0" encoding="utf-8"?>
-<p:sld xmlns:a="http://schemas.openxmlformats.org/drawingml/2006/main" xmlns:p="http://schemas.openxmlformats.org/presentationml/2006/main" xmlns:r="http://schemas.openxmlformats.org/officeDocument/2006/relationships">
+<p:sld xmlns:a="http://schemas.openxmlformats.org/drawingml/2006/main" xmlns:r="http://schemas.openxmlformats.org/officeDocument/2006/relationships" xmlns:p="http://schemas.openxmlformats.org/presentationml/2006/main">
   <p:cSld>
     <p:spTree>
       <p:nvGrpSpPr>
@@ -39493,7 +39459,14 @@
         <p:cNvGrpSpPr/>
         <p:nvPr/>
       </p:nvGrpSpPr>
-      <p:grpSpPr/>
+      <p:grpSpPr>
+        <a:xfrm>
+          <a:off x="0" y="0"/>
+          <a:ext cx="0" cy="0"/>
+          <a:chOff x="0" y="0"/>
+          <a:chExt cx="0" cy="0"/>
+        </a:xfrm>
+      </p:grpSpPr>
       <p:sp>
         <p:nvSpPr>
           <p:cNvPr id="2" name="Rectangle 1"/>
@@ -39534,6 +39507,7 @@
           <a:lstStyle/>
           <a:p>
             <a:pPr algn="ctr"/>
+            <a:endParaRPr/>
           </a:p>
         </p:txBody>
       </p:sp>
@@ -39577,6 +39551,7 @@
           <a:lstStyle/>
           <a:p>
             <a:pPr algn="ctr"/>
+            <a:endParaRPr/>
           </a:p>
         </p:txBody>
       </p:sp>
@@ -39766,6 +39741,7 @@
           <a:lstStyle/>
           <a:p>
             <a:pPr algn="ctr"/>
+            <a:endParaRPr/>
           </a:p>
         </p:txBody>
       </p:sp>
@@ -39809,6 +39785,7 @@
           <a:lstStyle/>
           <a:p>
             <a:pPr algn="ctr"/>
+            <a:endParaRPr/>
           </a:p>
         </p:txBody>
       </p:sp>
@@ -39961,6 +39938,7 @@
           <a:lstStyle/>
           <a:p>
             <a:pPr algn="ctr"/>
+            <a:endParaRPr/>
           </a:p>
         </p:txBody>
       </p:sp>
@@ -40004,6 +39982,7 @@
           <a:lstStyle/>
           <a:p>
             <a:pPr algn="ctr"/>
+            <a:endParaRPr/>
           </a:p>
         </p:txBody>
       </p:sp>
@@ -40156,6 +40135,7 @@
           <a:lstStyle/>
           <a:p>
             <a:pPr algn="ctr"/>
+            <a:endParaRPr/>
           </a:p>
         </p:txBody>
       </p:sp>
@@ -40199,6 +40179,7 @@
           <a:lstStyle/>
           <a:p>
             <a:pPr algn="ctr"/>
+            <a:endParaRPr/>
           </a:p>
         </p:txBody>
       </p:sp>
@@ -40351,6 +40332,7 @@
           <a:lstStyle/>
           <a:p>
             <a:pPr algn="ctr"/>
+            <a:endParaRPr/>
           </a:p>
         </p:txBody>
       </p:sp>
@@ -40394,6 +40376,7 @@
           <a:lstStyle/>
           <a:p>
             <a:pPr algn="ctr"/>
+            <a:endParaRPr/>
           </a:p>
         </p:txBody>
       </p:sp>
@@ -40546,6 +40529,7 @@
           <a:lstStyle/>
           <a:p>
             <a:pPr algn="ctr"/>
+            <a:endParaRPr/>
           </a:p>
         </p:txBody>
       </p:sp>
@@ -40589,6 +40573,7 @@
           <a:lstStyle/>
           <a:p>
             <a:pPr algn="ctr"/>
+            <a:endParaRPr/>
           </a:p>
         </p:txBody>
       </p:sp>
@@ -40706,6 +40691,7 @@
           <a:lstStyle/>
           <a:p>
             <a:pPr algn="ctr"/>
+            <a:endParaRPr/>
           </a:p>
         </p:txBody>
       </p:sp>
@@ -40749,6 +40735,7 @@
           <a:lstStyle/>
           <a:p>
             <a:pPr algn="ctr"/>
+            <a:endParaRPr/>
           </a:p>
         </p:txBody>
       </p:sp>
@@ -40869,7 +40856,7 @@
 </file>
 
 <file path=ppt/slides/slide9.xml><?xml version="1.0" encoding="utf-8"?>
-<p:sld xmlns:a="http://schemas.openxmlformats.org/drawingml/2006/main" xmlns:p="http://schemas.openxmlformats.org/presentationml/2006/main" xmlns:r="http://schemas.openxmlformats.org/officeDocument/2006/relationships">
+<p:sld xmlns:a="http://schemas.openxmlformats.org/drawingml/2006/main" xmlns:r="http://schemas.openxmlformats.org/officeDocument/2006/relationships" xmlns:p="http://schemas.openxmlformats.org/presentationml/2006/main">
   <p:cSld>
     <p:spTree>
       <p:nvGrpSpPr>
@@ -40877,7 +40864,14 @@
         <p:cNvGrpSpPr/>
         <p:nvPr/>
       </p:nvGrpSpPr>
-      <p:grpSpPr/>
+      <p:grpSpPr>
+        <a:xfrm>
+          <a:off x="0" y="0"/>
+          <a:ext cx="0" cy="0"/>
+          <a:chOff x="0" y="0"/>
+          <a:chExt cx="0" cy="0"/>
+        </a:xfrm>
+      </p:grpSpPr>
       <p:sp>
         <p:nvSpPr>
           <p:cNvPr id="2" name="Rectangle 1"/>
@@ -40918,6 +40912,7 @@
           <a:lstStyle/>
           <a:p>
             <a:pPr algn="ctr"/>
+            <a:endParaRPr/>
           </a:p>
         </p:txBody>
       </p:sp>
@@ -40961,6 +40956,7 @@
           <a:lstStyle/>
           <a:p>
             <a:pPr algn="ctr"/>
+            <a:endParaRPr/>
           </a:p>
         </p:txBody>
       </p:sp>
@@ -41150,6 +41146,7 @@
           <a:lstStyle/>
           <a:p>
             <a:pPr algn="ctr"/>
+            <a:endParaRPr/>
           </a:p>
         </p:txBody>
       </p:sp>
@@ -41193,6 +41190,7 @@
           <a:lstStyle/>
           <a:p>
             <a:pPr algn="ctr"/>
+            <a:endParaRPr/>
           </a:p>
         </p:txBody>
       </p:sp>
@@ -41315,6 +41313,7 @@
           <a:lstStyle/>
           <a:p>
             <a:pPr algn="ctr"/>
+            <a:endParaRPr/>
           </a:p>
         </p:txBody>
       </p:sp>
@@ -41358,6 +41357,7 @@
           <a:lstStyle/>
           <a:p>
             <a:pPr algn="ctr"/>
+            <a:endParaRPr/>
           </a:p>
         </p:txBody>
       </p:sp>
@@ -41480,6 +41480,7 @@
           <a:lstStyle/>
           <a:p>
             <a:pPr algn="ctr"/>
+            <a:endParaRPr/>
           </a:p>
         </p:txBody>
       </p:sp>
@@ -41523,6 +41524,7 @@
           <a:lstStyle/>
           <a:p>
             <a:pPr algn="ctr"/>
+            <a:endParaRPr/>
           </a:p>
         </p:txBody>
       </p:sp>
